--- a/AI関与スコア_算出方法_説明資料.pptx
+++ b/AI関与スコア_算出方法_説明資料.pptx
@@ -11,10 +11,6 @@
     <p:sldId id="259" r:id="rId10"/>
     <p:sldId id="260" r:id="rId11"/>
     <p:sldId id="261" r:id="rId12"/>
-    <p:sldId id="262" r:id="rId13"/>
-    <p:sldId id="263" r:id="rId14"/>
-    <p:sldId id="264" r:id="rId15"/>
-    <p:sldId id="265" r:id="rId16"/>
   </p:sldIdLst>
   <p:sldSz cx="12191695" cy="6858000" type="screen4x3"/>
   <p:notesSz cx="6858000" cy="9144000"/>
@@ -3112,7 +3108,7 @@
             <a:avLst/>
           </a:prstGeom>
           <a:solidFill>
-            <a:srgbClr val="1F335E"/>
+            <a:srgbClr val="FFFFFF"/>
           </a:solidFill>
           <a:ln>
             <a:noFill/>
@@ -3149,14 +3145,14 @@
         </p:nvSpPr>
         <p:spPr>
           <a:xfrm>
-            <a:off x="0" y="2331720"/>
-            <a:ext cx="12191695" cy="2103120"/>
+            <a:off x="0" y="2148840"/>
+            <a:ext cx="12191695" cy="38100"/>
           </a:xfrm>
           <a:prstGeom prst="rect">
             <a:avLst/>
           </a:prstGeom>
           <a:solidFill>
-            <a:srgbClr val="2E5CA6"/>
+            <a:srgbClr val="3E8C7C"/>
           </a:solidFill>
           <a:ln>
             <a:noFill/>
@@ -3187,120 +3183,20 @@
       </p:sp>
       <p:sp>
         <p:nvSpPr>
-          <p:cNvPr id="4" name="TextBox 3"/>
-          <p:cNvSpPr txBox="1"/>
-          <p:nvPr/>
-        </p:nvSpPr>
-        <p:spPr>
-          <a:xfrm>
-            <a:off x="731520" y="2468880"/>
-            <a:ext cx="10698480" cy="1828800"/>
-          </a:xfrm>
-          <a:prstGeom prst="rect">
-            <a:avLst/>
-          </a:prstGeom>
-          <a:noFill/>
-        </p:spPr>
-        <p:txBody>
-          <a:bodyPr wrap="none" anchor="ctr">
-            <a:spAutoFit/>
-          </a:bodyPr>
-          <a:lstStyle/>
-          <a:p>
-            <a:pPr algn="ctr"/>
-            <a:r>
-              <a:rPr sz="4000" b="1">
-                <a:solidFill>
-                  <a:srgbClr val="FFFFFF"/>
-                </a:solidFill>
-                <a:latin typeface="Meiryo"/>
-              </a:rPr>
-              <a:t>AI関与スコア　算出方法 説明資料</a:t>
-            </a:r>
-          </a:p>
-          <a:p>
-            <a:pPr algn="ctr"/>
-            <a:r>
-              <a:rPr sz="2000" b="0">
-                <a:solidFill>
-                  <a:srgbClr val="FFFFFF"/>
-                </a:solidFill>
-                <a:latin typeface="Meiryo"/>
-              </a:rPr>
-              <a:t>― 作文が生成AIで書かれた可能性を、どう判定しているか ―</a:t>
-            </a:r>
-          </a:p>
-        </p:txBody>
-      </p:sp>
-      <p:sp>
-        <p:nvSpPr>
-          <p:cNvPr id="5" name="TextBox 4"/>
-          <p:cNvSpPr txBox="1"/>
-          <p:nvPr/>
-        </p:nvSpPr>
-        <p:spPr>
-          <a:xfrm>
-            <a:off x="731520" y="5669280"/>
-            <a:ext cx="10698480" cy="731520"/>
-          </a:xfrm>
-          <a:prstGeom prst="rect">
-            <a:avLst/>
-          </a:prstGeom>
-          <a:noFill/>
-        </p:spPr>
-        <p:txBody>
-          <a:bodyPr wrap="none">
-            <a:spAutoFit/>
-          </a:bodyPr>
-          <a:lstStyle/>
-          <a:p>
-            <a:pPr algn="ctr"/>
-            <a:r>
-              <a:rPr sz="1400" b="0">
-                <a:solidFill>
-                  <a:srgbClr val="CFD8E8"/>
-                </a:solidFill>
-                <a:latin typeface="Meiryo"/>
-              </a:rPr>
-              <a:t>2026年6月15日　／　経営層向け報告　／　位置づけ：参考指標（断定ではない）</a:t>
-            </a:r>
-          </a:p>
-        </p:txBody>
-      </p:sp>
-    </p:spTree>
-  </p:cSld>
-  <p:clrMapOvr>
-    <a:masterClrMapping/>
-  </p:clrMapOvr>
-</p:sld>
-</file>
-
-<file path=ppt/slides/slide10.xml><?xml version="1.0" encoding="utf-8"?>
-<p:sld xmlns:a="http://schemas.openxmlformats.org/drawingml/2006/main" xmlns:p="http://schemas.openxmlformats.org/presentationml/2006/main" xmlns:r="http://schemas.openxmlformats.org/officeDocument/2006/relationships">
-  <p:cSld>
-    <p:spTree>
-      <p:nvGrpSpPr>
-        <p:cNvPr id="1" name=""/>
-        <p:cNvGrpSpPr/>
-        <p:nvPr/>
-      </p:nvGrpSpPr>
-      <p:grpSpPr/>
-      <p:sp>
-        <p:nvSpPr>
-          <p:cNvPr id="2" name="Rectangle 1"/>
+          <p:cNvPr id="4" name="Rectangle 3"/>
           <p:cNvSpPr/>
           <p:nvPr/>
         </p:nvSpPr>
         <p:spPr>
           <a:xfrm>
-            <a:off x="0" y="0"/>
-            <a:ext cx="12191695" cy="1005840"/>
+            <a:off x="0" y="3977639"/>
+            <a:ext cx="12191695" cy="38100"/>
           </a:xfrm>
           <a:prstGeom prst="rect">
             <a:avLst/>
           </a:prstGeom>
           <a:solidFill>
-            <a:srgbClr val="1F335E"/>
+            <a:srgbClr val="3E8C7C"/>
           </a:solidFill>
           <a:ln>
             <a:noFill/>
@@ -3331,92 +3227,14 @@
       </p:sp>
       <p:sp>
         <p:nvSpPr>
-          <p:cNvPr id="3" name="Rectangle 2"/>
-          <p:cNvSpPr/>
-          <p:nvPr/>
-        </p:nvSpPr>
-        <p:spPr>
-          <a:xfrm>
-            <a:off x="0" y="1005840"/>
-            <a:ext cx="12191695" cy="40000"/>
-          </a:xfrm>
-          <a:prstGeom prst="rect">
-            <a:avLst/>
-          </a:prstGeom>
-          <a:solidFill>
-            <a:srgbClr val="2E5CA6"/>
-          </a:solidFill>
-          <a:ln>
-            <a:noFill/>
-          </a:ln>
-          <a:effectLst/>
-        </p:spPr>
-        <p:style>
-          <a:lnRef idx="1">
-            <a:schemeClr val="accent1"/>
-          </a:lnRef>
-          <a:fillRef idx="3">
-            <a:schemeClr val="accent1"/>
-          </a:fillRef>
-          <a:effectRef idx="2">
-            <a:schemeClr val="accent1"/>
-          </a:effectRef>
-          <a:fontRef idx="minor">
-            <a:schemeClr val="lt1"/>
-          </a:fontRef>
-        </p:style>
-        <p:txBody>
-          <a:bodyPr rtlCol="0" anchor="ctr"/>
-          <a:lstStyle/>
-          <a:p>
-            <a:pPr algn="ctr"/>
-          </a:p>
-        </p:txBody>
-      </p:sp>
-      <p:sp>
-        <p:nvSpPr>
-          <p:cNvPr id="4" name="TextBox 3"/>
-          <p:cNvSpPr txBox="1"/>
-          <p:nvPr/>
-        </p:nvSpPr>
-        <p:spPr>
-          <a:xfrm>
-            <a:off x="457200" y="164592"/>
-            <a:ext cx="10515600" cy="731520"/>
-          </a:xfrm>
-          <a:prstGeom prst="rect">
-            <a:avLst/>
-          </a:prstGeom>
-          <a:noFill/>
-        </p:spPr>
-        <p:txBody>
-          <a:bodyPr wrap="none" anchor="ctr">
-            <a:spAutoFit/>
-          </a:bodyPr>
-          <a:lstStyle/>
-          <a:p>
-            <a:r>
-              <a:rPr sz="2800" b="1">
-                <a:solidFill>
-                  <a:srgbClr val="FFFFFF"/>
-                </a:solidFill>
-                <a:latin typeface="Meiryo"/>
-              </a:rPr>
-              <a:t>8. 想定問答（社長質問への回答案）</a:t>
-            </a:r>
-          </a:p>
-        </p:txBody>
-      </p:sp>
-      <p:sp>
-        <p:nvSpPr>
           <p:cNvPr id="5" name="TextBox 4"/>
           <p:cNvSpPr txBox="1"/>
           <p:nvPr/>
         </p:nvSpPr>
         <p:spPr>
           <a:xfrm>
-            <a:off x="11338560" y="164592"/>
-            <a:ext cx="640080" cy="731520"/>
+            <a:off x="822960" y="2377440"/>
+            <a:ext cx="10515600" cy="1554480"/>
           </a:xfrm>
           <a:prstGeom prst="rect">
             <a:avLst/>
@@ -3424,20 +3242,71 @@
           <a:noFill/>
         </p:spPr>
         <p:txBody>
-          <a:bodyPr wrap="none" anchor="ctr">
+          <a:bodyPr wrap="square" lIns="0" rIns="0" tIns="0" bIns="0" anchor="ctr">
             <a:spAutoFit/>
           </a:bodyPr>
           <a:lstStyle/>
           <a:p>
-            <a:pPr algn="r"/>
-            <a:r>
-              <a:rPr sz="1600" b="0">
-                <a:solidFill>
-                  <a:srgbClr val="FFFFFF"/>
-                </a:solidFill>
-                <a:latin typeface="Meiryo"/>
-              </a:rPr>
-              <a:t>10</a:t>
+            <a:pPr algn="ctr">
+              <a:spcBef>
+                <a:spcPts val="0"/>
+              </a:spcBef>
+              <a:spcAft>
+                <a:spcPts val="800"/>
+              </a:spcAft>
+            </a:pPr>
+            <a:r>
+              <a:rPr sz="3400">
+                <a:solidFill>
+                  <a:srgbClr val="1A1A1A"/>
+                </a:solidFill>
+                <a:latin typeface="ヒラギノ角ゴ ProN W6"/>
+                <a:ea typeface="ヒラギノ角ゴ ProN W6"/>
+                <a:cs typeface="ヒラギノ角ゴ ProN W6"/>
+              </a:rPr>
+              <a:t>AI関与スコア　算出方法 説明資料</a:t>
+            </a:r>
+          </a:p>
+          <a:p>
+            <a:pPr algn="ctr">
+              <a:spcBef>
+                <a:spcPts val="0"/>
+              </a:spcBef>
+              <a:spcAft>
+                <a:spcPts val="0"/>
+              </a:spcAft>
+            </a:pPr>
+            <a:r>
+              <a:rPr sz="1800">
+                <a:solidFill>
+                  <a:srgbClr val="3E8C7C"/>
+                </a:solidFill>
+                <a:latin typeface="ヒラギノ角ゴ ProN W6"/>
+                <a:ea typeface="ヒラギノ角ゴ ProN W6"/>
+                <a:cs typeface="ヒラギノ角ゴ ProN W6"/>
+              </a:rPr>
+              <a:t>作文が生成AIで書かれた可能性を、</a:t>
+            </a:r>
+          </a:p>
+          <a:p>
+            <a:pPr algn="ctr">
+              <a:spcBef>
+                <a:spcPts val="0"/>
+              </a:spcBef>
+              <a:spcAft>
+                <a:spcPts val="400"/>
+              </a:spcAft>
+            </a:pPr>
+            <a:r>
+              <a:rPr sz="1800">
+                <a:solidFill>
+                  <a:srgbClr val="3E8C7C"/>
+                </a:solidFill>
+                <a:latin typeface="ヒラギノ角ゴ ProN W6"/>
+                <a:ea typeface="ヒラギノ角ゴ ProN W6"/>
+                <a:cs typeface="ヒラギノ角ゴ ProN W6"/>
+              </a:rPr>
+              <a:t>どのように判定しているか</a:t>
             </a:r>
           </a:p>
         </p:txBody>
@@ -3450,8 +3319,8 @@
         </p:nvSpPr>
         <p:spPr>
           <a:xfrm>
-            <a:off x="548640" y="1325880"/>
-            <a:ext cx="11064240" cy="457200"/>
+            <a:off x="822960" y="4937760"/>
+            <a:ext cx="10515600" cy="914400"/>
           </a:xfrm>
           <a:prstGeom prst="rect">
             <a:avLst/>
@@ -3459,189 +3328,50 @@
           <a:noFill/>
         </p:spPr>
         <p:txBody>
-          <a:bodyPr wrap="square">
+          <a:bodyPr wrap="square" lIns="0" rIns="0" tIns="0" bIns="0">
             <a:spAutoFit/>
           </a:bodyPr>
           <a:lstStyle/>
           <a:p>
-            <a:r>
-              <a:rPr sz="1700" b="1">
-                <a:solidFill>
-                  <a:srgbClr val="1F335E"/>
-                </a:solidFill>
-                <a:latin typeface="Meiryo"/>
-              </a:rPr>
-              <a:t>Q. どうやってAIが書いたか／自分で考えたかを判断しているのか？</a:t>
-            </a:r>
-          </a:p>
-        </p:txBody>
-      </p:sp>
-      <p:sp>
-        <p:nvSpPr>
-          <p:cNvPr id="7" name="TextBox 6"/>
-          <p:cNvSpPr txBox="1"/>
-          <p:nvPr/>
-        </p:nvSpPr>
-        <p:spPr>
-          <a:xfrm>
-            <a:off x="731520" y="1783080"/>
-            <a:ext cx="10881360" cy="1097280"/>
-          </a:xfrm>
-          <a:prstGeom prst="rect">
-            <a:avLst/>
-          </a:prstGeom>
-          <a:noFill/>
-        </p:spPr>
-        <p:txBody>
-          <a:bodyPr wrap="square">
-            <a:spAutoFit/>
-          </a:bodyPr>
-          <a:lstStyle/>
-          <a:p>
-            <a:r>
-              <a:rPr sz="1400" b="0">
-                <a:solidFill>
-                  <a:srgbClr val="555555"/>
-                </a:solidFill>
-                <a:latin typeface="Meiryo"/>
-              </a:rPr>
-              <a:t>A. 専用の生成AIに全作文を同一基準で読ませ、「本人の体験が見えるか」「整いすぎていないか」「AI特有の定型表現・均質な構成が続いていないか」の3観点で、0〜100のスコアと根拠3点を出力。機械的計算ではなく、基準を固定した採点者（AI）による見立てです。</a:t>
-            </a:r>
-          </a:p>
-        </p:txBody>
-      </p:sp>
-      <p:sp>
-        <p:nvSpPr>
-          <p:cNvPr id="8" name="TextBox 7"/>
-          <p:cNvSpPr txBox="1"/>
-          <p:nvPr/>
-        </p:nvSpPr>
-        <p:spPr>
-          <a:xfrm>
-            <a:off x="548640" y="3017520"/>
-            <a:ext cx="11064240" cy="457200"/>
-          </a:xfrm>
-          <a:prstGeom prst="rect">
-            <a:avLst/>
-          </a:prstGeom>
-          <a:noFill/>
-        </p:spPr>
-        <p:txBody>
-          <a:bodyPr wrap="square">
-            <a:spAutoFit/>
-          </a:bodyPr>
-          <a:lstStyle/>
-          <a:p>
-            <a:r>
-              <a:rPr sz="1700" b="1">
-                <a:solidFill>
-                  <a:srgbClr val="1F335E"/>
-                </a:solidFill>
-                <a:latin typeface="Meiryo"/>
-              </a:rPr>
-              <a:t>Q. うまい作文をAI扱いしてしまわないか？</a:t>
-            </a:r>
-          </a:p>
-        </p:txBody>
-      </p:sp>
-      <p:sp>
-        <p:nvSpPr>
-          <p:cNvPr id="9" name="TextBox 8"/>
-          <p:cNvSpPr txBox="1"/>
-          <p:nvPr/>
-        </p:nvSpPr>
-        <p:spPr>
-          <a:xfrm>
-            <a:off x="731520" y="3474720"/>
-            <a:ext cx="10881360" cy="1097280"/>
-          </a:xfrm>
-          <a:prstGeom prst="rect">
-            <a:avLst/>
-          </a:prstGeom>
-          <a:noFill/>
-        </p:spPr>
-        <p:txBody>
-          <a:bodyPr wrap="square">
-            <a:spAutoFit/>
-          </a:bodyPr>
-          <a:lstStyle/>
-          <a:p>
-            <a:r>
-              <a:rPr sz="1400" b="0">
-                <a:solidFill>
-                  <a:srgbClr val="555555"/>
-                </a:solidFill>
-                <a:latin typeface="Meiryo"/>
-              </a:rPr>
-              <a:t>A. 「上手い／整っている／誤字が少ない」等の単独特徴だけでは高スコアにしないルールを明示。高スコアは複数の根拠がそろった場合のみです。</a:t>
-            </a:r>
-          </a:p>
-        </p:txBody>
-      </p:sp>
-      <p:sp>
-        <p:nvSpPr>
-          <p:cNvPr id="10" name="TextBox 9"/>
-          <p:cNvSpPr txBox="1"/>
-          <p:nvPr/>
-        </p:nvSpPr>
-        <p:spPr>
-          <a:xfrm>
-            <a:off x="548640" y="4709160"/>
-            <a:ext cx="11064240" cy="457200"/>
-          </a:xfrm>
-          <a:prstGeom prst="rect">
-            <a:avLst/>
-          </a:prstGeom>
-          <a:noFill/>
-        </p:spPr>
-        <p:txBody>
-          <a:bodyPr wrap="square">
-            <a:spAutoFit/>
-          </a:bodyPr>
-          <a:lstStyle/>
-          <a:p>
-            <a:r>
-              <a:rPr sz="1700" b="1">
-                <a:solidFill>
-                  <a:srgbClr val="1F335E"/>
-                </a:solidFill>
-                <a:latin typeface="Meiryo"/>
-              </a:rPr>
-              <a:t>Q. このスコアで処分や合否を決めてよいか？</a:t>
-            </a:r>
-          </a:p>
-        </p:txBody>
-      </p:sp>
-      <p:sp>
-        <p:nvSpPr>
-          <p:cNvPr id="11" name="TextBox 10"/>
-          <p:cNvSpPr txBox="1"/>
-          <p:nvPr/>
-        </p:nvSpPr>
-        <p:spPr>
-          <a:xfrm>
-            <a:off x="731520" y="5166360"/>
-            <a:ext cx="10881360" cy="1097280"/>
-          </a:xfrm>
-          <a:prstGeom prst="rect">
-            <a:avLst/>
-          </a:prstGeom>
-          <a:noFill/>
-        </p:spPr>
-        <p:txBody>
-          <a:bodyPr wrap="square">
-            <a:spAutoFit/>
-          </a:bodyPr>
-          <a:lstStyle/>
-          <a:p>
-            <a:r>
-              <a:rPr sz="1400" b="0">
-                <a:solidFill>
-                  <a:srgbClr val="555555"/>
-                </a:solidFill>
-                <a:latin typeface="Meiryo"/>
-              </a:rPr>
-              <a:t>A. いいえ。スクリーニング用の参考指標です。高スコアを抽出し、最終的には根拠と原文を人が確認して判断する運用を想定しています。</a:t>
+            <a:pPr algn="ctr">
+              <a:spcBef>
+                <a:spcPts val="0"/>
+              </a:spcBef>
+              <a:spcAft>
+                <a:spcPts val="300"/>
+              </a:spcAft>
+            </a:pPr>
+            <a:r>
+              <a:rPr sz="1300">
+                <a:solidFill>
+                  <a:srgbClr val="1A1A1A"/>
+                </a:solidFill>
+                <a:latin typeface="ヒラギノ角ゴ ProN W3"/>
+                <a:ea typeface="ヒラギノ角ゴ ProN W3"/>
+                <a:cs typeface="ヒラギノ角ゴ ProN W3"/>
+              </a:rPr>
+              <a:t>社長決裁資料　／　2026年6月15日</a:t>
+            </a:r>
+          </a:p>
+          <a:p>
+            <a:pPr algn="ctr">
+              <a:spcBef>
+                <a:spcPts val="0"/>
+              </a:spcBef>
+              <a:spcAft>
+                <a:spcPts val="400"/>
+              </a:spcAft>
+            </a:pPr>
+            <a:r>
+              <a:rPr sz="1300">
+                <a:solidFill>
+                  <a:srgbClr val="1A1A1A"/>
+                </a:solidFill>
+                <a:latin typeface="ヒラギノ角ゴ ProN W3"/>
+                <a:ea typeface="ヒラギノ角ゴ ProN W3"/>
+                <a:cs typeface="ヒラギノ角ゴ ProN W3"/>
+              </a:rPr>
+              <a:t>位置づけ：参考指標（断定ではなく、人による最終判断を前提とする）</a:t>
             </a:r>
           </a:p>
         </p:txBody>
@@ -3672,14 +3402,14 @@
         </p:nvSpPr>
         <p:spPr>
           <a:xfrm>
-            <a:off x="0" y="0"/>
-            <a:ext cx="12191695" cy="1005840"/>
+            <a:off x="0" y="411480"/>
+            <a:ext cx="146304" cy="566928"/>
           </a:xfrm>
           <a:prstGeom prst="rect">
             <a:avLst/>
           </a:prstGeom>
           <a:solidFill>
-            <a:srgbClr val="1F335E"/>
+            <a:srgbClr val="3E8C7C"/>
           </a:solidFill>
           <a:ln>
             <a:noFill/>
@@ -3710,20 +3440,64 @@
       </p:sp>
       <p:sp>
         <p:nvSpPr>
-          <p:cNvPr id="3" name="Rectangle 2"/>
+          <p:cNvPr id="3" name="TextBox 2"/>
+          <p:cNvSpPr txBox="1"/>
+          <p:nvPr/>
+        </p:nvSpPr>
+        <p:spPr>
+          <a:xfrm>
+            <a:off x="411480" y="365760"/>
+            <a:ext cx="10607040" cy="685800"/>
+          </a:xfrm>
+          <a:prstGeom prst="rect">
+            <a:avLst/>
+          </a:prstGeom>
+          <a:noFill/>
+        </p:spPr>
+        <p:txBody>
+          <a:bodyPr wrap="square" lIns="0" rIns="0" tIns="0" bIns="0" anchor="ctr">
+            <a:spAutoFit/>
+          </a:bodyPr>
+          <a:lstStyle/>
+          <a:p>
+            <a:pPr algn="l">
+              <a:spcBef>
+                <a:spcPts val="0"/>
+              </a:spcBef>
+              <a:spcAft>
+                <a:spcPts val="400"/>
+              </a:spcAft>
+            </a:pPr>
+            <a:r>
+              <a:rPr sz="2400">
+                <a:solidFill>
+                  <a:srgbClr val="1A1A1A"/>
+                </a:solidFill>
+                <a:latin typeface="ヒラギノ角ゴ ProN W6"/>
+                <a:ea typeface="ヒラギノ角ゴ ProN W6"/>
+                <a:cs typeface="ヒラギノ角ゴ ProN W6"/>
+              </a:rPr>
+              <a:t>結論 — 何を、どう判定しているか</a:t>
+            </a:r>
+          </a:p>
+        </p:txBody>
+      </p:sp>
+      <p:sp>
+        <p:nvSpPr>
+          <p:cNvPr id="4" name="Rectangle 3"/>
           <p:cNvSpPr/>
           <p:nvPr/>
         </p:nvSpPr>
         <p:spPr>
           <a:xfrm>
-            <a:off x="0" y="1005840"/>
-            <a:ext cx="12191695" cy="40000"/>
+            <a:off x="411480" y="1115568"/>
+            <a:ext cx="11384280" cy="27940"/>
           </a:xfrm>
           <a:prstGeom prst="rect">
             <a:avLst/>
           </a:prstGeom>
           <a:solidFill>
-            <a:srgbClr val="2E5CA6"/>
+            <a:srgbClr val="3E8C7C"/>
           </a:solidFill>
           <a:ln>
             <a:noFill/>
@@ -3754,48 +3528,14 @@
       </p:sp>
       <p:sp>
         <p:nvSpPr>
-          <p:cNvPr id="4" name="TextBox 3"/>
-          <p:cNvSpPr txBox="1"/>
-          <p:nvPr/>
-        </p:nvSpPr>
-        <p:spPr>
-          <a:xfrm>
-            <a:off x="457200" y="164592"/>
-            <a:ext cx="10515600" cy="731520"/>
-          </a:xfrm>
-          <a:prstGeom prst="rect">
-            <a:avLst/>
-          </a:prstGeom>
-          <a:noFill/>
-        </p:spPr>
-        <p:txBody>
-          <a:bodyPr wrap="none" anchor="ctr">
-            <a:spAutoFit/>
-          </a:bodyPr>
-          <a:lstStyle/>
-          <a:p>
-            <a:r>
-              <a:rPr sz="2800" b="1">
-                <a:solidFill>
-                  <a:srgbClr val="FFFFFF"/>
-                </a:solidFill>
-                <a:latin typeface="Meiryo"/>
-              </a:rPr>
-              <a:t>結論（先に要点）</a:t>
-            </a:r>
-          </a:p>
-        </p:txBody>
-      </p:sp>
-      <p:sp>
-        <p:nvSpPr>
           <p:cNvPr id="5" name="TextBox 4"/>
           <p:cNvSpPr txBox="1"/>
           <p:nvPr/>
         </p:nvSpPr>
         <p:spPr>
           <a:xfrm>
-            <a:off x="11338560" y="164592"/>
-            <a:ext cx="640080" cy="731520"/>
+            <a:off x="11430000" y="457200"/>
+            <a:ext cx="548640" cy="457200"/>
           </a:xfrm>
           <a:prstGeom prst="rect">
             <a:avLst/>
@@ -3803,18 +3543,27 @@
           <a:noFill/>
         </p:spPr>
         <p:txBody>
-          <a:bodyPr wrap="none" anchor="ctr">
+          <a:bodyPr wrap="square" lIns="0" rIns="0" tIns="0" bIns="0">
             <a:spAutoFit/>
           </a:bodyPr>
           <a:lstStyle/>
           <a:p>
-            <a:pPr algn="r"/>
-            <a:r>
-              <a:rPr sz="1600" b="0">
-                <a:solidFill>
-                  <a:srgbClr val="FFFFFF"/>
-                </a:solidFill>
-                <a:latin typeface="Meiryo"/>
+            <a:pPr algn="r">
+              <a:spcBef>
+                <a:spcPts val="0"/>
+              </a:spcBef>
+              <a:spcAft>
+                <a:spcPts val="400"/>
+              </a:spcAft>
+            </a:pPr>
+            <a:r>
+              <a:rPr sz="1200">
+                <a:solidFill>
+                  <a:srgbClr val="3E8C7C"/>
+                </a:solidFill>
+                <a:latin typeface="ヒラギノ角ゴ ProN W6"/>
+                <a:ea typeface="ヒラギノ角ゴ ProN W6"/>
+                <a:cs typeface="ヒラギノ角ゴ ProN W6"/>
               </a:rPr>
               <a:t>2</a:t>
             </a:r>
@@ -3823,14 +3572,58 @@
       </p:sp>
       <p:sp>
         <p:nvSpPr>
-          <p:cNvPr id="6" name="TextBox 5"/>
+          <p:cNvPr id="6" name="Rectangle 5"/>
+          <p:cNvSpPr/>
+          <p:nvPr/>
+        </p:nvSpPr>
+        <p:spPr>
+          <a:xfrm>
+            <a:off x="411480" y="1325880"/>
+            <a:ext cx="5989320" cy="5074920"/>
+          </a:xfrm>
+          <a:prstGeom prst="rect">
+            <a:avLst/>
+          </a:prstGeom>
+          <a:solidFill>
+            <a:srgbClr val="F1F7F5"/>
+          </a:solidFill>
+          <a:ln>
+            <a:noFill/>
+          </a:ln>
+          <a:effectLst/>
+        </p:spPr>
+        <p:style>
+          <a:lnRef idx="1">
+            <a:schemeClr val="accent1"/>
+          </a:lnRef>
+          <a:fillRef idx="3">
+            <a:schemeClr val="accent1"/>
+          </a:fillRef>
+          <a:effectRef idx="2">
+            <a:schemeClr val="accent1"/>
+          </a:effectRef>
+          <a:fontRef idx="minor">
+            <a:schemeClr val="lt1"/>
+          </a:fontRef>
+        </p:style>
+        <p:txBody>
+          <a:bodyPr rtlCol="0" anchor="ctr"/>
+          <a:lstStyle/>
+          <a:p>
+            <a:pPr algn="ctr"/>
+          </a:p>
+        </p:txBody>
+      </p:sp>
+      <p:sp>
+        <p:nvSpPr>
+          <p:cNvPr id="7" name="TextBox 6"/>
           <p:cNvSpPr txBox="1"/>
           <p:nvPr/>
         </p:nvSpPr>
         <p:spPr>
           <a:xfrm>
-            <a:off x="640080" y="1325880"/>
-            <a:ext cx="10881360" cy="5120640"/>
+            <a:off x="640080" y="1508760"/>
+            <a:ext cx="5577840" cy="4754880"/>
           </a:xfrm>
           <a:prstGeom prst="rect">
             <a:avLst/>
@@ -3838,152 +3631,1025 @@
           <a:noFill/>
         </p:spPr>
         <p:txBody>
-          <a:bodyPr wrap="square">
+          <a:bodyPr wrap="square" lIns="0" rIns="0" tIns="0" bIns="0">
             <a:spAutoFit/>
           </a:bodyPr>
           <a:lstStyle/>
           <a:p>
-            <a:pPr>
+            <a:pPr algn="l">
+              <a:spcBef>
+                <a:spcPts val="0"/>
+              </a:spcBef>
               <a:spcAft>
                 <a:spcPts val="800"/>
               </a:spcAft>
             </a:pPr>
             <a:r>
-              <a:rPr sz="1800" b="1">
-                <a:solidFill>
-                  <a:srgbClr val="1F335E"/>
-                </a:solidFill>
-                <a:latin typeface="Meiryo"/>
-              </a:rPr>
-              <a:t>● 「AIが書いたか／自分で考えたか」を断定するものではありません。</a:t>
-            </a:r>
-          </a:p>
-          <a:p>
-            <a:pPr lvl="1">
-              <a:spcAft>
-                <a:spcPts val="800"/>
-              </a:spcAft>
-            </a:pPr>
-            <a:r>
-              <a:rPr sz="1600" b="0">
-                <a:solidFill>
-                  <a:srgbClr val="555555"/>
-                </a:solidFill>
-                <a:latin typeface="Meiryo"/>
-              </a:rPr>
-              <a:t>－ 生成AIへの「丸写し・大部分の写し」の“可能性の高さ”を 0〜100 で示す参考指標です。</a:t>
-            </a:r>
-          </a:p>
-          <a:p>
-            <a:pPr>
-              <a:spcAft>
-                <a:spcPts val="800"/>
-              </a:spcAft>
-            </a:pPr>
-            <a:r>
-              <a:rPr sz="1800" b="1">
-                <a:solidFill>
-                  <a:srgbClr val="1F335E"/>
-                </a:solidFill>
-                <a:latin typeface="Meiryo"/>
-              </a:rPr>
-              <a:t>● 数値は統計式や検出器による機械的な計算ではありません。</a:t>
-            </a:r>
-          </a:p>
-          <a:p>
-            <a:pPr lvl="1">
-              <a:spcAft>
-                <a:spcPts val="800"/>
-              </a:spcAft>
-            </a:pPr>
-            <a:r>
-              <a:rPr sz="1600" b="0">
-                <a:solidFill>
-                  <a:srgbClr val="555555"/>
-                </a:solidFill>
-                <a:latin typeface="Meiryo"/>
-              </a:rPr>
-              <a:t>－ 判定用の生成AI（LLM）が、各作文を“同一の評価基準”で読み、点数を付けています。</a:t>
-            </a:r>
-          </a:p>
-          <a:p>
-            <a:pPr lvl="1">
-              <a:spcAft>
-                <a:spcPts val="800"/>
-              </a:spcAft>
-            </a:pPr>
-            <a:r>
-              <a:rPr sz="1600" b="0">
-                <a:solidFill>
-                  <a:srgbClr val="555555"/>
-                </a:solidFill>
-                <a:latin typeface="Meiryo"/>
-              </a:rPr>
-              <a:t>－ ＝「採点ルールを固定した採点者（AI）に、全員分を同じ物差しで読ませている」仕組み。</a:t>
-            </a:r>
-          </a:p>
-          <a:p>
-            <a:pPr>
-              <a:spcAft>
-                <a:spcPts val="800"/>
-              </a:spcAft>
-            </a:pPr>
-            <a:r>
-              <a:rPr sz="1800" b="1">
-                <a:solidFill>
-                  <a:srgbClr val="1F335E"/>
-                </a:solidFill>
-                <a:latin typeface="Meiryo"/>
-              </a:rPr>
-              <a:t>● 判定の核心は、次の3点を見ていることです。</a:t>
-            </a:r>
-          </a:p>
-          <a:p>
-            <a:pPr lvl="1">
-              <a:spcAft>
-                <a:spcPts val="800"/>
-              </a:spcAft>
-            </a:pPr>
-            <a:r>
-              <a:rPr sz="1600" b="1">
-                <a:solidFill>
-                  <a:srgbClr val="2E5CA6"/>
-                </a:solidFill>
-                <a:latin typeface="Meiryo"/>
-              </a:rPr>
-              <a:t>－ ① 本人の体験・実感・固有性が見えるか</a:t>
-            </a:r>
-          </a:p>
-          <a:p>
-            <a:pPr lvl="1">
-              <a:spcAft>
-                <a:spcPts val="800"/>
-              </a:spcAft>
-            </a:pPr>
-            <a:r>
-              <a:rPr sz="1600" b="1">
-                <a:solidFill>
-                  <a:srgbClr val="2E5CA6"/>
-                </a:solidFill>
-                <a:latin typeface="Meiryo"/>
-              </a:rPr>
-              <a:t>－ ② 文章が整いすぎていないか</a:t>
-            </a:r>
-          </a:p>
-          <a:p>
-            <a:pPr lvl="1">
-              <a:spcAft>
-                <a:spcPts val="800"/>
-              </a:spcAft>
-            </a:pPr>
-            <a:r>
-              <a:rPr sz="1600" b="1">
-                <a:solidFill>
-                  <a:srgbClr val="2E5CA6"/>
-                </a:solidFill>
-                <a:latin typeface="Meiryo"/>
-              </a:rPr>
-              <a:t>－ ③ AI特有の抽象論・定型表現・均質な構成が続いていないか</a:t>
+              <a:rPr sz="1600">
+                <a:solidFill>
+                  <a:srgbClr val="3E8C7C"/>
+                </a:solidFill>
+                <a:latin typeface="ヒラギノ角ゴ ProN W6"/>
+                <a:ea typeface="ヒラギノ角ゴ ProN W6"/>
+                <a:cs typeface="ヒラギノ角ゴ ProN W6"/>
+              </a:rPr>
+              <a:t>結論（要点）</a:t>
+            </a:r>
+          </a:p>
+          <a:p>
+            <a:pPr algn="l">
+              <a:spcBef>
+                <a:spcPts val="0"/>
+              </a:spcBef>
+              <a:spcAft>
+                <a:spcPts val="0"/>
+              </a:spcAft>
+            </a:pPr>
+            <a:r>
+              <a:rPr sz="1300">
+                <a:solidFill>
+                  <a:srgbClr val="1A1A1A"/>
+                </a:solidFill>
+                <a:latin typeface="ヒラギノ角ゴ ProN W3"/>
+                <a:ea typeface="ヒラギノ角ゴ ProN W3"/>
+                <a:cs typeface="ヒラギノ角ゴ ProN W3"/>
+              </a:rPr>
+              <a:t>① 「AIが書いたか／自分で考えたか」を</a:t>
+            </a:r>
+          </a:p>
+          <a:p>
+            <a:pPr algn="l">
+              <a:spcBef>
+                <a:spcPts val="0"/>
+              </a:spcBef>
+              <a:spcAft>
+                <a:spcPts val="200"/>
+              </a:spcAft>
+            </a:pPr>
+            <a:r>
+              <a:rPr sz="1300">
+                <a:solidFill>
+                  <a:srgbClr val="1A1A1A"/>
+                </a:solidFill>
+                <a:latin typeface="ヒラギノ角ゴ ProN W3"/>
+                <a:ea typeface="ヒラギノ角ゴ ProN W3"/>
+                <a:cs typeface="ヒラギノ角ゴ ProN W3"/>
+              </a:rPr>
+              <a:t>　 断定するものではありません。</a:t>
+            </a:r>
+          </a:p>
+          <a:p>
+            <a:pPr algn="l">
+              <a:spcBef>
+                <a:spcPts val="0"/>
+              </a:spcBef>
+              <a:spcAft>
+                <a:spcPts val="0"/>
+              </a:spcAft>
+            </a:pPr>
+            <a:r>
+              <a:rPr sz="1300">
+                <a:solidFill>
+                  <a:srgbClr val="1A1A1A"/>
+                </a:solidFill>
+                <a:latin typeface="ヒラギノ角ゴ ProN W3"/>
+                <a:ea typeface="ヒラギノ角ゴ ProN W3"/>
+                <a:cs typeface="ヒラギノ角ゴ ProN W3"/>
+              </a:rPr>
+              <a:t>　 “丸写しの可能性”を 0〜100 で示す</a:t>
+            </a:r>
+          </a:p>
+          <a:p>
+            <a:pPr algn="l">
+              <a:spcBef>
+                <a:spcPts val="0"/>
+              </a:spcBef>
+              <a:spcAft>
+                <a:spcPts val="1000"/>
+              </a:spcAft>
+            </a:pPr>
+            <a:r>
+              <a:rPr sz="1300">
+                <a:solidFill>
+                  <a:srgbClr val="1A1A1A"/>
+                </a:solidFill>
+                <a:latin typeface="ヒラギノ角ゴ ProN W3"/>
+                <a:ea typeface="ヒラギノ角ゴ ProN W3"/>
+                <a:cs typeface="ヒラギノ角ゴ ProN W3"/>
+              </a:rPr>
+              <a:t>　 参考指標です。</a:t>
+            </a:r>
+          </a:p>
+          <a:p>
+            <a:pPr algn="l">
+              <a:spcBef>
+                <a:spcPts val="0"/>
+              </a:spcBef>
+              <a:spcAft>
+                <a:spcPts val="0"/>
+              </a:spcAft>
+            </a:pPr>
+            <a:r>
+              <a:rPr sz="1300">
+                <a:solidFill>
+                  <a:srgbClr val="1A1A1A"/>
+                </a:solidFill>
+                <a:latin typeface="ヒラギノ角ゴ ProN W3"/>
+                <a:ea typeface="ヒラギノ角ゴ ProN W3"/>
+                <a:cs typeface="ヒラギノ角ゴ ProN W3"/>
+              </a:rPr>
+              <a:t>② 統計式や検出器による</a:t>
+            </a:r>
+          </a:p>
+          <a:p>
+            <a:pPr algn="l">
+              <a:spcBef>
+                <a:spcPts val="0"/>
+              </a:spcBef>
+              <a:spcAft>
+                <a:spcPts val="200"/>
+              </a:spcAft>
+            </a:pPr>
+            <a:r>
+              <a:rPr sz="1300">
+                <a:solidFill>
+                  <a:srgbClr val="1A1A1A"/>
+                </a:solidFill>
+                <a:latin typeface="ヒラギノ角ゴ ProN W3"/>
+                <a:ea typeface="ヒラギノ角ゴ ProN W3"/>
+                <a:cs typeface="ヒラギノ角ゴ ProN W3"/>
+              </a:rPr>
+              <a:t>　 機械的な計算ではありません。</a:t>
+            </a:r>
+          </a:p>
+          <a:p>
+            <a:pPr algn="l">
+              <a:spcBef>
+                <a:spcPts val="0"/>
+              </a:spcBef>
+              <a:spcAft>
+                <a:spcPts val="0"/>
+              </a:spcAft>
+            </a:pPr>
+            <a:r>
+              <a:rPr sz="1300">
+                <a:solidFill>
+                  <a:srgbClr val="1A1A1A"/>
+                </a:solidFill>
+                <a:latin typeface="ヒラギノ角ゴ ProN W3"/>
+                <a:ea typeface="ヒラギノ角ゴ ProN W3"/>
+                <a:cs typeface="ヒラギノ角ゴ ProN W3"/>
+              </a:rPr>
+              <a:t>　 判定用の生成AI（LLM）が、全作文を</a:t>
+            </a:r>
+          </a:p>
+          <a:p>
+            <a:pPr algn="l">
+              <a:spcBef>
+                <a:spcPts val="0"/>
+              </a:spcBef>
+              <a:spcAft>
+                <a:spcPts val="1000"/>
+              </a:spcAft>
+            </a:pPr>
+            <a:r>
+              <a:rPr sz="1300">
+                <a:solidFill>
+                  <a:srgbClr val="1A1A1A"/>
+                </a:solidFill>
+                <a:latin typeface="ヒラギノ角ゴ ProN W3"/>
+                <a:ea typeface="ヒラギノ角ゴ ProN W3"/>
+                <a:cs typeface="ヒラギノ角ゴ ProN W3"/>
+              </a:rPr>
+              <a:t>　 同一の基準で読み、点数を付けています。</a:t>
+            </a:r>
+          </a:p>
+          <a:p>
+            <a:pPr algn="l">
+              <a:spcBef>
+                <a:spcPts val="0"/>
+              </a:spcBef>
+              <a:spcAft>
+                <a:spcPts val="200"/>
+              </a:spcAft>
+            </a:pPr>
+            <a:r>
+              <a:rPr sz="1300">
+                <a:solidFill>
+                  <a:srgbClr val="1A1A1A"/>
+                </a:solidFill>
+                <a:latin typeface="ヒラギノ角ゴ ProN W3"/>
+                <a:ea typeface="ヒラギノ角ゴ ProN W3"/>
+                <a:cs typeface="ヒラギノ角ゴ ProN W3"/>
+              </a:rPr>
+              <a:t>③ 見ているのは次の3点です。</a:t>
+            </a:r>
+          </a:p>
+          <a:p>
+            <a:pPr algn="l">
+              <a:spcBef>
+                <a:spcPts val="0"/>
+              </a:spcBef>
+              <a:spcAft>
+                <a:spcPts val="0"/>
+              </a:spcAft>
+            </a:pPr>
+            <a:r>
+              <a:rPr sz="1300">
+                <a:solidFill>
+                  <a:srgbClr val="1A1A1A"/>
+                </a:solidFill>
+                <a:latin typeface="ヒラギノ角ゴ ProN W3"/>
+                <a:ea typeface="ヒラギノ角ゴ ProN W3"/>
+                <a:cs typeface="ヒラギノ角ゴ ProN W3"/>
+              </a:rPr>
+              <a:t>　・本人の体験・実感・固有性が見えるか</a:t>
+            </a:r>
+          </a:p>
+          <a:p>
+            <a:pPr algn="l">
+              <a:spcBef>
+                <a:spcPts val="0"/>
+              </a:spcBef>
+              <a:spcAft>
+                <a:spcPts val="0"/>
+              </a:spcAft>
+            </a:pPr>
+            <a:r>
+              <a:rPr sz="1300">
+                <a:solidFill>
+                  <a:srgbClr val="1A1A1A"/>
+                </a:solidFill>
+                <a:latin typeface="ヒラギノ角ゴ ProN W3"/>
+                <a:ea typeface="ヒラギノ角ゴ ProN W3"/>
+                <a:cs typeface="ヒラギノ角ゴ ProN W3"/>
+              </a:rPr>
+              <a:t>　・文章が整いすぎていないか</a:t>
+            </a:r>
+          </a:p>
+          <a:p>
+            <a:pPr algn="l">
+              <a:spcBef>
+                <a:spcPts val="0"/>
+              </a:spcBef>
+              <a:spcAft>
+                <a:spcPts val="0"/>
+              </a:spcAft>
+            </a:pPr>
+            <a:r>
+              <a:rPr sz="1300">
+                <a:solidFill>
+                  <a:srgbClr val="1A1A1A"/>
+                </a:solidFill>
+                <a:latin typeface="ヒラギノ角ゴ ProN W3"/>
+                <a:ea typeface="ヒラギノ角ゴ ProN W3"/>
+                <a:cs typeface="ヒラギノ角ゴ ProN W3"/>
+              </a:rPr>
+              <a:t>　・AI特有の抽象論や定型表現、</a:t>
+            </a:r>
+          </a:p>
+          <a:p>
+            <a:pPr algn="l">
+              <a:spcBef>
+                <a:spcPts val="0"/>
+              </a:spcBef>
+              <a:spcAft>
+                <a:spcPts val="0"/>
+              </a:spcAft>
+            </a:pPr>
+            <a:r>
+              <a:rPr sz="1300">
+                <a:solidFill>
+                  <a:srgbClr val="1A1A1A"/>
+                </a:solidFill>
+                <a:latin typeface="ヒラギノ角ゴ ProN W3"/>
+                <a:ea typeface="ヒラギノ角ゴ ProN W3"/>
+                <a:cs typeface="ヒラギノ角ゴ ProN W3"/>
+              </a:rPr>
+              <a:t>　　均質な構成が続いていないか</a:t>
+            </a:r>
+          </a:p>
+        </p:txBody>
+      </p:sp>
+      <p:sp>
+        <p:nvSpPr>
+          <p:cNvPr id="8" name="TextBox 7"/>
+          <p:cNvSpPr txBox="1"/>
+          <p:nvPr/>
+        </p:nvSpPr>
+        <p:spPr>
+          <a:xfrm>
+            <a:off x="6675120" y="1371600"/>
+            <a:ext cx="5120640" cy="365760"/>
+          </a:xfrm>
+          <a:prstGeom prst="rect">
+            <a:avLst/>
+          </a:prstGeom>
+          <a:noFill/>
+        </p:spPr>
+        <p:txBody>
+          <a:bodyPr wrap="square" lIns="0" rIns="0" tIns="0" bIns="0">
+            <a:spAutoFit/>
+          </a:bodyPr>
+          <a:lstStyle/>
+          <a:p>
+            <a:pPr algn="l">
+              <a:spcBef>
+                <a:spcPts val="0"/>
+              </a:spcBef>
+              <a:spcAft>
+                <a:spcPts val="400"/>
+              </a:spcAft>
+            </a:pPr>
+            <a:r>
+              <a:rPr sz="1600">
+                <a:solidFill>
+                  <a:srgbClr val="3E8C7C"/>
+                </a:solidFill>
+                <a:latin typeface="ヒラギノ角ゴ ProN W6"/>
+                <a:ea typeface="ヒラギノ角ゴ ProN W6"/>
+                <a:cs typeface="ヒラギノ角ゴ ProN W6"/>
+              </a:rPr>
+              <a:t>スコアの意味（0〜100の整数）</a:t>
+            </a:r>
+          </a:p>
+        </p:txBody>
+      </p:sp>
+      <p:sp>
+        <p:nvSpPr>
+          <p:cNvPr id="9" name="Rectangle 8"/>
+          <p:cNvSpPr/>
+          <p:nvPr/>
+        </p:nvSpPr>
+        <p:spPr>
+          <a:xfrm>
+            <a:off x="6675120" y="1874519"/>
+            <a:ext cx="1645920" cy="658368"/>
+          </a:xfrm>
+          <a:prstGeom prst="rect">
+            <a:avLst/>
+          </a:prstGeom>
+          <a:solidFill>
+            <a:srgbClr val="2E7D57"/>
+          </a:solidFill>
+          <a:ln>
+            <a:noFill/>
+          </a:ln>
+          <a:effectLst/>
+        </p:spPr>
+        <p:style>
+          <a:lnRef idx="1">
+            <a:schemeClr val="accent1"/>
+          </a:lnRef>
+          <a:fillRef idx="3">
+            <a:schemeClr val="accent1"/>
+          </a:fillRef>
+          <a:effectRef idx="2">
+            <a:schemeClr val="accent1"/>
+          </a:effectRef>
+          <a:fontRef idx="minor">
+            <a:schemeClr val="lt1"/>
+          </a:fontRef>
+        </p:style>
+        <p:txBody>
+          <a:bodyPr rtlCol="0" anchor="ctr"/>
+          <a:lstStyle/>
+          <a:p>
+            <a:pPr algn="ctr"/>
+          </a:p>
+        </p:txBody>
+      </p:sp>
+      <p:sp>
+        <p:nvSpPr>
+          <p:cNvPr id="10" name="TextBox 9"/>
+          <p:cNvSpPr txBox="1"/>
+          <p:nvPr/>
+        </p:nvSpPr>
+        <p:spPr>
+          <a:xfrm>
+            <a:off x="6675120" y="1874519"/>
+            <a:ext cx="1645920" cy="658368"/>
+          </a:xfrm>
+          <a:prstGeom prst="rect">
+            <a:avLst/>
+          </a:prstGeom>
+          <a:noFill/>
+        </p:spPr>
+        <p:txBody>
+          <a:bodyPr wrap="square" lIns="0" rIns="0" tIns="0" bIns="0" anchor="ctr">
+            <a:spAutoFit/>
+          </a:bodyPr>
+          <a:lstStyle/>
+          <a:p>
+            <a:pPr algn="ctr">
+              <a:spcBef>
+                <a:spcPts val="0"/>
+              </a:spcBef>
+              <a:spcAft>
+                <a:spcPts val="400"/>
+              </a:spcAft>
+            </a:pPr>
+            <a:r>
+              <a:rPr sz="1500">
+                <a:solidFill>
+                  <a:srgbClr val="FFFFFF"/>
+                </a:solidFill>
+                <a:latin typeface="ヒラギノ角ゴ ProN W6"/>
+                <a:ea typeface="ヒラギノ角ゴ ProN W6"/>
+                <a:cs typeface="ヒラギノ角ゴ ProN W6"/>
+              </a:rPr>
+              <a:t>0〜30</a:t>
+            </a:r>
+          </a:p>
+        </p:txBody>
+      </p:sp>
+      <p:sp>
+        <p:nvSpPr>
+          <p:cNvPr id="11" name="TextBox 10"/>
+          <p:cNvSpPr txBox="1"/>
+          <p:nvPr/>
+        </p:nvSpPr>
+        <p:spPr>
+          <a:xfrm>
+            <a:off x="8458200" y="1874519"/>
+            <a:ext cx="3337560" cy="658368"/>
+          </a:xfrm>
+          <a:prstGeom prst="rect">
+            <a:avLst/>
+          </a:prstGeom>
+          <a:noFill/>
+        </p:spPr>
+        <p:txBody>
+          <a:bodyPr wrap="square" lIns="0" rIns="0" tIns="0" bIns="0" anchor="ctr">
+            <a:spAutoFit/>
+          </a:bodyPr>
+          <a:lstStyle/>
+          <a:p>
+            <a:pPr algn="l">
+              <a:spcBef>
+                <a:spcPts val="0"/>
+              </a:spcBef>
+              <a:spcAft>
+                <a:spcPts val="400"/>
+              </a:spcAft>
+            </a:pPr>
+            <a:r>
+              <a:rPr sz="1300">
+                <a:solidFill>
+                  <a:srgbClr val="1A1A1A"/>
+                </a:solidFill>
+                <a:latin typeface="ヒラギノ角ゴ ProN W3"/>
+                <a:ea typeface="ヒラギノ角ゴ ProN W3"/>
+                <a:cs typeface="ヒラギノ角ゴ ProN W3"/>
+              </a:rPr>
+              <a:t>書き写した可能性は低い</a:t>
+            </a:r>
+          </a:p>
+        </p:txBody>
+      </p:sp>
+      <p:sp>
+        <p:nvSpPr>
+          <p:cNvPr id="12" name="Rectangle 11"/>
+          <p:cNvSpPr/>
+          <p:nvPr/>
+        </p:nvSpPr>
+        <p:spPr>
+          <a:xfrm>
+            <a:off x="6675120" y="2624327"/>
+            <a:ext cx="1645920" cy="658368"/>
+          </a:xfrm>
+          <a:prstGeom prst="rect">
+            <a:avLst/>
+          </a:prstGeom>
+          <a:solidFill>
+            <a:srgbClr val="3E8C7C"/>
+          </a:solidFill>
+          <a:ln>
+            <a:noFill/>
+          </a:ln>
+          <a:effectLst/>
+        </p:spPr>
+        <p:style>
+          <a:lnRef idx="1">
+            <a:schemeClr val="accent1"/>
+          </a:lnRef>
+          <a:fillRef idx="3">
+            <a:schemeClr val="accent1"/>
+          </a:fillRef>
+          <a:effectRef idx="2">
+            <a:schemeClr val="accent1"/>
+          </a:effectRef>
+          <a:fontRef idx="minor">
+            <a:schemeClr val="lt1"/>
+          </a:fontRef>
+        </p:style>
+        <p:txBody>
+          <a:bodyPr rtlCol="0" anchor="ctr"/>
+          <a:lstStyle/>
+          <a:p>
+            <a:pPr algn="ctr"/>
+          </a:p>
+        </p:txBody>
+      </p:sp>
+      <p:sp>
+        <p:nvSpPr>
+          <p:cNvPr id="13" name="TextBox 12"/>
+          <p:cNvSpPr txBox="1"/>
+          <p:nvPr/>
+        </p:nvSpPr>
+        <p:spPr>
+          <a:xfrm>
+            <a:off x="6675120" y="2624327"/>
+            <a:ext cx="1645920" cy="658368"/>
+          </a:xfrm>
+          <a:prstGeom prst="rect">
+            <a:avLst/>
+          </a:prstGeom>
+          <a:noFill/>
+        </p:spPr>
+        <p:txBody>
+          <a:bodyPr wrap="square" lIns="0" rIns="0" tIns="0" bIns="0" anchor="ctr">
+            <a:spAutoFit/>
+          </a:bodyPr>
+          <a:lstStyle/>
+          <a:p>
+            <a:pPr algn="ctr">
+              <a:spcBef>
+                <a:spcPts val="0"/>
+              </a:spcBef>
+              <a:spcAft>
+                <a:spcPts val="400"/>
+              </a:spcAft>
+            </a:pPr>
+            <a:r>
+              <a:rPr sz="1500">
+                <a:solidFill>
+                  <a:srgbClr val="FFFFFF"/>
+                </a:solidFill>
+                <a:latin typeface="ヒラギノ角ゴ ProN W6"/>
+                <a:ea typeface="ヒラギノ角ゴ ProN W6"/>
+                <a:cs typeface="ヒラギノ角ゴ ProN W6"/>
+              </a:rPr>
+              <a:t>31〜60</a:t>
+            </a:r>
+          </a:p>
+        </p:txBody>
+      </p:sp>
+      <p:sp>
+        <p:nvSpPr>
+          <p:cNvPr id="14" name="TextBox 13"/>
+          <p:cNvSpPr txBox="1"/>
+          <p:nvPr/>
+        </p:nvSpPr>
+        <p:spPr>
+          <a:xfrm>
+            <a:off x="8458200" y="2624327"/>
+            <a:ext cx="3337560" cy="658368"/>
+          </a:xfrm>
+          <a:prstGeom prst="rect">
+            <a:avLst/>
+          </a:prstGeom>
+          <a:noFill/>
+        </p:spPr>
+        <p:txBody>
+          <a:bodyPr wrap="square" lIns="0" rIns="0" tIns="0" bIns="0" anchor="ctr">
+            <a:spAutoFit/>
+          </a:bodyPr>
+          <a:lstStyle/>
+          <a:p>
+            <a:pPr algn="l">
+              <a:spcBef>
+                <a:spcPts val="0"/>
+              </a:spcBef>
+              <a:spcAft>
+                <a:spcPts val="400"/>
+              </a:spcAft>
+            </a:pPr>
+            <a:r>
+              <a:rPr sz="1300">
+                <a:solidFill>
+                  <a:srgbClr val="1A1A1A"/>
+                </a:solidFill>
+                <a:latin typeface="ヒラギノ角ゴ ProN W3"/>
+                <a:ea typeface="ヒラギノ角ゴ ProN W3"/>
+                <a:cs typeface="ヒラギノ角ゴ ProN W3"/>
+              </a:rPr>
+              <a:t>一部参考にした／判定困難</a:t>
+            </a:r>
+          </a:p>
+        </p:txBody>
+      </p:sp>
+      <p:sp>
+        <p:nvSpPr>
+          <p:cNvPr id="15" name="Rectangle 14"/>
+          <p:cNvSpPr/>
+          <p:nvPr/>
+        </p:nvSpPr>
+        <p:spPr>
+          <a:xfrm>
+            <a:off x="6675120" y="3374135"/>
+            <a:ext cx="1645920" cy="658368"/>
+          </a:xfrm>
+          <a:prstGeom prst="rect">
+            <a:avLst/>
+          </a:prstGeom>
+          <a:solidFill>
+            <a:srgbClr val="C28A2B"/>
+          </a:solidFill>
+          <a:ln>
+            <a:noFill/>
+          </a:ln>
+          <a:effectLst/>
+        </p:spPr>
+        <p:style>
+          <a:lnRef idx="1">
+            <a:schemeClr val="accent1"/>
+          </a:lnRef>
+          <a:fillRef idx="3">
+            <a:schemeClr val="accent1"/>
+          </a:fillRef>
+          <a:effectRef idx="2">
+            <a:schemeClr val="accent1"/>
+          </a:effectRef>
+          <a:fontRef idx="minor">
+            <a:schemeClr val="lt1"/>
+          </a:fontRef>
+        </p:style>
+        <p:txBody>
+          <a:bodyPr rtlCol="0" anchor="ctr"/>
+          <a:lstStyle/>
+          <a:p>
+            <a:pPr algn="ctr"/>
+          </a:p>
+        </p:txBody>
+      </p:sp>
+      <p:sp>
+        <p:nvSpPr>
+          <p:cNvPr id="16" name="TextBox 15"/>
+          <p:cNvSpPr txBox="1"/>
+          <p:nvPr/>
+        </p:nvSpPr>
+        <p:spPr>
+          <a:xfrm>
+            <a:off x="6675120" y="3374135"/>
+            <a:ext cx="1645920" cy="658368"/>
+          </a:xfrm>
+          <a:prstGeom prst="rect">
+            <a:avLst/>
+          </a:prstGeom>
+          <a:noFill/>
+        </p:spPr>
+        <p:txBody>
+          <a:bodyPr wrap="square" lIns="0" rIns="0" tIns="0" bIns="0" anchor="ctr">
+            <a:spAutoFit/>
+          </a:bodyPr>
+          <a:lstStyle/>
+          <a:p>
+            <a:pPr algn="ctr">
+              <a:spcBef>
+                <a:spcPts val="0"/>
+              </a:spcBef>
+              <a:spcAft>
+                <a:spcPts val="400"/>
+              </a:spcAft>
+            </a:pPr>
+            <a:r>
+              <a:rPr sz="1500">
+                <a:solidFill>
+                  <a:srgbClr val="FFFFFF"/>
+                </a:solidFill>
+                <a:latin typeface="ヒラギノ角ゴ ProN W6"/>
+                <a:ea typeface="ヒラギノ角ゴ ProN W6"/>
+                <a:cs typeface="ヒラギノ角ゴ ProN W6"/>
+              </a:rPr>
+              <a:t>61〜80</a:t>
+            </a:r>
+          </a:p>
+        </p:txBody>
+      </p:sp>
+      <p:sp>
+        <p:nvSpPr>
+          <p:cNvPr id="17" name="TextBox 16"/>
+          <p:cNvSpPr txBox="1"/>
+          <p:nvPr/>
+        </p:nvSpPr>
+        <p:spPr>
+          <a:xfrm>
+            <a:off x="8458200" y="3374135"/>
+            <a:ext cx="3337560" cy="658368"/>
+          </a:xfrm>
+          <a:prstGeom prst="rect">
+            <a:avLst/>
+          </a:prstGeom>
+          <a:noFill/>
+        </p:spPr>
+        <p:txBody>
+          <a:bodyPr wrap="square" lIns="0" rIns="0" tIns="0" bIns="0" anchor="ctr">
+            <a:spAutoFit/>
+          </a:bodyPr>
+          <a:lstStyle/>
+          <a:p>
+            <a:pPr algn="l">
+              <a:spcBef>
+                <a:spcPts val="0"/>
+              </a:spcBef>
+              <a:spcAft>
+                <a:spcPts val="400"/>
+              </a:spcAft>
+            </a:pPr>
+            <a:r>
+              <a:rPr sz="1300">
+                <a:solidFill>
+                  <a:srgbClr val="1A1A1A"/>
+                </a:solidFill>
+                <a:latin typeface="ヒラギノ角ゴ ProN W3"/>
+                <a:ea typeface="ヒラギノ角ゴ ProN W3"/>
+                <a:cs typeface="ヒラギノ角ゴ ProN W3"/>
+              </a:rPr>
+              <a:t>可能性がやや高い</a:t>
+            </a:r>
+          </a:p>
+        </p:txBody>
+      </p:sp>
+      <p:sp>
+        <p:nvSpPr>
+          <p:cNvPr id="18" name="Rectangle 17"/>
+          <p:cNvSpPr/>
+          <p:nvPr/>
+        </p:nvSpPr>
+        <p:spPr>
+          <a:xfrm>
+            <a:off x="6675120" y="4123943"/>
+            <a:ext cx="1645920" cy="658368"/>
+          </a:xfrm>
+          <a:prstGeom prst="rect">
+            <a:avLst/>
+          </a:prstGeom>
+          <a:solidFill>
+            <a:srgbClr val="B33A2E"/>
+          </a:solidFill>
+          <a:ln>
+            <a:noFill/>
+          </a:ln>
+          <a:effectLst/>
+        </p:spPr>
+        <p:style>
+          <a:lnRef idx="1">
+            <a:schemeClr val="accent1"/>
+          </a:lnRef>
+          <a:fillRef idx="3">
+            <a:schemeClr val="accent1"/>
+          </a:fillRef>
+          <a:effectRef idx="2">
+            <a:schemeClr val="accent1"/>
+          </a:effectRef>
+          <a:fontRef idx="minor">
+            <a:schemeClr val="lt1"/>
+          </a:fontRef>
+        </p:style>
+        <p:txBody>
+          <a:bodyPr rtlCol="0" anchor="ctr"/>
+          <a:lstStyle/>
+          <a:p>
+            <a:pPr algn="ctr"/>
+          </a:p>
+        </p:txBody>
+      </p:sp>
+      <p:sp>
+        <p:nvSpPr>
+          <p:cNvPr id="19" name="TextBox 18"/>
+          <p:cNvSpPr txBox="1"/>
+          <p:nvPr/>
+        </p:nvSpPr>
+        <p:spPr>
+          <a:xfrm>
+            <a:off x="6675120" y="4123943"/>
+            <a:ext cx="1645920" cy="658368"/>
+          </a:xfrm>
+          <a:prstGeom prst="rect">
+            <a:avLst/>
+          </a:prstGeom>
+          <a:noFill/>
+        </p:spPr>
+        <p:txBody>
+          <a:bodyPr wrap="square" lIns="0" rIns="0" tIns="0" bIns="0" anchor="ctr">
+            <a:spAutoFit/>
+          </a:bodyPr>
+          <a:lstStyle/>
+          <a:p>
+            <a:pPr algn="ctr">
+              <a:spcBef>
+                <a:spcPts val="0"/>
+              </a:spcBef>
+              <a:spcAft>
+                <a:spcPts val="400"/>
+              </a:spcAft>
+            </a:pPr>
+            <a:r>
+              <a:rPr sz="1500">
+                <a:solidFill>
+                  <a:srgbClr val="FFFFFF"/>
+                </a:solidFill>
+                <a:latin typeface="ヒラギノ角ゴ ProN W6"/>
+                <a:ea typeface="ヒラギノ角ゴ ProN W6"/>
+                <a:cs typeface="ヒラギノ角ゴ ProN W6"/>
+              </a:rPr>
+              <a:t>81〜100</a:t>
+            </a:r>
+          </a:p>
+        </p:txBody>
+      </p:sp>
+      <p:sp>
+        <p:nvSpPr>
+          <p:cNvPr id="20" name="TextBox 19"/>
+          <p:cNvSpPr txBox="1"/>
+          <p:nvPr/>
+        </p:nvSpPr>
+        <p:spPr>
+          <a:xfrm>
+            <a:off x="8458200" y="4123943"/>
+            <a:ext cx="3337560" cy="658368"/>
+          </a:xfrm>
+          <a:prstGeom prst="rect">
+            <a:avLst/>
+          </a:prstGeom>
+          <a:noFill/>
+        </p:spPr>
+        <p:txBody>
+          <a:bodyPr wrap="square" lIns="0" rIns="0" tIns="0" bIns="0" anchor="ctr">
+            <a:spAutoFit/>
+          </a:bodyPr>
+          <a:lstStyle/>
+          <a:p>
+            <a:pPr algn="l">
+              <a:spcBef>
+                <a:spcPts val="0"/>
+              </a:spcBef>
+              <a:spcAft>
+                <a:spcPts val="400"/>
+              </a:spcAft>
+            </a:pPr>
+            <a:r>
+              <a:rPr sz="1300">
+                <a:solidFill>
+                  <a:srgbClr val="1A1A1A"/>
+                </a:solidFill>
+                <a:latin typeface="ヒラギノ角ゴ ProN W3"/>
+                <a:ea typeface="ヒラギノ角ゴ ProN W3"/>
+                <a:cs typeface="ヒラギノ角ゴ ProN W3"/>
+              </a:rPr>
+              <a:t>可能性が高い</a:t>
+            </a:r>
+          </a:p>
+        </p:txBody>
+      </p:sp>
+      <p:sp>
+        <p:nvSpPr>
+          <p:cNvPr id="21" name="Rectangle 20"/>
+          <p:cNvSpPr/>
+          <p:nvPr/>
+        </p:nvSpPr>
+        <p:spPr>
+          <a:xfrm>
+            <a:off x="6675120" y="5029200"/>
+            <a:ext cx="5120640" cy="1371600"/>
+          </a:xfrm>
+          <a:prstGeom prst="rect">
+            <a:avLst/>
+          </a:prstGeom>
+          <a:solidFill>
+            <a:srgbClr val="E2EFEC"/>
+          </a:solidFill>
+          <a:ln>
+            <a:noFill/>
+          </a:ln>
+          <a:effectLst/>
+        </p:spPr>
+        <p:style>
+          <a:lnRef idx="1">
+            <a:schemeClr val="accent1"/>
+          </a:lnRef>
+          <a:fillRef idx="3">
+            <a:schemeClr val="accent1"/>
+          </a:fillRef>
+          <a:effectRef idx="2">
+            <a:schemeClr val="accent1"/>
+          </a:effectRef>
+          <a:fontRef idx="minor">
+            <a:schemeClr val="lt1"/>
+          </a:fontRef>
+        </p:style>
+        <p:txBody>
+          <a:bodyPr rtlCol="0" anchor="ctr"/>
+          <a:lstStyle/>
+          <a:p>
+            <a:pPr algn="ctr"/>
+          </a:p>
+        </p:txBody>
+      </p:sp>
+      <p:sp>
+        <p:nvSpPr>
+          <p:cNvPr id="22" name="TextBox 21"/>
+          <p:cNvSpPr txBox="1"/>
+          <p:nvPr/>
+        </p:nvSpPr>
+        <p:spPr>
+          <a:xfrm>
+            <a:off x="6903720" y="5166360"/>
+            <a:ext cx="4663440" cy="1143000"/>
+          </a:xfrm>
+          <a:prstGeom prst="rect">
+            <a:avLst/>
+          </a:prstGeom>
+          <a:noFill/>
+        </p:spPr>
+        <p:txBody>
+          <a:bodyPr wrap="square" lIns="0" rIns="0" tIns="0" bIns="0">
+            <a:spAutoFit/>
+          </a:bodyPr>
+          <a:lstStyle/>
+          <a:p>
+            <a:pPr algn="l">
+              <a:spcBef>
+                <a:spcPts val="0"/>
+              </a:spcBef>
+              <a:spcAft>
+                <a:spcPts val="300"/>
+              </a:spcAft>
+            </a:pPr>
+            <a:r>
+              <a:rPr sz="1300">
+                <a:solidFill>
+                  <a:srgbClr val="3E8C7C"/>
+                </a:solidFill>
+                <a:latin typeface="ヒラギノ角ゴ ProN W6"/>
+                <a:ea typeface="ヒラギノ角ゴ ProN W6"/>
+                <a:cs typeface="ヒラギノ角ゴ ProN W6"/>
+              </a:rPr>
+              <a:t>運用方針</a:t>
+            </a:r>
+          </a:p>
+          <a:p>
+            <a:pPr algn="l">
+              <a:spcBef>
+                <a:spcPts val="0"/>
+              </a:spcBef>
+              <a:spcAft>
+                <a:spcPts val="0"/>
+              </a:spcAft>
+            </a:pPr>
+            <a:r>
+              <a:rPr sz="1200">
+                <a:solidFill>
+                  <a:srgbClr val="1A1A1A"/>
+                </a:solidFill>
+                <a:latin typeface="ヒラギノ角ゴ ProN W3"/>
+                <a:ea typeface="ヒラギノ角ゴ ProN W3"/>
+                <a:cs typeface="ヒラギノ角ゴ ProN W3"/>
+              </a:rPr>
+              <a:t>迷う場合は 40〜60 に寄せます。</a:t>
+            </a:r>
+          </a:p>
+          <a:p>
+            <a:pPr algn="l">
+              <a:spcBef>
+                <a:spcPts val="0"/>
+              </a:spcBef>
+              <a:spcAft>
+                <a:spcPts val="0"/>
+              </a:spcAft>
+            </a:pPr>
+            <a:r>
+              <a:rPr sz="1200">
+                <a:solidFill>
+                  <a:srgbClr val="1A1A1A"/>
+                </a:solidFill>
+                <a:latin typeface="ヒラギノ角ゴ ProN W3"/>
+                <a:ea typeface="ヒラギノ角ゴ ProN W3"/>
+                <a:cs typeface="ヒラギノ角ゴ ProN W3"/>
+              </a:rPr>
+              <a:t>0〜10 や 90〜100 の極端な値は、</a:t>
+            </a:r>
+          </a:p>
+          <a:p>
+            <a:pPr algn="l">
+              <a:spcBef>
+                <a:spcPts val="0"/>
+              </a:spcBef>
+              <a:spcAft>
+                <a:spcPts val="0"/>
+              </a:spcAft>
+            </a:pPr>
+            <a:r>
+              <a:rPr sz="1200">
+                <a:solidFill>
+                  <a:srgbClr val="1A1A1A"/>
+                </a:solidFill>
+                <a:latin typeface="ヒラギノ角ゴ ProN W3"/>
+                <a:ea typeface="ヒラギノ角ゴ ProN W3"/>
+                <a:cs typeface="ヒラギノ角ゴ ProN W3"/>
+              </a:rPr>
+              <a:t>明確な根拠が複数そろう場合のみ使用します。</a:t>
             </a:r>
           </a:p>
         </p:txBody>
@@ -4014,14 +4680,14 @@
         </p:nvSpPr>
         <p:spPr>
           <a:xfrm>
-            <a:off x="0" y="0"/>
-            <a:ext cx="12191695" cy="1005840"/>
+            <a:off x="0" y="411480"/>
+            <a:ext cx="146304" cy="566928"/>
           </a:xfrm>
           <a:prstGeom prst="rect">
             <a:avLst/>
           </a:prstGeom>
           <a:solidFill>
-            <a:srgbClr val="1F335E"/>
+            <a:srgbClr val="3E8C7C"/>
           </a:solidFill>
           <a:ln>
             <a:noFill/>
@@ -4052,20 +4718,64 @@
       </p:sp>
       <p:sp>
         <p:nvSpPr>
-          <p:cNvPr id="3" name="Rectangle 2"/>
+          <p:cNvPr id="3" name="TextBox 2"/>
+          <p:cNvSpPr txBox="1"/>
+          <p:nvPr/>
+        </p:nvSpPr>
+        <p:spPr>
+          <a:xfrm>
+            <a:off x="411480" y="365760"/>
+            <a:ext cx="10607040" cy="685800"/>
+          </a:xfrm>
+          <a:prstGeom prst="rect">
+            <a:avLst/>
+          </a:prstGeom>
+          <a:noFill/>
+        </p:spPr>
+        <p:txBody>
+          <a:bodyPr wrap="square" lIns="0" rIns="0" tIns="0" bIns="0" anchor="ctr">
+            <a:spAutoFit/>
+          </a:bodyPr>
+          <a:lstStyle/>
+          <a:p>
+            <a:pPr algn="l">
+              <a:spcBef>
+                <a:spcPts val="0"/>
+              </a:spcBef>
+              <a:spcAft>
+                <a:spcPts val="400"/>
+              </a:spcAft>
+            </a:pPr>
+            <a:r>
+              <a:rPr sz="2400">
+                <a:solidFill>
+                  <a:srgbClr val="1A1A1A"/>
+                </a:solidFill>
+                <a:latin typeface="ヒラギノ角ゴ ProN W6"/>
+                <a:ea typeface="ヒラギノ角ゴ ProN W6"/>
+                <a:cs typeface="ヒラギノ角ゴ ProN W6"/>
+              </a:rPr>
+              <a:t>判定の仕組み — どう点数を出しているか</a:t>
+            </a:r>
+          </a:p>
+        </p:txBody>
+      </p:sp>
+      <p:sp>
+        <p:nvSpPr>
+          <p:cNvPr id="4" name="Rectangle 3"/>
           <p:cNvSpPr/>
           <p:nvPr/>
         </p:nvSpPr>
         <p:spPr>
           <a:xfrm>
-            <a:off x="0" y="1005840"/>
-            <a:ext cx="12191695" cy="40000"/>
+            <a:off x="411480" y="1115568"/>
+            <a:ext cx="11384280" cy="27940"/>
           </a:xfrm>
           <a:prstGeom prst="rect">
             <a:avLst/>
           </a:prstGeom>
           <a:solidFill>
-            <a:srgbClr val="2E5CA6"/>
+            <a:srgbClr val="3E8C7C"/>
           </a:solidFill>
           <a:ln>
             <a:noFill/>
@@ -4096,48 +4806,14 @@
       </p:sp>
       <p:sp>
         <p:nvSpPr>
-          <p:cNvPr id="4" name="TextBox 3"/>
-          <p:cNvSpPr txBox="1"/>
-          <p:nvPr/>
-        </p:nvSpPr>
-        <p:spPr>
-          <a:xfrm>
-            <a:off x="457200" y="164592"/>
-            <a:ext cx="10515600" cy="731520"/>
-          </a:xfrm>
-          <a:prstGeom prst="rect">
-            <a:avLst/>
-          </a:prstGeom>
-          <a:noFill/>
-        </p:spPr>
-        <p:txBody>
-          <a:bodyPr wrap="none" anchor="ctr">
-            <a:spAutoFit/>
-          </a:bodyPr>
-          <a:lstStyle/>
-          <a:p>
-            <a:r>
-              <a:rPr sz="2800" b="1">
-                <a:solidFill>
-                  <a:srgbClr val="FFFFFF"/>
-                </a:solidFill>
-                <a:latin typeface="Meiryo"/>
-              </a:rPr>
-              <a:t>1. 目的</a:t>
-            </a:r>
-          </a:p>
-        </p:txBody>
-      </p:sp>
-      <p:sp>
-        <p:nvSpPr>
           <p:cNvPr id="5" name="TextBox 4"/>
           <p:cNvSpPr txBox="1"/>
           <p:nvPr/>
         </p:nvSpPr>
         <p:spPr>
           <a:xfrm>
-            <a:off x="11338560" y="164592"/>
-            <a:ext cx="640080" cy="731520"/>
+            <a:off x="11430000" y="457200"/>
+            <a:ext cx="548640" cy="457200"/>
           </a:xfrm>
           <a:prstGeom prst="rect">
             <a:avLst/>
@@ -4145,18 +4821,27 @@
           <a:noFill/>
         </p:spPr>
         <p:txBody>
-          <a:bodyPr wrap="none" anchor="ctr">
+          <a:bodyPr wrap="square" lIns="0" rIns="0" tIns="0" bIns="0">
             <a:spAutoFit/>
           </a:bodyPr>
           <a:lstStyle/>
           <a:p>
-            <a:pPr algn="r"/>
-            <a:r>
-              <a:rPr sz="1600" b="0">
-                <a:solidFill>
-                  <a:srgbClr val="FFFFFF"/>
-                </a:solidFill>
-                <a:latin typeface="Meiryo"/>
+            <a:pPr algn="r">
+              <a:spcBef>
+                <a:spcPts val="0"/>
+              </a:spcBef>
+              <a:spcAft>
+                <a:spcPts val="400"/>
+              </a:spcAft>
+            </a:pPr>
+            <a:r>
+              <a:rPr sz="1200">
+                <a:solidFill>
+                  <a:srgbClr val="3E8C7C"/>
+                </a:solidFill>
+                <a:latin typeface="ヒラギノ角ゴ ProN W6"/>
+                <a:ea typeface="ヒラギノ角ゴ ProN W6"/>
+                <a:cs typeface="ヒラギノ角ゴ ProN W6"/>
               </a:rPr>
               <a:t>3</a:t>
             </a:r>
@@ -4165,14 +4850,58 @@
       </p:sp>
       <p:sp>
         <p:nvSpPr>
-          <p:cNvPr id="6" name="TextBox 5"/>
+          <p:cNvPr id="6" name="Rectangle 5"/>
+          <p:cNvSpPr/>
+          <p:nvPr/>
+        </p:nvSpPr>
+        <p:spPr>
+          <a:xfrm>
+            <a:off x="502920" y="1508760"/>
+            <a:ext cx="2514600" cy="1051560"/>
+          </a:xfrm>
+          <a:prstGeom prst="rect">
+            <a:avLst/>
+          </a:prstGeom>
+          <a:solidFill>
+            <a:srgbClr val="E2EFEC"/>
+          </a:solidFill>
+          <a:ln>
+            <a:noFill/>
+          </a:ln>
+          <a:effectLst/>
+        </p:spPr>
+        <p:style>
+          <a:lnRef idx="1">
+            <a:schemeClr val="accent1"/>
+          </a:lnRef>
+          <a:fillRef idx="3">
+            <a:schemeClr val="accent1"/>
+          </a:fillRef>
+          <a:effectRef idx="2">
+            <a:schemeClr val="accent1"/>
+          </a:effectRef>
+          <a:fontRef idx="minor">
+            <a:schemeClr val="lt1"/>
+          </a:fontRef>
+        </p:style>
+        <p:txBody>
+          <a:bodyPr rtlCol="0" anchor="ctr"/>
+          <a:lstStyle/>
+          <a:p>
+            <a:pPr algn="ctr"/>
+          </a:p>
+        </p:txBody>
+      </p:sp>
+      <p:sp>
+        <p:nvSpPr>
+          <p:cNvPr id="7" name="TextBox 6"/>
           <p:cNvSpPr txBox="1"/>
           <p:nvPr/>
         </p:nvSpPr>
         <p:spPr>
           <a:xfrm>
-            <a:off x="640080" y="1463040"/>
-            <a:ext cx="10881360" cy="5120640"/>
+            <a:off x="502920" y="1508760"/>
+            <a:ext cx="2514600" cy="1051560"/>
           </a:xfrm>
           <a:prstGeom prst="rect">
             <a:avLst/>
@@ -4180,88 +4909,702 @@
           <a:noFill/>
         </p:spPr>
         <p:txBody>
-          <a:bodyPr wrap="square">
+          <a:bodyPr wrap="square" lIns="0" rIns="0" tIns="0" bIns="0" anchor="ctr">
             <a:spAutoFit/>
           </a:bodyPr>
           <a:lstStyle/>
           <a:p>
-            <a:pPr>
+            <a:pPr algn="ctr">
+              <a:spcBef>
+                <a:spcPts val="0"/>
+              </a:spcBef>
+              <a:spcAft>
+                <a:spcPts val="0"/>
+              </a:spcAft>
+            </a:pPr>
+            <a:r>
+              <a:rPr sz="1400">
+                <a:solidFill>
+                  <a:srgbClr val="1A1A1A"/>
+                </a:solidFill>
+                <a:latin typeface="ヒラギノ角ゴ ProN W6"/>
+                <a:ea typeface="ヒラギノ角ゴ ProN W6"/>
+                <a:cs typeface="ヒラギノ角ゴ ProN W6"/>
+              </a:rPr>
+              <a:t>作文（手書き）</a:t>
+            </a:r>
+          </a:p>
+        </p:txBody>
+      </p:sp>
+      <p:sp>
+        <p:nvSpPr>
+          <p:cNvPr id="8" name="TextBox 7"/>
+          <p:cNvSpPr txBox="1"/>
+          <p:nvPr/>
+        </p:nvSpPr>
+        <p:spPr>
+          <a:xfrm>
+            <a:off x="3017520" y="1508760"/>
+            <a:ext cx="457200" cy="1051560"/>
+          </a:xfrm>
+          <a:prstGeom prst="rect">
+            <a:avLst/>
+          </a:prstGeom>
+          <a:noFill/>
+        </p:spPr>
+        <p:txBody>
+          <a:bodyPr wrap="square" lIns="0" rIns="0" tIns="0" bIns="0" anchor="ctr">
+            <a:spAutoFit/>
+          </a:bodyPr>
+          <a:lstStyle/>
+          <a:p>
+            <a:pPr algn="ctr">
+              <a:spcBef>
+                <a:spcPts val="0"/>
+              </a:spcBef>
+              <a:spcAft>
+                <a:spcPts val="400"/>
+              </a:spcAft>
+            </a:pPr>
+            <a:r>
+              <a:rPr sz="1800">
+                <a:solidFill>
+                  <a:srgbClr val="3E8C7C"/>
+                </a:solidFill>
+                <a:latin typeface="ヒラギノ角ゴ ProN W6"/>
+                <a:ea typeface="ヒラギノ角ゴ ProN W6"/>
+                <a:cs typeface="ヒラギノ角ゴ ProN W6"/>
+              </a:rPr>
+              <a:t>▶</a:t>
+            </a:r>
+          </a:p>
+        </p:txBody>
+      </p:sp>
+      <p:sp>
+        <p:nvSpPr>
+          <p:cNvPr id="9" name="Rectangle 8"/>
+          <p:cNvSpPr/>
+          <p:nvPr/>
+        </p:nvSpPr>
+        <p:spPr>
+          <a:xfrm>
+            <a:off x="3474720" y="1508760"/>
+            <a:ext cx="2514600" cy="1051560"/>
+          </a:xfrm>
+          <a:prstGeom prst="rect">
+            <a:avLst/>
+          </a:prstGeom>
+          <a:solidFill>
+            <a:srgbClr val="E2EFEC"/>
+          </a:solidFill>
+          <a:ln>
+            <a:noFill/>
+          </a:ln>
+          <a:effectLst/>
+        </p:spPr>
+        <p:style>
+          <a:lnRef idx="1">
+            <a:schemeClr val="accent1"/>
+          </a:lnRef>
+          <a:fillRef idx="3">
+            <a:schemeClr val="accent1"/>
+          </a:fillRef>
+          <a:effectRef idx="2">
+            <a:schemeClr val="accent1"/>
+          </a:effectRef>
+          <a:fontRef idx="minor">
+            <a:schemeClr val="lt1"/>
+          </a:fontRef>
+        </p:style>
+        <p:txBody>
+          <a:bodyPr rtlCol="0" anchor="ctr"/>
+          <a:lstStyle/>
+          <a:p>
+            <a:pPr algn="ctr"/>
+          </a:p>
+        </p:txBody>
+      </p:sp>
+      <p:sp>
+        <p:nvSpPr>
+          <p:cNvPr id="10" name="TextBox 9"/>
+          <p:cNvSpPr txBox="1"/>
+          <p:nvPr/>
+        </p:nvSpPr>
+        <p:spPr>
+          <a:xfrm>
+            <a:off x="3474720" y="1508760"/>
+            <a:ext cx="2514600" cy="1051560"/>
+          </a:xfrm>
+          <a:prstGeom prst="rect">
+            <a:avLst/>
+          </a:prstGeom>
+          <a:noFill/>
+        </p:spPr>
+        <p:txBody>
+          <a:bodyPr wrap="square" lIns="0" rIns="0" tIns="0" bIns="0" anchor="ctr">
+            <a:spAutoFit/>
+          </a:bodyPr>
+          <a:lstStyle/>
+          <a:p>
+            <a:pPr algn="ctr">
+              <a:spcBef>
+                <a:spcPts val="0"/>
+              </a:spcBef>
+              <a:spcAft>
+                <a:spcPts val="0"/>
+              </a:spcAft>
+            </a:pPr>
+            <a:r>
+              <a:rPr sz="1400">
+                <a:solidFill>
+                  <a:srgbClr val="1A1A1A"/>
+                </a:solidFill>
+                <a:latin typeface="ヒラギノ角ゴ ProN W6"/>
+                <a:ea typeface="ヒラギノ角ゴ ProN W6"/>
+                <a:cs typeface="ヒラギノ角ゴ ProN W6"/>
+              </a:rPr>
+              <a:t>テキスト化</a:t>
+            </a:r>
+          </a:p>
+        </p:txBody>
+      </p:sp>
+      <p:sp>
+        <p:nvSpPr>
+          <p:cNvPr id="11" name="TextBox 10"/>
+          <p:cNvSpPr txBox="1"/>
+          <p:nvPr/>
+        </p:nvSpPr>
+        <p:spPr>
+          <a:xfrm>
+            <a:off x="5989320" y="1508760"/>
+            <a:ext cx="457200" cy="1051560"/>
+          </a:xfrm>
+          <a:prstGeom prst="rect">
+            <a:avLst/>
+          </a:prstGeom>
+          <a:noFill/>
+        </p:spPr>
+        <p:txBody>
+          <a:bodyPr wrap="square" lIns="0" rIns="0" tIns="0" bIns="0" anchor="ctr">
+            <a:spAutoFit/>
+          </a:bodyPr>
+          <a:lstStyle/>
+          <a:p>
+            <a:pPr algn="ctr">
+              <a:spcBef>
+                <a:spcPts val="0"/>
+              </a:spcBef>
+              <a:spcAft>
+                <a:spcPts val="400"/>
+              </a:spcAft>
+            </a:pPr>
+            <a:r>
+              <a:rPr sz="1800">
+                <a:solidFill>
+                  <a:srgbClr val="3E8C7C"/>
+                </a:solidFill>
+                <a:latin typeface="ヒラギノ角ゴ ProN W6"/>
+                <a:ea typeface="ヒラギノ角ゴ ProN W6"/>
+                <a:cs typeface="ヒラギノ角ゴ ProN W6"/>
+              </a:rPr>
+              <a:t>▶</a:t>
+            </a:r>
+          </a:p>
+        </p:txBody>
+      </p:sp>
+      <p:sp>
+        <p:nvSpPr>
+          <p:cNvPr id="12" name="Rectangle 11"/>
+          <p:cNvSpPr/>
+          <p:nvPr/>
+        </p:nvSpPr>
+        <p:spPr>
+          <a:xfrm>
+            <a:off x="6446520" y="1508760"/>
+            <a:ext cx="2514600" cy="1051560"/>
+          </a:xfrm>
+          <a:prstGeom prst="rect">
+            <a:avLst/>
+          </a:prstGeom>
+          <a:solidFill>
+            <a:srgbClr val="E2EFEC"/>
+          </a:solidFill>
+          <a:ln>
+            <a:noFill/>
+          </a:ln>
+          <a:effectLst/>
+        </p:spPr>
+        <p:style>
+          <a:lnRef idx="1">
+            <a:schemeClr val="accent1"/>
+          </a:lnRef>
+          <a:fillRef idx="3">
+            <a:schemeClr val="accent1"/>
+          </a:fillRef>
+          <a:effectRef idx="2">
+            <a:schemeClr val="accent1"/>
+          </a:effectRef>
+          <a:fontRef idx="minor">
+            <a:schemeClr val="lt1"/>
+          </a:fontRef>
+        </p:style>
+        <p:txBody>
+          <a:bodyPr rtlCol="0" anchor="ctr"/>
+          <a:lstStyle/>
+          <a:p>
+            <a:pPr algn="ctr"/>
+          </a:p>
+        </p:txBody>
+      </p:sp>
+      <p:sp>
+        <p:nvSpPr>
+          <p:cNvPr id="13" name="TextBox 12"/>
+          <p:cNvSpPr txBox="1"/>
+          <p:nvPr/>
+        </p:nvSpPr>
+        <p:spPr>
+          <a:xfrm>
+            <a:off x="6446520" y="1508760"/>
+            <a:ext cx="2514600" cy="1051560"/>
+          </a:xfrm>
+          <a:prstGeom prst="rect">
+            <a:avLst/>
+          </a:prstGeom>
+          <a:noFill/>
+        </p:spPr>
+        <p:txBody>
+          <a:bodyPr wrap="square" lIns="0" rIns="0" tIns="0" bIns="0" anchor="ctr">
+            <a:spAutoFit/>
+          </a:bodyPr>
+          <a:lstStyle/>
+          <a:p>
+            <a:pPr algn="ctr">
+              <a:spcBef>
+                <a:spcPts val="0"/>
+              </a:spcBef>
+              <a:spcAft>
+                <a:spcPts val="0"/>
+              </a:spcAft>
+            </a:pPr>
+            <a:r>
+              <a:rPr sz="1400">
+                <a:solidFill>
+                  <a:srgbClr val="1A1A1A"/>
+                </a:solidFill>
+                <a:latin typeface="ヒラギノ角ゴ ProN W6"/>
+                <a:ea typeface="ヒラギノ角ゴ ProN W6"/>
+                <a:cs typeface="ヒラギノ角ゴ ProN W6"/>
+              </a:rPr>
+              <a:t>判定用AI（LLM）</a:t>
+            </a:r>
+          </a:p>
+          <a:p>
+            <a:pPr algn="ctr">
+              <a:spcBef>
+                <a:spcPts val="0"/>
+              </a:spcBef>
+              <a:spcAft>
+                <a:spcPts val="0"/>
+              </a:spcAft>
+            </a:pPr>
+            <a:r>
+              <a:rPr sz="1400">
+                <a:solidFill>
+                  <a:srgbClr val="1A1A1A"/>
+                </a:solidFill>
+                <a:latin typeface="ヒラギノ角ゴ ProN W6"/>
+                <a:ea typeface="ヒラギノ角ゴ ProN W6"/>
+                <a:cs typeface="ヒラギノ角ゴ ProN W6"/>
+              </a:rPr>
+              <a:t>＋評価基準</a:t>
+            </a:r>
+          </a:p>
+        </p:txBody>
+      </p:sp>
+      <p:sp>
+        <p:nvSpPr>
+          <p:cNvPr id="14" name="TextBox 13"/>
+          <p:cNvSpPr txBox="1"/>
+          <p:nvPr/>
+        </p:nvSpPr>
+        <p:spPr>
+          <a:xfrm>
+            <a:off x="8961120" y="1508760"/>
+            <a:ext cx="457200" cy="1051560"/>
+          </a:xfrm>
+          <a:prstGeom prst="rect">
+            <a:avLst/>
+          </a:prstGeom>
+          <a:noFill/>
+        </p:spPr>
+        <p:txBody>
+          <a:bodyPr wrap="square" lIns="0" rIns="0" tIns="0" bIns="0" anchor="ctr">
+            <a:spAutoFit/>
+          </a:bodyPr>
+          <a:lstStyle/>
+          <a:p>
+            <a:pPr algn="ctr">
+              <a:spcBef>
+                <a:spcPts val="0"/>
+              </a:spcBef>
+              <a:spcAft>
+                <a:spcPts val="400"/>
+              </a:spcAft>
+            </a:pPr>
+            <a:r>
+              <a:rPr sz="1800">
+                <a:solidFill>
+                  <a:srgbClr val="3E8C7C"/>
+                </a:solidFill>
+                <a:latin typeface="ヒラギノ角ゴ ProN W6"/>
+                <a:ea typeface="ヒラギノ角ゴ ProN W6"/>
+                <a:cs typeface="ヒラギノ角ゴ ProN W6"/>
+              </a:rPr>
+              <a:t>▶</a:t>
+            </a:r>
+          </a:p>
+        </p:txBody>
+      </p:sp>
+      <p:sp>
+        <p:nvSpPr>
+          <p:cNvPr id="15" name="Rectangle 14"/>
+          <p:cNvSpPr/>
+          <p:nvPr/>
+        </p:nvSpPr>
+        <p:spPr>
+          <a:xfrm>
+            <a:off x="9418320" y="1508760"/>
+            <a:ext cx="2514600" cy="1051560"/>
+          </a:xfrm>
+          <a:prstGeom prst="rect">
+            <a:avLst/>
+          </a:prstGeom>
+          <a:solidFill>
+            <a:srgbClr val="3E8C7C"/>
+          </a:solidFill>
+          <a:ln>
+            <a:noFill/>
+          </a:ln>
+          <a:effectLst/>
+        </p:spPr>
+        <p:style>
+          <a:lnRef idx="1">
+            <a:schemeClr val="accent1"/>
+          </a:lnRef>
+          <a:fillRef idx="3">
+            <a:schemeClr val="accent1"/>
+          </a:fillRef>
+          <a:effectRef idx="2">
+            <a:schemeClr val="accent1"/>
+          </a:effectRef>
+          <a:fontRef idx="minor">
+            <a:schemeClr val="lt1"/>
+          </a:fontRef>
+        </p:style>
+        <p:txBody>
+          <a:bodyPr rtlCol="0" anchor="ctr"/>
+          <a:lstStyle/>
+          <a:p>
+            <a:pPr algn="ctr"/>
+          </a:p>
+        </p:txBody>
+      </p:sp>
+      <p:sp>
+        <p:nvSpPr>
+          <p:cNvPr id="16" name="TextBox 15"/>
+          <p:cNvSpPr txBox="1"/>
+          <p:nvPr/>
+        </p:nvSpPr>
+        <p:spPr>
+          <a:xfrm>
+            <a:off x="9418320" y="1508760"/>
+            <a:ext cx="2514600" cy="1051560"/>
+          </a:xfrm>
+          <a:prstGeom prst="rect">
+            <a:avLst/>
+          </a:prstGeom>
+          <a:noFill/>
+        </p:spPr>
+        <p:txBody>
+          <a:bodyPr wrap="square" lIns="0" rIns="0" tIns="0" bIns="0" anchor="ctr">
+            <a:spAutoFit/>
+          </a:bodyPr>
+          <a:lstStyle/>
+          <a:p>
+            <a:pPr algn="ctr">
+              <a:spcBef>
+                <a:spcPts val="0"/>
+              </a:spcBef>
+              <a:spcAft>
+                <a:spcPts val="0"/>
+              </a:spcAft>
+            </a:pPr>
+            <a:r>
+              <a:rPr sz="1400">
+                <a:solidFill>
+                  <a:srgbClr val="FFFFFF"/>
+                </a:solidFill>
+                <a:latin typeface="ヒラギノ角ゴ ProN W6"/>
+                <a:ea typeface="ヒラギノ角ゴ ProN W6"/>
+                <a:cs typeface="ヒラギノ角ゴ ProN W6"/>
+              </a:rPr>
+              <a:t>スコア 0〜100</a:t>
+            </a:r>
+          </a:p>
+          <a:p>
+            <a:pPr algn="ctr">
+              <a:spcBef>
+                <a:spcPts val="0"/>
+              </a:spcBef>
+              <a:spcAft>
+                <a:spcPts val="0"/>
+              </a:spcAft>
+            </a:pPr>
+            <a:r>
+              <a:rPr sz="1400">
+                <a:solidFill>
+                  <a:srgbClr val="FFFFFF"/>
+                </a:solidFill>
+                <a:latin typeface="ヒラギノ角ゴ ProN W6"/>
+                <a:ea typeface="ヒラギノ角ゴ ProN W6"/>
+                <a:cs typeface="ヒラギノ角ゴ ProN W6"/>
+              </a:rPr>
+              <a:t>＋根拠3点</a:t>
+            </a:r>
+          </a:p>
+        </p:txBody>
+      </p:sp>
+      <p:sp>
+        <p:nvSpPr>
+          <p:cNvPr id="17" name="Rectangle 16"/>
+          <p:cNvSpPr/>
+          <p:nvPr/>
+        </p:nvSpPr>
+        <p:spPr>
+          <a:xfrm>
+            <a:off x="502920" y="2971800"/>
+            <a:ext cx="11201400" cy="3291840"/>
+          </a:xfrm>
+          <a:prstGeom prst="rect">
+            <a:avLst/>
+          </a:prstGeom>
+          <a:solidFill>
+            <a:srgbClr val="F1F7F5"/>
+          </a:solidFill>
+          <a:ln>
+            <a:noFill/>
+          </a:ln>
+          <a:effectLst/>
+        </p:spPr>
+        <p:style>
+          <a:lnRef idx="1">
+            <a:schemeClr val="accent1"/>
+          </a:lnRef>
+          <a:fillRef idx="3">
+            <a:schemeClr val="accent1"/>
+          </a:fillRef>
+          <a:effectRef idx="2">
+            <a:schemeClr val="accent1"/>
+          </a:effectRef>
+          <a:fontRef idx="minor">
+            <a:schemeClr val="lt1"/>
+          </a:fontRef>
+        </p:style>
+        <p:txBody>
+          <a:bodyPr rtlCol="0" anchor="ctr"/>
+          <a:lstStyle/>
+          <a:p>
+            <a:pPr algn="ctr"/>
+          </a:p>
+        </p:txBody>
+      </p:sp>
+      <p:sp>
+        <p:nvSpPr>
+          <p:cNvPr id="18" name="TextBox 17"/>
+          <p:cNvSpPr txBox="1"/>
+          <p:nvPr/>
+        </p:nvSpPr>
+        <p:spPr>
+          <a:xfrm>
+            <a:off x="777240" y="3200400"/>
+            <a:ext cx="10698480" cy="2926080"/>
+          </a:xfrm>
+          <a:prstGeom prst="rect">
+            <a:avLst/>
+          </a:prstGeom>
+          <a:noFill/>
+        </p:spPr>
+        <p:txBody>
+          <a:bodyPr wrap="square" lIns="0" rIns="0" tIns="0" bIns="0">
+            <a:spAutoFit/>
+          </a:bodyPr>
+          <a:lstStyle/>
+          <a:p>
+            <a:pPr algn="l">
+              <a:spcBef>
+                <a:spcPts val="0"/>
+              </a:spcBef>
               <a:spcAft>
                 <a:spcPts val="800"/>
               </a:spcAft>
             </a:pPr>
             <a:r>
-              <a:rPr sz="1800" b="1">
-                <a:solidFill>
-                  <a:srgbClr val="1F335E"/>
-                </a:solidFill>
-                <a:latin typeface="Meiryo"/>
-              </a:rPr>
-              <a:t>● 手書き提出の作文について、生成AI（ChatGPT等）の文章を「そのまま／大部分写している可能性」を見立てる指標。</a:t>
-            </a:r>
-          </a:p>
-          <a:p>
-            <a:pPr>
+              <a:rPr sz="1600">
+                <a:solidFill>
+                  <a:srgbClr val="3E8C7C"/>
+                </a:solidFill>
+                <a:latin typeface="ヒラギノ角ゴ ProN W6"/>
+                <a:ea typeface="ヒラギノ角ゴ ProN W6"/>
+                <a:cs typeface="ヒラギノ角ゴ ProN W6"/>
+              </a:rPr>
+              <a:t>この仕組みの性質（社長への説明ポイント）</a:t>
+            </a:r>
+          </a:p>
+          <a:p>
+            <a:pPr algn="l">
+              <a:spcBef>
+                <a:spcPts val="0"/>
+              </a:spcBef>
+              <a:spcAft>
+                <a:spcPts val="0"/>
+              </a:spcAft>
+            </a:pPr>
+            <a:r>
+              <a:rPr sz="1300">
+                <a:solidFill>
+                  <a:srgbClr val="1A1A1A"/>
+                </a:solidFill>
+                <a:latin typeface="ヒラギノ角ゴ ProN W3"/>
+                <a:ea typeface="ヒラギノ角ゴ ProN W3"/>
+                <a:cs typeface="ヒラギノ角ゴ ProN W3"/>
+              </a:rPr>
+              <a:t>●　スコアは採点者役のAIの“判断”であり、</a:t>
+            </a:r>
+          </a:p>
+          <a:p>
+            <a:pPr algn="l">
+              <a:spcBef>
+                <a:spcPts val="0"/>
+              </a:spcBef>
               <a:spcAft>
                 <a:spcPts val="800"/>
               </a:spcAft>
             </a:pPr>
             <a:r>
-              <a:rPr sz="1800" b="0">
-                <a:solidFill>
-                  <a:srgbClr val="555555"/>
-                </a:solidFill>
-                <a:latin typeface="Meiryo"/>
-              </a:rPr>
-              <a:t>● 手書きであること自体は、人間が書いた根拠として扱いません。</a:t>
-            </a:r>
-          </a:p>
-          <a:p>
-            <a:pPr lvl="1">
+              <a:rPr sz="1300">
+                <a:solidFill>
+                  <a:srgbClr val="1A1A1A"/>
+                </a:solidFill>
+                <a:latin typeface="ヒラギノ角ゴ ProN W3"/>
+                <a:ea typeface="ヒラギノ角ゴ ProN W3"/>
+                <a:cs typeface="ヒラギノ角ゴ ProN W3"/>
+              </a:rPr>
+              <a:t>　　固定の計算式から自動算出される値ではありません。</a:t>
+            </a:r>
+          </a:p>
+          <a:p>
+            <a:pPr algn="l">
+              <a:spcBef>
+                <a:spcPts val="0"/>
+              </a:spcBef>
+              <a:spcAft>
+                <a:spcPts val="0"/>
+              </a:spcAft>
+            </a:pPr>
+            <a:r>
+              <a:rPr sz="1300">
+                <a:solidFill>
+                  <a:srgbClr val="1A1A1A"/>
+                </a:solidFill>
+                <a:latin typeface="ヒラギノ角ゴ ProN W3"/>
+                <a:ea typeface="ヒラギノ角ゴ ProN W3"/>
+                <a:cs typeface="ヒラギノ角ゴ ProN W3"/>
+              </a:rPr>
+              <a:t>●　判断が人や日によってブレないよう、</a:t>
+            </a:r>
+          </a:p>
+          <a:p>
+            <a:pPr algn="l">
+              <a:spcBef>
+                <a:spcPts val="0"/>
+              </a:spcBef>
+              <a:spcAft>
+                <a:spcPts val="0"/>
+              </a:spcAft>
+            </a:pPr>
+            <a:r>
+              <a:rPr sz="1300">
+                <a:solidFill>
+                  <a:srgbClr val="1A1A1A"/>
+                </a:solidFill>
+                <a:latin typeface="ヒラギノ角ゴ ProN W3"/>
+                <a:ea typeface="ヒラギノ角ゴ ProN W3"/>
+                <a:cs typeface="ヒラギノ角ゴ ProN W3"/>
+              </a:rPr>
+              <a:t>　　評価の観点・各スコア帯の定義・禁止事項を文章で細かく固定しています。</a:t>
+            </a:r>
+          </a:p>
+          <a:p>
+            <a:pPr algn="l">
+              <a:spcBef>
+                <a:spcPts val="0"/>
+              </a:spcBef>
               <a:spcAft>
                 <a:spcPts val="800"/>
               </a:spcAft>
             </a:pPr>
             <a:r>
-              <a:rPr sz="1600" b="0">
-                <a:solidFill>
-                  <a:srgbClr val="555555"/>
-                </a:solidFill>
-                <a:latin typeface="Meiryo"/>
-              </a:rPr>
-              <a:t>－ 手書きでもAI出力を写すことは可能なため。</a:t>
-            </a:r>
-          </a:p>
-          <a:p>
-            <a:pPr>
-              <a:spcAft>
-                <a:spcPts val="800"/>
-              </a:spcAft>
-            </a:pPr>
-            <a:r>
-              <a:rPr sz="1800" b="0">
-                <a:solidFill>
-                  <a:srgbClr val="555555"/>
-                </a:solidFill>
-                <a:latin typeface="Meiryo"/>
-              </a:rPr>
-              <a:t>● 判定対象は、文章の「内容・構成・語彙・表現」のみ。</a:t>
-            </a:r>
-          </a:p>
-          <a:p>
-            <a:pPr>
-              <a:spcAft>
-                <a:spcPts val="800"/>
-              </a:spcAft>
-            </a:pPr>
-            <a:r>
-              <a:rPr sz="1800" b="1">
-                <a:solidFill>
-                  <a:srgbClr val="B32A2A"/>
-                </a:solidFill>
-                <a:latin typeface="Meiryo"/>
-              </a:rPr>
-              <a:t>● 目的はスクリーニング（要確認の作文を見つけること）。最終判断は人が行う前提。</a:t>
+              <a:rPr sz="1300">
+                <a:solidFill>
+                  <a:srgbClr val="3E8C7C"/>
+                </a:solidFill>
+                <a:latin typeface="ヒラギノ角ゴ ProN W6"/>
+                <a:ea typeface="ヒラギノ角ゴ ProN W6"/>
+                <a:cs typeface="ヒラギノ角ゴ ProN W6"/>
+              </a:rPr>
+              <a:t>　　→「全員を同じ物差しで読む」ことを担保しています。</a:t>
+            </a:r>
+          </a:p>
+          <a:p>
+            <a:pPr algn="l">
+              <a:spcBef>
+                <a:spcPts val="0"/>
+              </a:spcBef>
+              <a:spcAft>
+                <a:spcPts val="0"/>
+              </a:spcAft>
+            </a:pPr>
+            <a:r>
+              <a:rPr sz="1300">
+                <a:solidFill>
+                  <a:srgbClr val="1A1A1A"/>
+                </a:solidFill>
+                <a:latin typeface="ヒラギノ角ゴ ProN W3"/>
+                <a:ea typeface="ヒラギノ角ゴ ProN W3"/>
+                <a:cs typeface="ヒラギノ角ゴ ProN W3"/>
+              </a:rPr>
+              <a:t>●　同じ作文でも判定は多少揺れ得るため、</a:t>
+            </a:r>
+          </a:p>
+          <a:p>
+            <a:pPr algn="l">
+              <a:spcBef>
+                <a:spcPts val="0"/>
+              </a:spcBef>
+              <a:spcAft>
+                <a:spcPts val="0"/>
+              </a:spcAft>
+            </a:pPr>
+            <a:r>
+              <a:rPr sz="1300">
+                <a:solidFill>
+                  <a:srgbClr val="1A1A1A"/>
+                </a:solidFill>
+                <a:latin typeface="ヒラギノ角ゴ ProN W3"/>
+                <a:ea typeface="ヒラギノ角ゴ ProN W3"/>
+                <a:cs typeface="ヒラギノ角ゴ ProN W3"/>
+              </a:rPr>
+              <a:t>　　確定値ではなく“目安”として扱います。</a:t>
             </a:r>
           </a:p>
         </p:txBody>
@@ -4292,14 +5635,14 @@
         </p:nvSpPr>
         <p:spPr>
           <a:xfrm>
-            <a:off x="0" y="0"/>
-            <a:ext cx="12191695" cy="1005840"/>
+            <a:off x="0" y="411480"/>
+            <a:ext cx="146304" cy="566928"/>
           </a:xfrm>
           <a:prstGeom prst="rect">
             <a:avLst/>
           </a:prstGeom>
           <a:solidFill>
-            <a:srgbClr val="1F335E"/>
+            <a:srgbClr val="3E8C7C"/>
           </a:solidFill>
           <a:ln>
             <a:noFill/>
@@ -4330,20 +5673,64 @@
       </p:sp>
       <p:sp>
         <p:nvSpPr>
-          <p:cNvPr id="3" name="Rectangle 2"/>
+          <p:cNvPr id="3" name="TextBox 2"/>
+          <p:cNvSpPr txBox="1"/>
+          <p:nvPr/>
+        </p:nvSpPr>
+        <p:spPr>
+          <a:xfrm>
+            <a:off x="411480" y="365760"/>
+            <a:ext cx="10607040" cy="685800"/>
+          </a:xfrm>
+          <a:prstGeom prst="rect">
+            <a:avLst/>
+          </a:prstGeom>
+          <a:noFill/>
+        </p:spPr>
+        <p:txBody>
+          <a:bodyPr wrap="square" lIns="0" rIns="0" tIns="0" bIns="0" anchor="ctr">
+            <a:spAutoFit/>
+          </a:bodyPr>
+          <a:lstStyle/>
+          <a:p>
+            <a:pPr algn="l">
+              <a:spcBef>
+                <a:spcPts val="0"/>
+              </a:spcBef>
+              <a:spcAft>
+                <a:spcPts val="400"/>
+              </a:spcAft>
+            </a:pPr>
+            <a:r>
+              <a:rPr sz="2400">
+                <a:solidFill>
+                  <a:srgbClr val="1A1A1A"/>
+                </a:solidFill>
+                <a:latin typeface="ヒラギノ角ゴ ProN W6"/>
+                <a:ea typeface="ヒラギノ角ゴ ProN W6"/>
+                <a:cs typeface="ヒラギノ角ゴ ProN W6"/>
+              </a:rPr>
+              <a:t>評価の3つの軸 — AIは何を見ているか</a:t>
+            </a:r>
+          </a:p>
+        </p:txBody>
+      </p:sp>
+      <p:sp>
+        <p:nvSpPr>
+          <p:cNvPr id="4" name="Rectangle 3"/>
           <p:cNvSpPr/>
           <p:nvPr/>
         </p:nvSpPr>
         <p:spPr>
           <a:xfrm>
-            <a:off x="0" y="1005840"/>
-            <a:ext cx="12191695" cy="40000"/>
+            <a:off x="411480" y="1115568"/>
+            <a:ext cx="11384280" cy="27940"/>
           </a:xfrm>
           <a:prstGeom prst="rect">
             <a:avLst/>
           </a:prstGeom>
           <a:solidFill>
-            <a:srgbClr val="2E5CA6"/>
+            <a:srgbClr val="3E8C7C"/>
           </a:solidFill>
           <a:ln>
             <a:noFill/>
@@ -4374,48 +5761,14 @@
       </p:sp>
       <p:sp>
         <p:nvSpPr>
-          <p:cNvPr id="4" name="TextBox 3"/>
-          <p:cNvSpPr txBox="1"/>
-          <p:nvPr/>
-        </p:nvSpPr>
-        <p:spPr>
-          <a:xfrm>
-            <a:off x="457200" y="164592"/>
-            <a:ext cx="10515600" cy="731520"/>
-          </a:xfrm>
-          <a:prstGeom prst="rect">
-            <a:avLst/>
-          </a:prstGeom>
-          <a:noFill/>
-        </p:spPr>
-        <p:txBody>
-          <a:bodyPr wrap="none" anchor="ctr">
-            <a:spAutoFit/>
-          </a:bodyPr>
-          <a:lstStyle/>
-          <a:p>
-            <a:r>
-              <a:rPr sz="2800" b="1">
-                <a:solidFill>
-                  <a:srgbClr val="FFFFFF"/>
-                </a:solidFill>
-                <a:latin typeface="Meiryo"/>
-              </a:rPr>
-              <a:t>2. スコアの意味（0〜100の整数）</a:t>
-            </a:r>
-          </a:p>
-        </p:txBody>
-      </p:sp>
-      <p:sp>
-        <p:nvSpPr>
           <p:cNvPr id="5" name="TextBox 4"/>
           <p:cNvSpPr txBox="1"/>
           <p:nvPr/>
         </p:nvSpPr>
         <p:spPr>
           <a:xfrm>
-            <a:off x="11338560" y="164592"/>
-            <a:ext cx="640080" cy="731520"/>
+            <a:off x="11430000" y="457200"/>
+            <a:ext cx="548640" cy="457200"/>
           </a:xfrm>
           <a:prstGeom prst="rect">
             <a:avLst/>
@@ -4423,18 +5776,27 @@
           <a:noFill/>
         </p:spPr>
         <p:txBody>
-          <a:bodyPr wrap="none" anchor="ctr">
+          <a:bodyPr wrap="square" lIns="0" rIns="0" tIns="0" bIns="0">
             <a:spAutoFit/>
           </a:bodyPr>
           <a:lstStyle/>
           <a:p>
-            <a:pPr algn="r"/>
-            <a:r>
-              <a:rPr sz="1600" b="0">
-                <a:solidFill>
-                  <a:srgbClr val="FFFFFF"/>
-                </a:solidFill>
-                <a:latin typeface="Meiryo"/>
+            <a:pPr algn="r">
+              <a:spcBef>
+                <a:spcPts val="0"/>
+              </a:spcBef>
+              <a:spcAft>
+                <a:spcPts val="400"/>
+              </a:spcAft>
+            </a:pPr>
+            <a:r>
+              <a:rPr sz="1200">
+                <a:solidFill>
+                  <a:srgbClr val="3E8C7C"/>
+                </a:solidFill>
+                <a:latin typeface="ヒラギノ角ゴ ProN W6"/>
+                <a:ea typeface="ヒラギノ角ゴ ProN W6"/>
+                <a:cs typeface="ヒラギノ角ゴ ProN W6"/>
               </a:rPr>
               <a:t>4</a:t>
             </a:r>
@@ -4449,14 +5811,14 @@
         </p:nvSpPr>
         <p:spPr>
           <a:xfrm>
-            <a:off x="640080" y="1463040"/>
-            <a:ext cx="2377440" cy="731520"/>
+            <a:off x="457200" y="1371600"/>
+            <a:ext cx="3703320" cy="548640"/>
           </a:xfrm>
           <a:prstGeom prst="rect">
             <a:avLst/>
           </a:prstGeom>
           <a:solidFill>
-            <a:srgbClr val="1E7A46"/>
+            <a:srgbClr val="3E8C7C"/>
           </a:solidFill>
           <a:ln>
             <a:noFill/>
@@ -4493,8 +5855,8 @@
         </p:nvSpPr>
         <p:spPr>
           <a:xfrm>
-            <a:off x="640080" y="1463040"/>
-            <a:ext cx="2377440" cy="731520"/>
+            <a:off x="457200" y="1371600"/>
+            <a:ext cx="3703320" cy="548640"/>
           </a:xfrm>
           <a:prstGeom prst="rect">
             <a:avLst/>
@@ -4502,74 +5864,49 @@
           <a:noFill/>
         </p:spPr>
         <p:txBody>
-          <a:bodyPr wrap="none" anchor="ctr">
+          <a:bodyPr wrap="square" lIns="0" rIns="0" tIns="0" bIns="0" anchor="ctr">
             <a:spAutoFit/>
           </a:bodyPr>
           <a:lstStyle/>
           <a:p>
-            <a:pPr algn="ctr"/>
-            <a:r>
-              <a:rPr sz="2000" b="1">
+            <a:pPr algn="ctr">
+              <a:spcBef>
+                <a:spcPts val="0"/>
+              </a:spcBef>
+              <a:spcAft>
+                <a:spcPts val="400"/>
+              </a:spcAft>
+            </a:pPr>
+            <a:r>
+              <a:rPr sz="1500">
                 <a:solidFill>
                   <a:srgbClr val="FFFFFF"/>
                 </a:solidFill>
-                <a:latin typeface="Meiryo"/>
-              </a:rPr>
-              <a:t>0〜30</a:t>
-            </a:r>
-          </a:p>
-        </p:txBody>
-      </p:sp>
-      <p:sp>
-        <p:nvSpPr>
-          <p:cNvPr id="8" name="TextBox 7"/>
-          <p:cNvSpPr txBox="1"/>
-          <p:nvPr/>
-        </p:nvSpPr>
-        <p:spPr>
-          <a:xfrm>
-            <a:off x="3200400" y="1463040"/>
-            <a:ext cx="8046720" cy="731520"/>
-          </a:xfrm>
-          <a:prstGeom prst="rect">
-            <a:avLst/>
-          </a:prstGeom>
-          <a:noFill/>
-        </p:spPr>
-        <p:txBody>
-          <a:bodyPr wrap="none" anchor="ctr">
-            <a:spAutoFit/>
-          </a:bodyPr>
-          <a:lstStyle/>
-          <a:p>
-            <a:r>
-              <a:rPr sz="2000" b="0">
-                <a:solidFill>
-                  <a:srgbClr val="1F335E"/>
-                </a:solidFill>
-                <a:latin typeface="Meiryo"/>
-              </a:rPr>
-              <a:t>書き写した可能性は低い</a:t>
-            </a:r>
-          </a:p>
-        </p:txBody>
-      </p:sp>
-      <p:sp>
-        <p:nvSpPr>
-          <p:cNvPr id="9" name="Rectangle 8"/>
+                <a:latin typeface="ヒラギノ角ゴ ProN W6"/>
+                <a:ea typeface="ヒラギノ角ゴ ProN W6"/>
+                <a:cs typeface="ヒラギノ角ゴ ProN W6"/>
+              </a:rPr>
+              <a:t>A. 具体性・本人性</a:t>
+            </a:r>
+          </a:p>
+        </p:txBody>
+      </p:sp>
+      <p:sp>
+        <p:nvSpPr>
+          <p:cNvPr id="8" name="Rectangle 7"/>
           <p:cNvSpPr/>
           <p:nvPr/>
         </p:nvSpPr>
         <p:spPr>
           <a:xfrm>
-            <a:off x="640080" y="2331720"/>
-            <a:ext cx="2377440" cy="731520"/>
+            <a:off x="457200" y="1965960"/>
+            <a:ext cx="3703320" cy="2240280"/>
           </a:xfrm>
           <a:prstGeom prst="rect">
             <a:avLst/>
           </a:prstGeom>
           <a:solidFill>
-            <a:srgbClr val="2E5CA6"/>
+            <a:srgbClr val="F1F7F5"/>
           </a:solidFill>
           <a:ln>
             <a:noFill/>
@@ -4600,14 +5937,14 @@
       </p:sp>
       <p:sp>
         <p:nvSpPr>
-          <p:cNvPr id="10" name="TextBox 9"/>
+          <p:cNvPr id="9" name="TextBox 8"/>
           <p:cNvSpPr txBox="1"/>
           <p:nvPr/>
         </p:nvSpPr>
         <p:spPr>
           <a:xfrm>
-            <a:off x="640080" y="2331720"/>
-            <a:ext cx="2377440" cy="731520"/>
+            <a:off x="594360" y="2084832"/>
+            <a:ext cx="3429000" cy="2057400"/>
           </a:xfrm>
           <a:prstGeom prst="rect">
             <a:avLst/>
@@ -4615,74 +5952,112 @@
           <a:noFill/>
         </p:spPr>
         <p:txBody>
-          <a:bodyPr wrap="none" anchor="ctr">
+          <a:bodyPr wrap="square" lIns="0" rIns="0" tIns="0" bIns="0">
             <a:spAutoFit/>
           </a:bodyPr>
           <a:lstStyle/>
           <a:p>
-            <a:pPr algn="ctr"/>
-            <a:r>
-              <a:rPr sz="2000" b="1">
-                <a:solidFill>
-                  <a:srgbClr val="FFFFFF"/>
-                </a:solidFill>
-                <a:latin typeface="Meiryo"/>
-              </a:rPr>
-              <a:t>31〜60</a:t>
-            </a:r>
-          </a:p>
-        </p:txBody>
-      </p:sp>
-      <p:sp>
-        <p:nvSpPr>
-          <p:cNvPr id="11" name="TextBox 10"/>
-          <p:cNvSpPr txBox="1"/>
-          <p:nvPr/>
-        </p:nvSpPr>
-        <p:spPr>
-          <a:xfrm>
-            <a:off x="3200400" y="2331720"/>
-            <a:ext cx="8046720" cy="731520"/>
-          </a:xfrm>
-          <a:prstGeom prst="rect">
-            <a:avLst/>
-          </a:prstGeom>
-          <a:noFill/>
-        </p:spPr>
-        <p:txBody>
-          <a:bodyPr wrap="none" anchor="ctr">
-            <a:spAutoFit/>
-          </a:bodyPr>
-          <a:lstStyle/>
-          <a:p>
-            <a:r>
-              <a:rPr sz="2000" b="0">
-                <a:solidFill>
-                  <a:srgbClr val="1F335E"/>
-                </a:solidFill>
-                <a:latin typeface="Meiryo"/>
-              </a:rPr>
-              <a:t>一部参考にした／判定困難</a:t>
-            </a:r>
-          </a:p>
-        </p:txBody>
-      </p:sp>
-      <p:sp>
-        <p:nvSpPr>
-          <p:cNvPr id="12" name="Rectangle 11"/>
+            <a:pPr algn="l">
+              <a:spcBef>
+                <a:spcPts val="0"/>
+              </a:spcBef>
+              <a:spcAft>
+                <a:spcPts val="400"/>
+              </a:spcAft>
+            </a:pPr>
+            <a:r>
+              <a:rPr sz="1200">
+                <a:solidFill>
+                  <a:srgbClr val="2E7D57"/>
+                </a:solidFill>
+                <a:latin typeface="ヒラギノ角ゴ ProN W6"/>
+                <a:ea typeface="ヒラギノ角ゴ ProN W6"/>
+                <a:cs typeface="ヒラギノ角ゴ ProN W6"/>
+              </a:rPr>
+              <a:t>人間らしい → 可能性は低</a:t>
+            </a:r>
+          </a:p>
+          <a:p>
+            <a:pPr algn="l">
+              <a:spcBef>
+                <a:spcPts val="0"/>
+              </a:spcBef>
+              <a:spcAft>
+                <a:spcPts val="200"/>
+              </a:spcAft>
+            </a:pPr>
+            <a:r>
+              <a:rPr sz="1200">
+                <a:solidFill>
+                  <a:srgbClr val="1A1A1A"/>
+                </a:solidFill>
+                <a:latin typeface="ヒラギノ角ゴ ProN W3"/>
+                <a:ea typeface="ヒラギノ角ゴ ProN W3"/>
+                <a:cs typeface="ヒラギノ角ゴ ProN W3"/>
+              </a:rPr>
+              <a:t>・経験・失敗・迷いの記述</a:t>
+            </a:r>
+          </a:p>
+          <a:p>
+            <a:pPr algn="l">
+              <a:spcBef>
+                <a:spcPts val="0"/>
+              </a:spcBef>
+              <a:spcAft>
+                <a:spcPts val="200"/>
+              </a:spcAft>
+            </a:pPr>
+            <a:r>
+              <a:rPr sz="1200">
+                <a:solidFill>
+                  <a:srgbClr val="1A1A1A"/>
+                </a:solidFill>
+                <a:latin typeface="ヒラギノ角ゴ ProN W3"/>
+                <a:ea typeface="ヒラギノ角ゴ ProN W3"/>
+                <a:cs typeface="ヒラギノ角ゴ ProN W3"/>
+              </a:rPr>
+              <a:t>・部活／家族／友人／地域</a:t>
+            </a:r>
+          </a:p>
+          <a:p>
+            <a:pPr algn="l">
+              <a:spcBef>
+                <a:spcPts val="0"/>
+              </a:spcBef>
+              <a:spcAft>
+                <a:spcPts val="200"/>
+              </a:spcAft>
+            </a:pPr>
+            <a:r>
+              <a:rPr sz="1200">
+                <a:solidFill>
+                  <a:srgbClr val="1A1A1A"/>
+                </a:solidFill>
+                <a:latin typeface="ヒラギノ角ゴ ProN W3"/>
+                <a:ea typeface="ヒラギノ角ゴ ProN W3"/>
+                <a:cs typeface="ヒラギノ角ゴ ProN W3"/>
+              </a:rPr>
+              <a:t>・固有名詞・具体的な場面</a:t>
+            </a:r>
+          </a:p>
+        </p:txBody>
+      </p:sp>
+      <p:sp>
+        <p:nvSpPr>
+          <p:cNvPr id="10" name="Rectangle 9"/>
           <p:cNvSpPr/>
           <p:nvPr/>
         </p:nvSpPr>
         <p:spPr>
           <a:xfrm>
-            <a:off x="640080" y="3200400"/>
-            <a:ext cx="2377440" cy="731520"/>
+            <a:off x="457200" y="4297680"/>
+            <a:ext cx="3703320" cy="2240280"/>
           </a:xfrm>
           <a:prstGeom prst="rect">
             <a:avLst/>
           </a:prstGeom>
           <a:solidFill>
-            <a:srgbClr val="C97A12"/>
+            <a:srgbClr val="E2EFEC"/>
           </a:solidFill>
           <a:ln>
             <a:noFill/>
@@ -4713,14 +6088,14 @@
       </p:sp>
       <p:sp>
         <p:nvSpPr>
-          <p:cNvPr id="13" name="TextBox 12"/>
+          <p:cNvPr id="11" name="TextBox 10"/>
           <p:cNvSpPr txBox="1"/>
           <p:nvPr/>
         </p:nvSpPr>
         <p:spPr>
           <a:xfrm>
-            <a:off x="640080" y="3200400"/>
-            <a:ext cx="2377440" cy="731520"/>
+            <a:off x="594360" y="4416552"/>
+            <a:ext cx="3429000" cy="2057400"/>
           </a:xfrm>
           <a:prstGeom prst="rect">
             <a:avLst/>
@@ -4728,74 +6103,112 @@
           <a:noFill/>
         </p:spPr>
         <p:txBody>
-          <a:bodyPr wrap="none" anchor="ctr">
+          <a:bodyPr wrap="square" lIns="0" rIns="0" tIns="0" bIns="0">
             <a:spAutoFit/>
           </a:bodyPr>
           <a:lstStyle/>
           <a:p>
-            <a:pPr algn="ctr"/>
-            <a:r>
-              <a:rPr sz="2000" b="1">
-                <a:solidFill>
-                  <a:srgbClr val="FFFFFF"/>
-                </a:solidFill>
-                <a:latin typeface="Meiryo"/>
-              </a:rPr>
-              <a:t>61〜80</a:t>
-            </a:r>
-          </a:p>
-        </p:txBody>
-      </p:sp>
-      <p:sp>
-        <p:nvSpPr>
-          <p:cNvPr id="14" name="TextBox 13"/>
-          <p:cNvSpPr txBox="1"/>
-          <p:nvPr/>
-        </p:nvSpPr>
-        <p:spPr>
-          <a:xfrm>
-            <a:off x="3200400" y="3200400"/>
-            <a:ext cx="8046720" cy="731520"/>
-          </a:xfrm>
-          <a:prstGeom prst="rect">
-            <a:avLst/>
-          </a:prstGeom>
-          <a:noFill/>
-        </p:spPr>
-        <p:txBody>
-          <a:bodyPr wrap="none" anchor="ctr">
-            <a:spAutoFit/>
-          </a:bodyPr>
-          <a:lstStyle/>
-          <a:p>
-            <a:r>
-              <a:rPr sz="2000" b="0">
-                <a:solidFill>
-                  <a:srgbClr val="1F335E"/>
-                </a:solidFill>
-                <a:latin typeface="Meiryo"/>
-              </a:rPr>
-              <a:t>書き写した可能性がやや高い</a:t>
-            </a:r>
-          </a:p>
-        </p:txBody>
-      </p:sp>
-      <p:sp>
-        <p:nvSpPr>
-          <p:cNvPr id="15" name="Rectangle 14"/>
+            <a:pPr algn="l">
+              <a:spcBef>
+                <a:spcPts val="0"/>
+              </a:spcBef>
+              <a:spcAft>
+                <a:spcPts val="400"/>
+              </a:spcAft>
+            </a:pPr>
+            <a:r>
+              <a:rPr sz="1200">
+                <a:solidFill>
+                  <a:srgbClr val="B33A2E"/>
+                </a:solidFill>
+                <a:latin typeface="ヒラギノ角ゴ ProN W6"/>
+                <a:ea typeface="ヒラギノ角ゴ ProN W6"/>
+                <a:cs typeface="ヒラギノ角ゴ ProN W6"/>
+              </a:rPr>
+              <a:t>AIらしい → 可能性は高</a:t>
+            </a:r>
+          </a:p>
+          <a:p>
+            <a:pPr algn="l">
+              <a:spcBef>
+                <a:spcPts val="0"/>
+              </a:spcBef>
+              <a:spcAft>
+                <a:spcPts val="200"/>
+              </a:spcAft>
+            </a:pPr>
+            <a:r>
+              <a:rPr sz="1200">
+                <a:solidFill>
+                  <a:srgbClr val="1A1A1A"/>
+                </a:solidFill>
+                <a:latin typeface="ヒラギノ角ゴ ProN W3"/>
+                <a:ea typeface="ヒラギノ角ゴ ProN W3"/>
+                <a:cs typeface="ヒラギノ角ゴ ProN W3"/>
+              </a:rPr>
+              <a:t>・一般論・大きな主語ばかり</a:t>
+            </a:r>
+          </a:p>
+          <a:p>
+            <a:pPr algn="l">
+              <a:spcBef>
+                <a:spcPts val="0"/>
+              </a:spcBef>
+              <a:spcAft>
+                <a:spcPts val="200"/>
+              </a:spcAft>
+            </a:pPr>
+            <a:r>
+              <a:rPr sz="1200">
+                <a:solidFill>
+                  <a:srgbClr val="1A1A1A"/>
+                </a:solidFill>
+                <a:latin typeface="ヒラギノ角ゴ ProN W3"/>
+                <a:ea typeface="ヒラギノ角ゴ ProN W3"/>
+                <a:cs typeface="ヒラギノ角ゴ ProN W3"/>
+              </a:rPr>
+              <a:t>・どの生徒でも書ける内容</a:t>
+            </a:r>
+          </a:p>
+          <a:p>
+            <a:pPr algn="l">
+              <a:spcBef>
+                <a:spcPts val="0"/>
+              </a:spcBef>
+              <a:spcAft>
+                <a:spcPts val="200"/>
+              </a:spcAft>
+            </a:pPr>
+            <a:r>
+              <a:rPr sz="1200">
+                <a:solidFill>
+                  <a:srgbClr val="1A1A1A"/>
+                </a:solidFill>
+                <a:latin typeface="ヒラギノ角ゴ ProN W3"/>
+                <a:ea typeface="ヒラギノ角ゴ ProN W3"/>
+                <a:cs typeface="ヒラギノ角ゴ ProN W3"/>
+              </a:rPr>
+              <a:t>・体験が抽象的で場面が不明</a:t>
+            </a:r>
+          </a:p>
+        </p:txBody>
+      </p:sp>
+      <p:sp>
+        <p:nvSpPr>
+          <p:cNvPr id="12" name="Rectangle 11"/>
           <p:cNvSpPr/>
           <p:nvPr/>
         </p:nvSpPr>
         <p:spPr>
           <a:xfrm>
-            <a:off x="640080" y="4069080"/>
-            <a:ext cx="2377440" cy="731520"/>
+            <a:off x="4389120" y="1371600"/>
+            <a:ext cx="3703320" cy="548640"/>
           </a:xfrm>
           <a:prstGeom prst="rect">
             <a:avLst/>
           </a:prstGeom>
           <a:solidFill>
-            <a:srgbClr val="B32A2A"/>
+            <a:srgbClr val="3E8C7C"/>
           </a:solidFill>
           <a:ln>
             <a:noFill/>
@@ -4826,14 +6239,14 @@
       </p:sp>
       <p:sp>
         <p:nvSpPr>
-          <p:cNvPr id="16" name="TextBox 15"/>
+          <p:cNvPr id="13" name="TextBox 12"/>
           <p:cNvSpPr txBox="1"/>
           <p:nvPr/>
         </p:nvSpPr>
         <p:spPr>
           <a:xfrm>
-            <a:off x="640080" y="4069080"/>
-            <a:ext cx="2377440" cy="731520"/>
+            <a:off x="4389120" y="1371600"/>
+            <a:ext cx="3703320" cy="548640"/>
           </a:xfrm>
           <a:prstGeom prst="rect">
             <a:avLst/>
@@ -4841,21 +6254,225 @@
           <a:noFill/>
         </p:spPr>
         <p:txBody>
-          <a:bodyPr wrap="none" anchor="ctr">
+          <a:bodyPr wrap="square" lIns="0" rIns="0" tIns="0" bIns="0" anchor="ctr">
             <a:spAutoFit/>
           </a:bodyPr>
           <a:lstStyle/>
           <a:p>
+            <a:pPr algn="ctr">
+              <a:spcBef>
+                <a:spcPts val="0"/>
+              </a:spcBef>
+              <a:spcAft>
+                <a:spcPts val="400"/>
+              </a:spcAft>
+            </a:pPr>
+            <a:r>
+              <a:rPr sz="1500">
+                <a:solidFill>
+                  <a:srgbClr val="FFFFFF"/>
+                </a:solidFill>
+                <a:latin typeface="ヒラギノ角ゴ ProN W6"/>
+                <a:ea typeface="ヒラギノ角ゴ ProN W6"/>
+                <a:cs typeface="ヒラギノ角ゴ ProN W6"/>
+              </a:rPr>
+              <a:t>B. 文体・語彙</a:t>
+            </a:r>
+          </a:p>
+        </p:txBody>
+      </p:sp>
+      <p:sp>
+        <p:nvSpPr>
+          <p:cNvPr id="14" name="Rectangle 13"/>
+          <p:cNvSpPr/>
+          <p:nvPr/>
+        </p:nvSpPr>
+        <p:spPr>
+          <a:xfrm>
+            <a:off x="4389120" y="1965960"/>
+            <a:ext cx="3703320" cy="2240280"/>
+          </a:xfrm>
+          <a:prstGeom prst="rect">
+            <a:avLst/>
+          </a:prstGeom>
+          <a:solidFill>
+            <a:srgbClr val="F1F7F5"/>
+          </a:solidFill>
+          <a:ln>
+            <a:noFill/>
+          </a:ln>
+          <a:effectLst/>
+        </p:spPr>
+        <p:style>
+          <a:lnRef idx="1">
+            <a:schemeClr val="accent1"/>
+          </a:lnRef>
+          <a:fillRef idx="3">
+            <a:schemeClr val="accent1"/>
+          </a:fillRef>
+          <a:effectRef idx="2">
+            <a:schemeClr val="accent1"/>
+          </a:effectRef>
+          <a:fontRef idx="minor">
+            <a:schemeClr val="lt1"/>
+          </a:fontRef>
+        </p:style>
+        <p:txBody>
+          <a:bodyPr rtlCol="0" anchor="ctr"/>
+          <a:lstStyle/>
+          <a:p>
             <a:pPr algn="ctr"/>
-            <a:r>
-              <a:rPr sz="2000" b="1">
-                <a:solidFill>
-                  <a:srgbClr val="FFFFFF"/>
-                </a:solidFill>
-                <a:latin typeface="Meiryo"/>
-              </a:rPr>
-              <a:t>81〜100</a:t>
-            </a:r>
+          </a:p>
+        </p:txBody>
+      </p:sp>
+      <p:sp>
+        <p:nvSpPr>
+          <p:cNvPr id="15" name="TextBox 14"/>
+          <p:cNvSpPr txBox="1"/>
+          <p:nvPr/>
+        </p:nvSpPr>
+        <p:spPr>
+          <a:xfrm>
+            <a:off x="4526280" y="2084832"/>
+            <a:ext cx="3429000" cy="2057400"/>
+          </a:xfrm>
+          <a:prstGeom prst="rect">
+            <a:avLst/>
+          </a:prstGeom>
+          <a:noFill/>
+        </p:spPr>
+        <p:txBody>
+          <a:bodyPr wrap="square" lIns="0" rIns="0" tIns="0" bIns="0">
+            <a:spAutoFit/>
+          </a:bodyPr>
+          <a:lstStyle/>
+          <a:p>
+            <a:pPr algn="l">
+              <a:spcBef>
+                <a:spcPts val="0"/>
+              </a:spcBef>
+              <a:spcAft>
+                <a:spcPts val="400"/>
+              </a:spcAft>
+            </a:pPr>
+            <a:r>
+              <a:rPr sz="1200">
+                <a:solidFill>
+                  <a:srgbClr val="2E7D57"/>
+                </a:solidFill>
+                <a:latin typeface="ヒラギノ角ゴ ProN W6"/>
+                <a:ea typeface="ヒラギノ角ゴ ProN W6"/>
+                <a:cs typeface="ヒラギノ角ゴ ProN W6"/>
+              </a:rPr>
+              <a:t>人間らしい → 可能性は低</a:t>
+            </a:r>
+          </a:p>
+          <a:p>
+            <a:pPr algn="l">
+              <a:spcBef>
+                <a:spcPts val="0"/>
+              </a:spcBef>
+              <a:spcAft>
+                <a:spcPts val="200"/>
+              </a:spcAft>
+            </a:pPr>
+            <a:r>
+              <a:rPr sz="1200">
+                <a:solidFill>
+                  <a:srgbClr val="1A1A1A"/>
+                </a:solidFill>
+                <a:latin typeface="ヒラギノ角ゴ ProN W3"/>
+                <a:ea typeface="ヒラギノ角ゴ ProN W3"/>
+                <a:cs typeface="ヒラギノ角ゴ ProN W3"/>
+              </a:rPr>
+              <a:t>・高校生らしい自然な言い回し</a:t>
+            </a:r>
+          </a:p>
+          <a:p>
+            <a:pPr algn="l">
+              <a:spcBef>
+                <a:spcPts val="0"/>
+              </a:spcBef>
+              <a:spcAft>
+                <a:spcPts val="200"/>
+              </a:spcAft>
+            </a:pPr>
+            <a:r>
+              <a:rPr sz="1200">
+                <a:solidFill>
+                  <a:srgbClr val="1A1A1A"/>
+                </a:solidFill>
+                <a:latin typeface="ヒラギノ角ゴ ProN W3"/>
+                <a:ea typeface="ヒラギノ角ゴ ProN W3"/>
+                <a:cs typeface="ヒラギノ角ゴ ProN W3"/>
+              </a:rPr>
+              <a:t>・文の長さにばらつき</a:t>
+            </a:r>
+          </a:p>
+          <a:p>
+            <a:pPr algn="l">
+              <a:spcBef>
+                <a:spcPts val="0"/>
+              </a:spcBef>
+              <a:spcAft>
+                <a:spcPts val="200"/>
+              </a:spcAft>
+            </a:pPr>
+            <a:r>
+              <a:rPr sz="1200">
+                <a:solidFill>
+                  <a:srgbClr val="1A1A1A"/>
+                </a:solidFill>
+                <a:latin typeface="ヒラギノ角ゴ ProN W3"/>
+                <a:ea typeface="ヒラギノ角ゴ ProN W3"/>
+                <a:cs typeface="ヒラギノ角ゴ ProN W3"/>
+              </a:rPr>
+              <a:t>・感情や言い直しの揺れ</a:t>
+            </a:r>
+          </a:p>
+        </p:txBody>
+      </p:sp>
+      <p:sp>
+        <p:nvSpPr>
+          <p:cNvPr id="16" name="Rectangle 15"/>
+          <p:cNvSpPr/>
+          <p:nvPr/>
+        </p:nvSpPr>
+        <p:spPr>
+          <a:xfrm>
+            <a:off x="4389120" y="4297680"/>
+            <a:ext cx="3703320" cy="2240280"/>
+          </a:xfrm>
+          <a:prstGeom prst="rect">
+            <a:avLst/>
+          </a:prstGeom>
+          <a:solidFill>
+            <a:srgbClr val="E2EFEC"/>
+          </a:solidFill>
+          <a:ln>
+            <a:noFill/>
+          </a:ln>
+          <a:effectLst/>
+        </p:spPr>
+        <p:style>
+          <a:lnRef idx="1">
+            <a:schemeClr val="accent1"/>
+          </a:lnRef>
+          <a:fillRef idx="3">
+            <a:schemeClr val="accent1"/>
+          </a:fillRef>
+          <a:effectRef idx="2">
+            <a:schemeClr val="accent1"/>
+          </a:effectRef>
+          <a:fontRef idx="minor">
+            <a:schemeClr val="lt1"/>
+          </a:fontRef>
+        </p:style>
+        <p:txBody>
+          <a:bodyPr rtlCol="0" anchor="ctr"/>
+          <a:lstStyle/>
+          <a:p>
+            <a:pPr algn="ctr"/>
           </a:p>
         </p:txBody>
       </p:sp>
@@ -4867,8 +6484,8 @@
         </p:nvSpPr>
         <p:spPr>
           <a:xfrm>
-            <a:off x="3200400" y="4069080"/>
-            <a:ext cx="8046720" cy="731520"/>
+            <a:off x="4526280" y="4416552"/>
+            <a:ext cx="3429000" cy="2057400"/>
           </a:xfrm>
           <a:prstGeom prst="rect">
             <a:avLst/>
@@ -4876,33 +6493,150 @@
           <a:noFill/>
         </p:spPr>
         <p:txBody>
-          <a:bodyPr wrap="none" anchor="ctr">
+          <a:bodyPr wrap="square" lIns="0" rIns="0" tIns="0" bIns="0">
             <a:spAutoFit/>
           </a:bodyPr>
           <a:lstStyle/>
           <a:p>
-            <a:r>
-              <a:rPr sz="2000" b="0">
-                <a:solidFill>
-                  <a:srgbClr val="1F335E"/>
-                </a:solidFill>
-                <a:latin typeface="Meiryo"/>
-              </a:rPr>
-              <a:t>書き写した可能性が高い</a:t>
-            </a:r>
-          </a:p>
-        </p:txBody>
-      </p:sp>
-      <p:sp>
-        <p:nvSpPr>
-          <p:cNvPr id="18" name="TextBox 17"/>
+            <a:pPr algn="l">
+              <a:spcBef>
+                <a:spcPts val="0"/>
+              </a:spcBef>
+              <a:spcAft>
+                <a:spcPts val="400"/>
+              </a:spcAft>
+            </a:pPr>
+            <a:r>
+              <a:rPr sz="1200">
+                <a:solidFill>
+                  <a:srgbClr val="B33A2E"/>
+                </a:solidFill>
+                <a:latin typeface="ヒラギノ角ゴ ProN W6"/>
+                <a:ea typeface="ヒラギノ角ゴ ProN W6"/>
+                <a:cs typeface="ヒラギノ角ゴ ProN W6"/>
+              </a:rPr>
+              <a:t>AIらしい → 可能性は高</a:t>
+            </a:r>
+          </a:p>
+          <a:p>
+            <a:pPr algn="l">
+              <a:spcBef>
+                <a:spcPts val="0"/>
+              </a:spcBef>
+              <a:spcAft>
+                <a:spcPts val="200"/>
+              </a:spcAft>
+            </a:pPr>
+            <a:r>
+              <a:rPr sz="1200">
+                <a:solidFill>
+                  <a:srgbClr val="1A1A1A"/>
+                </a:solidFill>
+                <a:latin typeface="ヒラギノ角ゴ ProN W3"/>
+                <a:ea typeface="ヒラギノ角ゴ ProN W3"/>
+                <a:cs typeface="ヒラギノ角ゴ ProN W3"/>
+              </a:rPr>
+              <a:t>・均質すぎる文体</a:t>
+            </a:r>
+          </a:p>
+          <a:p>
+            <a:pPr algn="l">
+              <a:spcBef>
+                <a:spcPts val="0"/>
+              </a:spcBef>
+              <a:spcAft>
+                <a:spcPts val="200"/>
+              </a:spcAft>
+            </a:pPr>
+            <a:r>
+              <a:rPr sz="1200">
+                <a:solidFill>
+                  <a:srgbClr val="1A1A1A"/>
+                </a:solidFill>
+                <a:latin typeface="ヒラギノ角ゴ ProN W3"/>
+                <a:ea typeface="ヒラギノ角ゴ ProN W3"/>
+                <a:cs typeface="ヒラギノ角ゴ ProN W3"/>
+              </a:rPr>
+              <a:t>・「〜が重要である」等の定型</a:t>
+            </a:r>
+          </a:p>
+          <a:p>
+            <a:pPr algn="l">
+              <a:spcBef>
+                <a:spcPts val="0"/>
+              </a:spcBef>
+              <a:spcAft>
+                <a:spcPts val="200"/>
+              </a:spcAft>
+            </a:pPr>
+            <a:r>
+              <a:rPr sz="1200">
+                <a:solidFill>
+                  <a:srgbClr val="1A1A1A"/>
+                </a:solidFill>
+                <a:latin typeface="ヒラギノ角ゴ ProN W3"/>
+                <a:ea typeface="ヒラギノ角ゴ ProN W3"/>
+                <a:cs typeface="ヒラギノ角ゴ ProN W3"/>
+              </a:rPr>
+              <a:t>・不自然に硬い抽象語の多用</a:t>
+            </a:r>
+          </a:p>
+        </p:txBody>
+      </p:sp>
+      <p:sp>
+        <p:nvSpPr>
+          <p:cNvPr id="18" name="Rectangle 17"/>
+          <p:cNvSpPr/>
+          <p:nvPr/>
+        </p:nvSpPr>
+        <p:spPr>
+          <a:xfrm>
+            <a:off x="8321040" y="1371600"/>
+            <a:ext cx="3703320" cy="548640"/>
+          </a:xfrm>
+          <a:prstGeom prst="rect">
+            <a:avLst/>
+          </a:prstGeom>
+          <a:solidFill>
+            <a:srgbClr val="3E8C7C"/>
+          </a:solidFill>
+          <a:ln>
+            <a:noFill/>
+          </a:ln>
+          <a:effectLst/>
+        </p:spPr>
+        <p:style>
+          <a:lnRef idx="1">
+            <a:schemeClr val="accent1"/>
+          </a:lnRef>
+          <a:fillRef idx="3">
+            <a:schemeClr val="accent1"/>
+          </a:fillRef>
+          <a:effectRef idx="2">
+            <a:schemeClr val="accent1"/>
+          </a:effectRef>
+          <a:fontRef idx="minor">
+            <a:schemeClr val="lt1"/>
+          </a:fontRef>
+        </p:style>
+        <p:txBody>
+          <a:bodyPr rtlCol="0" anchor="ctr"/>
+          <a:lstStyle/>
+          <a:p>
+            <a:pPr algn="ctr"/>
+          </a:p>
+        </p:txBody>
+      </p:sp>
+      <p:sp>
+        <p:nvSpPr>
+          <p:cNvPr id="19" name="TextBox 18"/>
           <p:cNvSpPr txBox="1"/>
           <p:nvPr/>
         </p:nvSpPr>
         <p:spPr>
           <a:xfrm>
-            <a:off x="640080" y="5120640"/>
-            <a:ext cx="10881360" cy="1280160"/>
+            <a:off x="8321040" y="1371600"/>
+            <a:ext cx="3703320" cy="548640"/>
           </a:xfrm>
           <a:prstGeom prst="rect">
             <a:avLst/>
@@ -4910,19 +6644,331 @@
           <a:noFill/>
         </p:spPr>
         <p:txBody>
-          <a:bodyPr wrap="square">
+          <a:bodyPr wrap="square" lIns="0" rIns="0" tIns="0" bIns="0" anchor="ctr">
             <a:spAutoFit/>
           </a:bodyPr>
           <a:lstStyle/>
           <a:p>
-            <a:r>
-              <a:rPr sz="1600" b="0">
-                <a:solidFill>
-                  <a:srgbClr val="555555"/>
-                </a:solidFill>
-                <a:latin typeface="Meiryo"/>
-              </a:rPr>
-              <a:t>運用方針：迷う場合は 40〜60 に寄せる。0〜10／90〜100 の極端な値は、明確な根拠が複数そろう場合のみ使用。</a:t>
+            <a:pPr algn="ctr">
+              <a:spcBef>
+                <a:spcPts val="0"/>
+              </a:spcBef>
+              <a:spcAft>
+                <a:spcPts val="400"/>
+              </a:spcAft>
+            </a:pPr>
+            <a:r>
+              <a:rPr sz="1500">
+                <a:solidFill>
+                  <a:srgbClr val="FFFFFF"/>
+                </a:solidFill>
+                <a:latin typeface="ヒラギノ角ゴ ProN W6"/>
+                <a:ea typeface="ヒラギノ角ゴ ProN W6"/>
+                <a:cs typeface="ヒラギノ角ゴ ProN W6"/>
+              </a:rPr>
+              <a:t>C. 構成</a:t>
+            </a:r>
+          </a:p>
+        </p:txBody>
+      </p:sp>
+      <p:sp>
+        <p:nvSpPr>
+          <p:cNvPr id="20" name="Rectangle 19"/>
+          <p:cNvSpPr/>
+          <p:nvPr/>
+        </p:nvSpPr>
+        <p:spPr>
+          <a:xfrm>
+            <a:off x="8321040" y="1965960"/>
+            <a:ext cx="3703320" cy="2240280"/>
+          </a:xfrm>
+          <a:prstGeom prst="rect">
+            <a:avLst/>
+          </a:prstGeom>
+          <a:solidFill>
+            <a:srgbClr val="F1F7F5"/>
+          </a:solidFill>
+          <a:ln>
+            <a:noFill/>
+          </a:ln>
+          <a:effectLst/>
+        </p:spPr>
+        <p:style>
+          <a:lnRef idx="1">
+            <a:schemeClr val="accent1"/>
+          </a:lnRef>
+          <a:fillRef idx="3">
+            <a:schemeClr val="accent1"/>
+          </a:fillRef>
+          <a:effectRef idx="2">
+            <a:schemeClr val="accent1"/>
+          </a:effectRef>
+          <a:fontRef idx="minor">
+            <a:schemeClr val="lt1"/>
+          </a:fontRef>
+        </p:style>
+        <p:txBody>
+          <a:bodyPr rtlCol="0" anchor="ctr"/>
+          <a:lstStyle/>
+          <a:p>
+            <a:pPr algn="ctr"/>
+          </a:p>
+        </p:txBody>
+      </p:sp>
+      <p:sp>
+        <p:nvSpPr>
+          <p:cNvPr id="21" name="TextBox 20"/>
+          <p:cNvSpPr txBox="1"/>
+          <p:nvPr/>
+        </p:nvSpPr>
+        <p:spPr>
+          <a:xfrm>
+            <a:off x="8458200" y="2084832"/>
+            <a:ext cx="3429000" cy="2057400"/>
+          </a:xfrm>
+          <a:prstGeom prst="rect">
+            <a:avLst/>
+          </a:prstGeom>
+          <a:noFill/>
+        </p:spPr>
+        <p:txBody>
+          <a:bodyPr wrap="square" lIns="0" rIns="0" tIns="0" bIns="0">
+            <a:spAutoFit/>
+          </a:bodyPr>
+          <a:lstStyle/>
+          <a:p>
+            <a:pPr algn="l">
+              <a:spcBef>
+                <a:spcPts val="0"/>
+              </a:spcBef>
+              <a:spcAft>
+                <a:spcPts val="400"/>
+              </a:spcAft>
+            </a:pPr>
+            <a:r>
+              <a:rPr sz="1200">
+                <a:solidFill>
+                  <a:srgbClr val="2E7D57"/>
+                </a:solidFill>
+                <a:latin typeface="ヒラギノ角ゴ ProN W6"/>
+                <a:ea typeface="ヒラギノ角ゴ ProN W6"/>
+                <a:cs typeface="ヒラギノ角ゴ ProN W6"/>
+              </a:rPr>
+              <a:t>人間らしい → 可能性は低</a:t>
+            </a:r>
+          </a:p>
+          <a:p>
+            <a:pPr algn="l">
+              <a:spcBef>
+                <a:spcPts val="0"/>
+              </a:spcBef>
+              <a:spcAft>
+                <a:spcPts val="200"/>
+              </a:spcAft>
+            </a:pPr>
+            <a:r>
+              <a:rPr sz="1200">
+                <a:solidFill>
+                  <a:srgbClr val="1A1A1A"/>
+                </a:solidFill>
+                <a:latin typeface="ヒラギノ角ゴ ProN W3"/>
+                <a:ea typeface="ヒラギノ角ゴ ProN W3"/>
+                <a:cs typeface="ヒラギノ角ゴ ProN W3"/>
+              </a:rPr>
+              <a:t>・多少の偏り・寄り道がある</a:t>
+            </a:r>
+          </a:p>
+          <a:p>
+            <a:pPr algn="l">
+              <a:spcBef>
+                <a:spcPts val="0"/>
+              </a:spcBef>
+              <a:spcAft>
+                <a:spcPts val="200"/>
+              </a:spcAft>
+            </a:pPr>
+            <a:r>
+              <a:rPr sz="1200">
+                <a:solidFill>
+                  <a:srgbClr val="1A1A1A"/>
+                </a:solidFill>
+                <a:latin typeface="ヒラギノ角ゴ ProN W3"/>
+                <a:ea typeface="ヒラギノ角ゴ ProN W3"/>
+                <a:cs typeface="ヒラギノ角ゴ ProN W3"/>
+              </a:rPr>
+              <a:t>・段落ごとに熱量差がある</a:t>
+            </a:r>
+          </a:p>
+          <a:p>
+            <a:pPr algn="l">
+              <a:spcBef>
+                <a:spcPts val="0"/>
+              </a:spcBef>
+              <a:spcAft>
+                <a:spcPts val="200"/>
+              </a:spcAft>
+            </a:pPr>
+            <a:r>
+              <a:rPr sz="1200">
+                <a:solidFill>
+                  <a:srgbClr val="1A1A1A"/>
+                </a:solidFill>
+                <a:latin typeface="ヒラギノ角ゴ ProN W3"/>
+                <a:ea typeface="ヒラギノ角ゴ ProN W3"/>
+                <a:cs typeface="ヒラギノ角ゴ ProN W3"/>
+              </a:rPr>
+              <a:t>・本人の考えの流れが見える</a:t>
+            </a:r>
+          </a:p>
+        </p:txBody>
+      </p:sp>
+      <p:sp>
+        <p:nvSpPr>
+          <p:cNvPr id="22" name="Rectangle 21"/>
+          <p:cNvSpPr/>
+          <p:nvPr/>
+        </p:nvSpPr>
+        <p:spPr>
+          <a:xfrm>
+            <a:off x="8321040" y="4297680"/>
+            <a:ext cx="3703320" cy="2240280"/>
+          </a:xfrm>
+          <a:prstGeom prst="rect">
+            <a:avLst/>
+          </a:prstGeom>
+          <a:solidFill>
+            <a:srgbClr val="E2EFEC"/>
+          </a:solidFill>
+          <a:ln>
+            <a:noFill/>
+          </a:ln>
+          <a:effectLst/>
+        </p:spPr>
+        <p:style>
+          <a:lnRef idx="1">
+            <a:schemeClr val="accent1"/>
+          </a:lnRef>
+          <a:fillRef idx="3">
+            <a:schemeClr val="accent1"/>
+          </a:fillRef>
+          <a:effectRef idx="2">
+            <a:schemeClr val="accent1"/>
+          </a:effectRef>
+          <a:fontRef idx="minor">
+            <a:schemeClr val="lt1"/>
+          </a:fontRef>
+        </p:style>
+        <p:txBody>
+          <a:bodyPr rtlCol="0" anchor="ctr"/>
+          <a:lstStyle/>
+          <a:p>
+            <a:pPr algn="ctr"/>
+          </a:p>
+        </p:txBody>
+      </p:sp>
+      <p:sp>
+        <p:nvSpPr>
+          <p:cNvPr id="23" name="TextBox 22"/>
+          <p:cNvSpPr txBox="1"/>
+          <p:nvPr/>
+        </p:nvSpPr>
+        <p:spPr>
+          <a:xfrm>
+            <a:off x="8458200" y="4416552"/>
+            <a:ext cx="3429000" cy="2057400"/>
+          </a:xfrm>
+          <a:prstGeom prst="rect">
+            <a:avLst/>
+          </a:prstGeom>
+          <a:noFill/>
+        </p:spPr>
+        <p:txBody>
+          <a:bodyPr wrap="square" lIns="0" rIns="0" tIns="0" bIns="0">
+            <a:spAutoFit/>
+          </a:bodyPr>
+          <a:lstStyle/>
+          <a:p>
+            <a:pPr algn="l">
+              <a:spcBef>
+                <a:spcPts val="0"/>
+              </a:spcBef>
+              <a:spcAft>
+                <a:spcPts val="400"/>
+              </a:spcAft>
+            </a:pPr>
+            <a:r>
+              <a:rPr sz="1200">
+                <a:solidFill>
+                  <a:srgbClr val="B33A2E"/>
+                </a:solidFill>
+                <a:latin typeface="ヒラギノ角ゴ ProN W6"/>
+                <a:ea typeface="ヒラギノ角ゴ ProN W6"/>
+                <a:cs typeface="ヒラギノ角ゴ ProN W6"/>
+              </a:rPr>
+              <a:t>AIらしい → 可能性は高</a:t>
+            </a:r>
+          </a:p>
+          <a:p>
+            <a:pPr algn="l">
+              <a:spcBef>
+                <a:spcPts val="0"/>
+              </a:spcBef>
+              <a:spcAft>
+                <a:spcPts val="200"/>
+              </a:spcAft>
+            </a:pPr>
+            <a:r>
+              <a:rPr sz="1200">
+                <a:solidFill>
+                  <a:srgbClr val="1A1A1A"/>
+                </a:solidFill>
+                <a:latin typeface="ヒラギノ角ゴ ProN W3"/>
+                <a:ea typeface="ヒラギノ角ゴ ProN W3"/>
+                <a:cs typeface="ヒラギノ角ゴ ProN W3"/>
+              </a:rPr>
+              <a:t>・整いすぎた序論・本論・結論</a:t>
+            </a:r>
+          </a:p>
+          <a:p>
+            <a:pPr algn="l">
+              <a:spcBef>
+                <a:spcPts val="0"/>
+              </a:spcBef>
+              <a:spcAft>
+                <a:spcPts val="200"/>
+              </a:spcAft>
+            </a:pPr>
+            <a:r>
+              <a:rPr sz="1200">
+                <a:solidFill>
+                  <a:srgbClr val="1A1A1A"/>
+                </a:solidFill>
+                <a:latin typeface="ヒラギノ角ゴ ProN W3"/>
+                <a:ea typeface="ヒラギノ角ゴ ProN W3"/>
+                <a:cs typeface="ヒラギノ角ゴ ProN W3"/>
+              </a:rPr>
+              <a:t>・機械的な整理（第一に…）</a:t>
+            </a:r>
+          </a:p>
+          <a:p>
+            <a:pPr algn="l">
+              <a:spcBef>
+                <a:spcPts val="0"/>
+              </a:spcBef>
+              <a:spcAft>
+                <a:spcPts val="200"/>
+              </a:spcAft>
+            </a:pPr>
+            <a:r>
+              <a:rPr sz="1200">
+                <a:solidFill>
+                  <a:srgbClr val="1A1A1A"/>
+                </a:solidFill>
+                <a:latin typeface="ヒラギノ角ゴ ProN W3"/>
+                <a:ea typeface="ヒラギノ角ゴ ProN W3"/>
+                <a:cs typeface="ヒラギノ角ゴ ProN W3"/>
+              </a:rPr>
+              <a:t>・模範解答的すぎる結び</a:t>
             </a:r>
           </a:p>
         </p:txBody>
@@ -4953,14 +6999,14 @@
         </p:nvSpPr>
         <p:spPr>
           <a:xfrm>
-            <a:off x="0" y="0"/>
-            <a:ext cx="12191695" cy="1005840"/>
+            <a:off x="0" y="411480"/>
+            <a:ext cx="146304" cy="566928"/>
           </a:xfrm>
           <a:prstGeom prst="rect">
             <a:avLst/>
           </a:prstGeom>
           <a:solidFill>
-            <a:srgbClr val="1F335E"/>
+            <a:srgbClr val="3E8C7C"/>
           </a:solidFill>
           <a:ln>
             <a:noFill/>
@@ -4991,20 +7037,64 @@
       </p:sp>
       <p:sp>
         <p:nvSpPr>
-          <p:cNvPr id="3" name="Rectangle 2"/>
+          <p:cNvPr id="3" name="TextBox 2"/>
+          <p:cNvSpPr txBox="1"/>
+          <p:nvPr/>
+        </p:nvSpPr>
+        <p:spPr>
+          <a:xfrm>
+            <a:off x="411480" y="365760"/>
+            <a:ext cx="10607040" cy="685800"/>
+          </a:xfrm>
+          <a:prstGeom prst="rect">
+            <a:avLst/>
+          </a:prstGeom>
+          <a:noFill/>
+        </p:spPr>
+        <p:txBody>
+          <a:bodyPr wrap="square" lIns="0" rIns="0" tIns="0" bIns="0" anchor="ctr">
+            <a:spAutoFit/>
+          </a:bodyPr>
+          <a:lstStyle/>
+          <a:p>
+            <a:pPr algn="l">
+              <a:spcBef>
+                <a:spcPts val="0"/>
+              </a:spcBef>
+              <a:spcAft>
+                <a:spcPts val="400"/>
+              </a:spcAft>
+            </a:pPr>
+            <a:r>
+              <a:rPr sz="2400">
+                <a:solidFill>
+                  <a:srgbClr val="1A1A1A"/>
+                </a:solidFill>
+                <a:latin typeface="ヒラギノ角ゴ ProN W6"/>
+                <a:ea typeface="ヒラギノ角ゴ ProN W6"/>
+                <a:cs typeface="ヒラギノ角ゴ ProN W6"/>
+              </a:rPr>
+              <a:t>誤判定を防ぐルールと、この指標の限界</a:t>
+            </a:r>
+          </a:p>
+        </p:txBody>
+      </p:sp>
+      <p:sp>
+        <p:nvSpPr>
+          <p:cNvPr id="4" name="Rectangle 3"/>
           <p:cNvSpPr/>
           <p:nvPr/>
         </p:nvSpPr>
         <p:spPr>
           <a:xfrm>
-            <a:off x="0" y="1005840"/>
-            <a:ext cx="12191695" cy="40000"/>
+            <a:off x="411480" y="1115568"/>
+            <a:ext cx="11384280" cy="27940"/>
           </a:xfrm>
           <a:prstGeom prst="rect">
             <a:avLst/>
           </a:prstGeom>
           <a:solidFill>
-            <a:srgbClr val="2E5CA6"/>
+            <a:srgbClr val="3E8C7C"/>
           </a:solidFill>
           <a:ln>
             <a:noFill/>
@@ -5035,48 +7125,14 @@
       </p:sp>
       <p:sp>
         <p:nvSpPr>
-          <p:cNvPr id="4" name="TextBox 3"/>
-          <p:cNvSpPr txBox="1"/>
-          <p:nvPr/>
-        </p:nvSpPr>
-        <p:spPr>
-          <a:xfrm>
-            <a:off x="457200" y="164592"/>
-            <a:ext cx="10515600" cy="731520"/>
-          </a:xfrm>
-          <a:prstGeom prst="rect">
-            <a:avLst/>
-          </a:prstGeom>
-          <a:noFill/>
-        </p:spPr>
-        <p:txBody>
-          <a:bodyPr wrap="none" anchor="ctr">
-            <a:spAutoFit/>
-          </a:bodyPr>
-          <a:lstStyle/>
-          <a:p>
-            <a:r>
-              <a:rPr sz="2800" b="1">
-                <a:solidFill>
-                  <a:srgbClr val="FFFFFF"/>
-                </a:solidFill>
-                <a:latin typeface="Meiryo"/>
-              </a:rPr>
-              <a:t>3. 判定の仕組み（どう点数を出すか）</a:t>
-            </a:r>
-          </a:p>
-        </p:txBody>
-      </p:sp>
-      <p:sp>
-        <p:nvSpPr>
           <p:cNvPr id="5" name="TextBox 4"/>
           <p:cNvSpPr txBox="1"/>
           <p:nvPr/>
         </p:nvSpPr>
         <p:spPr>
           <a:xfrm>
-            <a:off x="11338560" y="164592"/>
-            <a:ext cx="640080" cy="731520"/>
+            <a:off x="11430000" y="457200"/>
+            <a:ext cx="548640" cy="457200"/>
           </a:xfrm>
           <a:prstGeom prst="rect">
             <a:avLst/>
@@ -5084,18 +7140,27 @@
           <a:noFill/>
         </p:spPr>
         <p:txBody>
-          <a:bodyPr wrap="none" anchor="ctr">
+          <a:bodyPr wrap="square" lIns="0" rIns="0" tIns="0" bIns="0">
             <a:spAutoFit/>
           </a:bodyPr>
           <a:lstStyle/>
           <a:p>
-            <a:pPr algn="r"/>
-            <a:r>
-              <a:rPr sz="1600" b="0">
-                <a:solidFill>
-                  <a:srgbClr val="FFFFFF"/>
-                </a:solidFill>
-                <a:latin typeface="Meiryo"/>
+            <a:pPr algn="r">
+              <a:spcBef>
+                <a:spcPts val="0"/>
+              </a:spcBef>
+              <a:spcAft>
+                <a:spcPts val="400"/>
+              </a:spcAft>
+            </a:pPr>
+            <a:r>
+              <a:rPr sz="1200">
+                <a:solidFill>
+                  <a:srgbClr val="3E8C7C"/>
+                </a:solidFill>
+                <a:latin typeface="ヒラギノ角ゴ ProN W6"/>
+                <a:ea typeface="ヒラギノ角ゴ ProN W6"/>
+                <a:cs typeface="ヒラギノ角ゴ ProN W6"/>
               </a:rPr>
               <a:t>5</a:t>
             </a:r>
@@ -5110,14 +7175,14 @@
         </p:nvSpPr>
         <p:spPr>
           <a:xfrm>
-            <a:off x="640080" y="1554480"/>
-            <a:ext cx="2468880" cy="1005840"/>
+            <a:off x="411480" y="1371600"/>
+            <a:ext cx="5669280" cy="502920"/>
           </a:xfrm>
           <a:prstGeom prst="rect">
             <a:avLst/>
           </a:prstGeom>
           <a:solidFill>
-            <a:srgbClr val="2E5CA6"/>
+            <a:srgbClr val="3E8C7C"/>
           </a:solidFill>
           <a:ln>
             <a:noFill/>
@@ -5154,8 +7219,8 @@
         </p:nvSpPr>
         <p:spPr>
           <a:xfrm>
-            <a:off x="640080" y="1554480"/>
-            <a:ext cx="2468880" cy="1005840"/>
+            <a:off x="411480" y="1371600"/>
+            <a:ext cx="5669280" cy="502920"/>
           </a:xfrm>
           <a:prstGeom prst="rect">
             <a:avLst/>
@@ -5163,75 +7228,49 @@
           <a:noFill/>
         </p:spPr>
         <p:txBody>
-          <a:bodyPr wrap="square" anchor="ctr">
+          <a:bodyPr wrap="square" lIns="0" rIns="0" tIns="0" bIns="0" anchor="ctr">
             <a:spAutoFit/>
           </a:bodyPr>
           <a:lstStyle/>
           <a:p>
-            <a:pPr algn="ctr"/>
-            <a:r>
-              <a:rPr sz="1500" b="1">
+            <a:pPr algn="ctr">
+              <a:spcBef>
+                <a:spcPts val="0"/>
+              </a:spcBef>
+              <a:spcAft>
+                <a:spcPts val="400"/>
+              </a:spcAft>
+            </a:pPr>
+            <a:r>
+              <a:rPr sz="1300">
                 <a:solidFill>
                   <a:srgbClr val="FFFFFF"/>
                 </a:solidFill>
-                <a:latin typeface="Meiryo"/>
-              </a:rPr>
-              <a:t>作文（手書き）</a:t>
-            </a:r>
-          </a:p>
-        </p:txBody>
-      </p:sp>
-      <p:sp>
-        <p:nvSpPr>
-          <p:cNvPr id="8" name="TextBox 7"/>
-          <p:cNvSpPr txBox="1"/>
-          <p:nvPr/>
-        </p:nvSpPr>
-        <p:spPr>
-          <a:xfrm>
-            <a:off x="3108960" y="1554480"/>
-            <a:ext cx="411480" cy="1005840"/>
-          </a:xfrm>
-          <a:prstGeom prst="rect">
-            <a:avLst/>
-          </a:prstGeom>
-          <a:noFill/>
-        </p:spPr>
-        <p:txBody>
-          <a:bodyPr wrap="none" anchor="ctr">
-            <a:spAutoFit/>
-          </a:bodyPr>
-          <a:lstStyle/>
-          <a:p>
-            <a:pPr algn="ctr"/>
-            <a:r>
-              <a:rPr sz="2000" b="1">
-                <a:solidFill>
-                  <a:srgbClr val="1F335E"/>
-                </a:solidFill>
-                <a:latin typeface="Meiryo"/>
-              </a:rPr>
-              <a:t>▶</a:t>
-            </a:r>
-          </a:p>
-        </p:txBody>
-      </p:sp>
-      <p:sp>
-        <p:nvSpPr>
-          <p:cNvPr id="9" name="Rectangle 8"/>
+                <a:latin typeface="ヒラギノ角ゴ ProN W6"/>
+                <a:ea typeface="ヒラギノ角ゴ ProN W6"/>
+                <a:cs typeface="ヒラギノ角ゴ ProN W6"/>
+              </a:rPr>
+              <a:t>公平性の担保（高スコアにしないルール）</a:t>
+            </a:r>
+          </a:p>
+        </p:txBody>
+      </p:sp>
+      <p:sp>
+        <p:nvSpPr>
+          <p:cNvPr id="8" name="Rectangle 7"/>
           <p:cNvSpPr/>
           <p:nvPr/>
         </p:nvSpPr>
         <p:spPr>
           <a:xfrm>
-            <a:off x="3520440" y="1554480"/>
-            <a:ext cx="2468880" cy="1005840"/>
+            <a:off x="411480" y="1901952"/>
+            <a:ext cx="5669280" cy="4480560"/>
           </a:xfrm>
           <a:prstGeom prst="rect">
             <a:avLst/>
           </a:prstGeom>
           <a:solidFill>
-            <a:srgbClr val="2E5CA6"/>
+            <a:srgbClr val="F1F7F5"/>
           </a:solidFill>
           <a:ln>
             <a:noFill/>
@@ -5262,14 +7301,14 @@
       </p:sp>
       <p:sp>
         <p:nvSpPr>
-          <p:cNvPr id="10" name="TextBox 9"/>
+          <p:cNvPr id="9" name="TextBox 8"/>
           <p:cNvSpPr txBox="1"/>
           <p:nvPr/>
         </p:nvSpPr>
         <p:spPr>
           <a:xfrm>
-            <a:off x="3520440" y="1554480"/>
-            <a:ext cx="2468880" cy="1005840"/>
+            <a:off x="640080" y="2057400"/>
+            <a:ext cx="5257800" cy="4206240"/>
           </a:xfrm>
           <a:prstGeom prst="rect">
             <a:avLst/>
@@ -5277,75 +7316,238 @@
           <a:noFill/>
         </p:spPr>
         <p:txBody>
-          <a:bodyPr wrap="square" anchor="ctr">
+          <a:bodyPr wrap="square" lIns="0" rIns="0" tIns="0" bIns="0">
             <a:spAutoFit/>
           </a:bodyPr>
           <a:lstStyle/>
           <a:p>
-            <a:pPr algn="ctr"/>
-            <a:r>
-              <a:rPr sz="1500" b="1">
-                <a:solidFill>
-                  <a:srgbClr val="FFFFFF"/>
-                </a:solidFill>
-                <a:latin typeface="Meiryo"/>
-              </a:rPr>
-              <a:t>テキスト化</a:t>
-            </a:r>
-          </a:p>
-        </p:txBody>
-      </p:sp>
-      <p:sp>
-        <p:nvSpPr>
-          <p:cNvPr id="11" name="TextBox 10"/>
-          <p:cNvSpPr txBox="1"/>
-          <p:nvPr/>
-        </p:nvSpPr>
-        <p:spPr>
-          <a:xfrm>
-            <a:off x="5989320" y="1554480"/>
-            <a:ext cx="411480" cy="1005840"/>
-          </a:xfrm>
-          <a:prstGeom prst="rect">
-            <a:avLst/>
-          </a:prstGeom>
-          <a:noFill/>
-        </p:spPr>
-        <p:txBody>
-          <a:bodyPr wrap="none" anchor="ctr">
-            <a:spAutoFit/>
-          </a:bodyPr>
-          <a:lstStyle/>
-          <a:p>
-            <a:pPr algn="ctr"/>
-            <a:r>
-              <a:rPr sz="2000" b="1">
-                <a:solidFill>
-                  <a:srgbClr val="1F335E"/>
-                </a:solidFill>
-                <a:latin typeface="Meiryo"/>
-              </a:rPr>
-              <a:t>▶</a:t>
-            </a:r>
-          </a:p>
-        </p:txBody>
-      </p:sp>
-      <p:sp>
-        <p:nvSpPr>
-          <p:cNvPr id="12" name="Rectangle 11"/>
+            <a:pPr algn="l">
+              <a:spcBef>
+                <a:spcPts val="0"/>
+              </a:spcBef>
+              <a:spcAft>
+                <a:spcPts val="600"/>
+              </a:spcAft>
+            </a:pPr>
+            <a:r>
+              <a:rPr sz="1300">
+                <a:solidFill>
+                  <a:srgbClr val="1A1A1A"/>
+                </a:solidFill>
+                <a:latin typeface="ヒラギノ角ゴ ProN W6"/>
+                <a:ea typeface="ヒラギノ角ゴ ProN W6"/>
+                <a:cs typeface="ヒラギノ角ゴ ProN W6"/>
+              </a:rPr>
+              <a:t>単独の特徴だけでは高スコアにしません。</a:t>
+            </a:r>
+          </a:p>
+          <a:p>
+            <a:pPr algn="l">
+              <a:spcBef>
+                <a:spcPts val="0"/>
+              </a:spcBef>
+              <a:spcAft>
+                <a:spcPts val="300"/>
+              </a:spcAft>
+            </a:pPr>
+            <a:r>
+              <a:rPr sz="1200">
+                <a:solidFill>
+                  <a:srgbClr val="1A1A1A"/>
+                </a:solidFill>
+                <a:latin typeface="ヒラギノ角ゴ ProN W3"/>
+                <a:ea typeface="ヒラギノ角ゴ ProN W3"/>
+                <a:cs typeface="ヒラギノ角ゴ ProN W3"/>
+              </a:rPr>
+              <a:t>・「手書きだから人間」とは判断しない</a:t>
+            </a:r>
+          </a:p>
+          <a:p>
+            <a:pPr algn="l">
+              <a:spcBef>
+                <a:spcPts val="0"/>
+              </a:spcBef>
+              <a:spcAft>
+                <a:spcPts val="300"/>
+              </a:spcAft>
+            </a:pPr>
+            <a:r>
+              <a:rPr sz="1200">
+                <a:solidFill>
+                  <a:srgbClr val="1A1A1A"/>
+                </a:solidFill>
+                <a:latin typeface="ヒラギノ角ゴ ProN W3"/>
+                <a:ea typeface="ヒラギノ角ゴ ProN W3"/>
+                <a:cs typeface="ヒラギノ角ゴ ProN W3"/>
+              </a:rPr>
+              <a:t>・「誤字脱字があるから人間」と単独で判断しない</a:t>
+            </a:r>
+          </a:p>
+          <a:p>
+            <a:pPr algn="l">
+              <a:spcBef>
+                <a:spcPts val="0"/>
+              </a:spcBef>
+              <a:spcAft>
+                <a:spcPts val="300"/>
+              </a:spcAft>
+            </a:pPr>
+            <a:r>
+              <a:rPr sz="1200">
+                <a:solidFill>
+                  <a:srgbClr val="1A1A1A"/>
+                </a:solidFill>
+                <a:latin typeface="ヒラギノ角ゴ ProN W3"/>
+                <a:ea typeface="ヒラギノ角ゴ ProN W3"/>
+                <a:cs typeface="ヒラギノ角ゴ ProN W3"/>
+              </a:rPr>
+              <a:t>・「文章が上手いからAI」とは判断しない</a:t>
+            </a:r>
+          </a:p>
+          <a:p>
+            <a:pPr algn="l">
+              <a:spcBef>
+                <a:spcPts val="0"/>
+              </a:spcBef>
+              <a:spcAft>
+                <a:spcPts val="300"/>
+              </a:spcAft>
+            </a:pPr>
+            <a:r>
+              <a:rPr sz="1200">
+                <a:solidFill>
+                  <a:srgbClr val="1A1A1A"/>
+                </a:solidFill>
+                <a:latin typeface="ヒラギノ角ゴ ProN W3"/>
+                <a:ea typeface="ヒラギノ角ゴ ProN W3"/>
+                <a:cs typeface="ヒラギノ角ゴ ProN W3"/>
+              </a:rPr>
+              <a:t>・「構成が整っているからAI」と単独で判断しない</a:t>
+            </a:r>
+          </a:p>
+          <a:p>
+            <a:pPr algn="l">
+              <a:spcBef>
+                <a:spcPts val="0"/>
+              </a:spcBef>
+              <a:spcAft>
+                <a:spcPts val="300"/>
+              </a:spcAft>
+            </a:pPr>
+            <a:r>
+              <a:rPr sz="1200">
+                <a:solidFill>
+                  <a:srgbClr val="1A1A1A"/>
+                </a:solidFill>
+                <a:latin typeface="ヒラギノ角ゴ ProN W3"/>
+                <a:ea typeface="ヒラギノ角ゴ ProN W3"/>
+                <a:cs typeface="ヒラギノ角ゴ ProN W3"/>
+              </a:rPr>
+              <a:t>・1つの特徴だけで極端なスコアにしない</a:t>
+            </a:r>
+          </a:p>
+          <a:p>
+            <a:pPr algn="l">
+              <a:spcBef>
+                <a:spcPts val="0"/>
+              </a:spcBef>
+              <a:spcAft>
+                <a:spcPts val="300"/>
+              </a:spcAft>
+            </a:pPr>
+            <a:r>
+              <a:rPr sz="1200">
+                <a:solidFill>
+                  <a:srgbClr val="1A1A1A"/>
+                </a:solidFill>
+                <a:latin typeface="ヒラギノ角ゴ ProN W3"/>
+                <a:ea typeface="ヒラギノ角ゴ ProN W3"/>
+                <a:cs typeface="ヒラギノ角ゴ ProN W3"/>
+              </a:rPr>
+              <a:t>・「AIが書いた」と断定的に表現しない</a:t>
+            </a:r>
+          </a:p>
+          <a:p>
+            <a:pPr algn="l">
+              <a:spcBef>
+                <a:spcPts val="0"/>
+              </a:spcBef>
+              <a:spcAft>
+                <a:spcPts val="200"/>
+              </a:spcAft>
+            </a:pPr>
+            <a:r>
+              <a:rPr sz="1300">
+                <a:solidFill>
+                  <a:srgbClr val="3E8C7C"/>
+                </a:solidFill>
+                <a:latin typeface="ヒラギノ角ゴ ProN W6"/>
+                <a:ea typeface="ヒラギノ角ゴ ProN W6"/>
+                <a:cs typeface="ヒラギノ角ゴ ProN W6"/>
+              </a:rPr>
+              <a:t>高スコアは複数の根拠がそろう場合のみ。</a:t>
+            </a:r>
+          </a:p>
+          <a:p>
+            <a:pPr algn="l">
+              <a:spcBef>
+                <a:spcPts val="0"/>
+              </a:spcBef>
+              <a:spcAft>
+                <a:spcPts val="0"/>
+              </a:spcAft>
+            </a:pPr>
+            <a:r>
+              <a:rPr sz="1200">
+                <a:solidFill>
+                  <a:srgbClr val="1A1A1A"/>
+                </a:solidFill>
+                <a:latin typeface="ヒラギノ角ゴ ProN W3"/>
+                <a:ea typeface="ヒラギノ角ゴ ProN W3"/>
+                <a:cs typeface="ヒラギノ角ゴ ProN W3"/>
+              </a:rPr>
+              <a:t>（具体的体験がほぼない・抽象論が続く・</a:t>
+            </a:r>
+          </a:p>
+          <a:p>
+            <a:pPr algn="l">
+              <a:spcBef>
+                <a:spcPts val="0"/>
+              </a:spcBef>
+              <a:spcAft>
+                <a:spcPts val="0"/>
+              </a:spcAft>
+            </a:pPr>
+            <a:r>
+              <a:rPr sz="1200">
+                <a:solidFill>
+                  <a:srgbClr val="1A1A1A"/>
+                </a:solidFill>
+                <a:latin typeface="ヒラギノ角ゴ ProN W3"/>
+                <a:ea typeface="ヒラギノ角ゴ ProN W3"/>
+                <a:cs typeface="ヒラギノ角ゴ ProN W3"/>
+              </a:rPr>
+              <a:t>　定型表現が多い・整いすぎ などが同時）</a:t>
+            </a:r>
+          </a:p>
+        </p:txBody>
+      </p:sp>
+      <p:sp>
+        <p:nvSpPr>
+          <p:cNvPr id="10" name="Rectangle 9"/>
           <p:cNvSpPr/>
           <p:nvPr/>
         </p:nvSpPr>
         <p:spPr>
           <a:xfrm>
-            <a:off x="6400800" y="1554480"/>
-            <a:ext cx="2468880" cy="1005840"/>
+            <a:off x="6309360" y="1371600"/>
+            <a:ext cx="5486400" cy="502920"/>
           </a:xfrm>
           <a:prstGeom prst="rect">
             <a:avLst/>
           </a:prstGeom>
           <a:solidFill>
-            <a:srgbClr val="2E5CA6"/>
+            <a:srgbClr val="3E8C7C"/>
           </a:solidFill>
           <a:ln>
             <a:noFill/>
@@ -5376,14 +7578,14 @@
       </p:sp>
       <p:sp>
         <p:nvSpPr>
-          <p:cNvPr id="13" name="TextBox 12"/>
+          <p:cNvPr id="11" name="TextBox 10"/>
           <p:cNvSpPr txBox="1"/>
           <p:nvPr/>
         </p:nvSpPr>
         <p:spPr>
           <a:xfrm>
-            <a:off x="6400800" y="1554480"/>
-            <a:ext cx="2468880" cy="1005840"/>
+            <a:off x="6309360" y="1371600"/>
+            <a:ext cx="5486400" cy="502920"/>
           </a:xfrm>
           <a:prstGeom prst="rect">
             <a:avLst/>
@@ -5391,87 +7593,49 @@
           <a:noFill/>
         </p:spPr>
         <p:txBody>
-          <a:bodyPr wrap="square" anchor="ctr">
+          <a:bodyPr wrap="square" lIns="0" rIns="0" tIns="0" bIns="0" anchor="ctr">
             <a:spAutoFit/>
           </a:bodyPr>
           <a:lstStyle/>
           <a:p>
-            <a:pPr algn="ctr"/>
-            <a:r>
-              <a:rPr sz="1500" b="1">
+            <a:pPr algn="ctr">
+              <a:spcBef>
+                <a:spcPts val="0"/>
+              </a:spcBef>
+              <a:spcAft>
+                <a:spcPts val="400"/>
+              </a:spcAft>
+            </a:pPr>
+            <a:r>
+              <a:rPr sz="1300">
                 <a:solidFill>
                   <a:srgbClr val="FFFFFF"/>
                 </a:solidFill>
-                <a:latin typeface="Meiryo"/>
-              </a:rPr>
-              <a:t>判定用AI(LLM)</a:t>
-            </a:r>
-          </a:p>
-          <a:p>
-            <a:pPr algn="ctr"/>
-            <a:r>
-              <a:rPr sz="1500" b="1">
-                <a:solidFill>
-                  <a:srgbClr val="FFFFFF"/>
-                </a:solidFill>
-                <a:latin typeface="Meiryo"/>
-              </a:rPr>
-              <a:t>＋評価基準</a:t>
-            </a:r>
-          </a:p>
-        </p:txBody>
-      </p:sp>
-      <p:sp>
-        <p:nvSpPr>
-          <p:cNvPr id="14" name="TextBox 13"/>
-          <p:cNvSpPr txBox="1"/>
-          <p:nvPr/>
-        </p:nvSpPr>
-        <p:spPr>
-          <a:xfrm>
-            <a:off x="8869680" y="1554480"/>
-            <a:ext cx="411480" cy="1005840"/>
-          </a:xfrm>
-          <a:prstGeom prst="rect">
-            <a:avLst/>
-          </a:prstGeom>
-          <a:noFill/>
-        </p:spPr>
-        <p:txBody>
-          <a:bodyPr wrap="none" anchor="ctr">
-            <a:spAutoFit/>
-          </a:bodyPr>
-          <a:lstStyle/>
-          <a:p>
-            <a:pPr algn="ctr"/>
-            <a:r>
-              <a:rPr sz="2000" b="1">
-                <a:solidFill>
-                  <a:srgbClr val="1F335E"/>
-                </a:solidFill>
-                <a:latin typeface="Meiryo"/>
-              </a:rPr>
-              <a:t>▶</a:t>
-            </a:r>
-          </a:p>
-        </p:txBody>
-      </p:sp>
-      <p:sp>
-        <p:nvSpPr>
-          <p:cNvPr id="15" name="Rectangle 14"/>
+                <a:latin typeface="ヒラギノ角ゴ ProN W6"/>
+                <a:ea typeface="ヒラギノ角ゴ ProN W6"/>
+                <a:cs typeface="ヒラギノ角ゴ ProN W6"/>
+              </a:rPr>
+              <a:t>この指標の限界（必ず共有）</a:t>
+            </a:r>
+          </a:p>
+        </p:txBody>
+      </p:sp>
+      <p:sp>
+        <p:nvSpPr>
+          <p:cNvPr id="12" name="Rectangle 11"/>
           <p:cNvSpPr/>
           <p:nvPr/>
         </p:nvSpPr>
         <p:spPr>
           <a:xfrm>
-            <a:off x="9281160" y="1554480"/>
-            <a:ext cx="2468880" cy="1005840"/>
+            <a:off x="6309360" y="1901952"/>
+            <a:ext cx="5486400" cy="4480560"/>
           </a:xfrm>
           <a:prstGeom prst="rect">
             <a:avLst/>
           </a:prstGeom>
           <a:solidFill>
-            <a:srgbClr val="1F335E"/>
+            <a:srgbClr val="E2EFEC"/>
           </a:solidFill>
           <a:ln>
             <a:noFill/>
@@ -5502,14 +7666,14 @@
       </p:sp>
       <p:sp>
         <p:nvSpPr>
-          <p:cNvPr id="16" name="TextBox 15"/>
+          <p:cNvPr id="13" name="TextBox 12"/>
           <p:cNvSpPr txBox="1"/>
           <p:nvPr/>
         </p:nvSpPr>
         <p:spPr>
           <a:xfrm>
-            <a:off x="9281160" y="1554480"/>
-            <a:ext cx="2468880" cy="1005840"/>
+            <a:off x="6537960" y="2057400"/>
+            <a:ext cx="5074920" cy="4206240"/>
           </a:xfrm>
           <a:prstGeom prst="rect">
             <a:avLst/>
@@ -5517,119 +7681,218 @@
           <a:noFill/>
         </p:spPr>
         <p:txBody>
-          <a:bodyPr wrap="square" anchor="ctr">
+          <a:bodyPr wrap="square" lIns="0" rIns="0" tIns="0" bIns="0">
             <a:spAutoFit/>
           </a:bodyPr>
           <a:lstStyle/>
           <a:p>
-            <a:pPr algn="ctr"/>
-            <a:r>
-              <a:rPr sz="1500" b="1">
-                <a:solidFill>
-                  <a:srgbClr val="FFFFFF"/>
-                </a:solidFill>
-                <a:latin typeface="Meiryo"/>
-              </a:rPr>
-              <a:t>スコア0〜100</a:t>
-            </a:r>
-          </a:p>
-          <a:p>
-            <a:pPr algn="ctr"/>
-            <a:r>
-              <a:rPr sz="1500" b="1">
-                <a:solidFill>
-                  <a:srgbClr val="FFFFFF"/>
-                </a:solidFill>
-                <a:latin typeface="Meiryo"/>
-              </a:rPr>
-              <a:t>＋根拠3点</a:t>
-            </a:r>
-          </a:p>
-        </p:txBody>
-      </p:sp>
-      <p:sp>
-        <p:nvSpPr>
-          <p:cNvPr id="17" name="TextBox 16"/>
-          <p:cNvSpPr txBox="1"/>
-          <p:nvPr/>
-        </p:nvSpPr>
-        <p:spPr>
-          <a:xfrm>
-            <a:off x="640080" y="3108960"/>
-            <a:ext cx="10881360" cy="5120640"/>
-          </a:xfrm>
-          <a:prstGeom prst="rect">
-            <a:avLst/>
-          </a:prstGeom>
-          <a:noFill/>
-        </p:spPr>
-        <p:txBody>
-          <a:bodyPr wrap="square">
-            <a:spAutoFit/>
-          </a:bodyPr>
-          <a:lstStyle/>
-          <a:p>
-            <a:pPr>
+            <a:pPr algn="l">
+              <a:spcBef>
+                <a:spcPts val="0"/>
+              </a:spcBef>
+              <a:spcAft>
+                <a:spcPts val="0"/>
+              </a:spcAft>
+            </a:pPr>
+            <a:r>
+              <a:rPr sz="1300">
+                <a:solidFill>
+                  <a:srgbClr val="1A1A1A"/>
+                </a:solidFill>
+                <a:latin typeface="ヒラギノ角ゴ ProN W3"/>
+                <a:ea typeface="ヒラギノ角ゴ ProN W3"/>
+                <a:cs typeface="ヒラギノ角ゴ ProN W3"/>
+              </a:rPr>
+              <a:t>●　断定ではなく“可能性”の参考値です。</a:t>
+            </a:r>
+          </a:p>
+          <a:p>
+            <a:pPr algn="l">
+              <a:spcBef>
+                <a:spcPts val="0"/>
+              </a:spcBef>
               <a:spcAft>
                 <a:spcPts val="800"/>
               </a:spcAft>
             </a:pPr>
             <a:r>
-              <a:rPr sz="1700" b="1">
-                <a:solidFill>
-                  <a:srgbClr val="1F335E"/>
-                </a:solidFill>
-                <a:latin typeface="Meiryo"/>
-              </a:rPr>
-              <a:t>● スコアはAI（採点者役）の判断であり、固定の計算式から自動算出される値ではありません。</a:t>
-            </a:r>
-          </a:p>
-          <a:p>
-            <a:pPr>
+              <a:rPr sz="1300">
+                <a:solidFill>
+                  <a:srgbClr val="1A1A1A"/>
+                </a:solidFill>
+                <a:latin typeface="ヒラギノ角ゴ ProN W6"/>
+                <a:ea typeface="ヒラギノ角ゴ ProN W6"/>
+                <a:cs typeface="ヒラギノ角ゴ ProN W6"/>
+              </a:rPr>
+              <a:t>　　最終判断は必ず人が行います。</a:t>
+            </a:r>
+          </a:p>
+          <a:p>
+            <a:pPr algn="l">
+              <a:spcBef>
+                <a:spcPts val="0"/>
+              </a:spcBef>
+              <a:spcAft>
+                <a:spcPts val="0"/>
+              </a:spcAft>
+            </a:pPr>
+            <a:r>
+              <a:rPr sz="1300">
+                <a:solidFill>
+                  <a:srgbClr val="1A1A1A"/>
+                </a:solidFill>
+                <a:latin typeface="ヒラギノ角ゴ ProN W3"/>
+                <a:ea typeface="ヒラギノ角ゴ ProN W3"/>
+                <a:cs typeface="ヒラギノ角ゴ ProN W3"/>
+              </a:rPr>
+              <a:t>●　AI判定のため、同じ作文でも</a:t>
+            </a:r>
+          </a:p>
+          <a:p>
+            <a:pPr algn="l">
+              <a:spcBef>
+                <a:spcPts val="0"/>
+              </a:spcBef>
               <a:spcAft>
                 <a:spcPts val="800"/>
               </a:spcAft>
             </a:pPr>
             <a:r>
-              <a:rPr sz="1700" b="0">
-                <a:solidFill>
-                  <a:srgbClr val="555555"/>
-                </a:solidFill>
-                <a:latin typeface="Meiryo"/>
-              </a:rPr>
-              <a:t>● 判断がブレないよう、評価の観点・各スコア帯の定義・禁止事項を文章で細かく固定しています。</a:t>
-            </a:r>
-          </a:p>
-          <a:p>
-            <a:pPr lvl="1">
+              <a:rPr sz="1300">
+                <a:solidFill>
+                  <a:srgbClr val="1A1A1A"/>
+                </a:solidFill>
+                <a:latin typeface="ヒラギノ角ゴ ProN W3"/>
+                <a:ea typeface="ヒラギノ角ゴ ProN W3"/>
+                <a:cs typeface="ヒラギノ角ゴ ProN W3"/>
+              </a:rPr>
+              <a:t>　　スコアが多少揺れることがあります。</a:t>
+            </a:r>
+          </a:p>
+          <a:p>
+            <a:pPr algn="l">
+              <a:spcBef>
+                <a:spcPts val="0"/>
+              </a:spcBef>
+              <a:spcAft>
+                <a:spcPts val="0"/>
+              </a:spcAft>
+            </a:pPr>
+            <a:r>
+              <a:rPr sz="1300">
+                <a:solidFill>
+                  <a:srgbClr val="1A1A1A"/>
+                </a:solidFill>
+                <a:latin typeface="ヒラギノ角ゴ ProN W3"/>
+                <a:ea typeface="ヒラギノ角ゴ ProN W3"/>
+                <a:cs typeface="ヒラギノ角ゴ ProN W3"/>
+              </a:rPr>
+              <a:t>●　文章力が高い生徒を過剰に疑わない</a:t>
+            </a:r>
+          </a:p>
+          <a:p>
+            <a:pPr algn="l">
+              <a:spcBef>
+                <a:spcPts val="0"/>
+              </a:spcBef>
+              <a:spcAft>
+                <a:spcPts val="0"/>
+              </a:spcAft>
+            </a:pPr>
+            <a:r>
+              <a:rPr sz="1300">
+                <a:solidFill>
+                  <a:srgbClr val="1A1A1A"/>
+                </a:solidFill>
+                <a:latin typeface="ヒラギノ角ゴ ProN W3"/>
+                <a:ea typeface="ヒラギノ角ゴ ProN W3"/>
+                <a:cs typeface="ヒラギノ角ゴ ProN W3"/>
+              </a:rPr>
+              <a:t>　　設計ですが、誤判定を完全には</a:t>
+            </a:r>
+          </a:p>
+          <a:p>
+            <a:pPr algn="l">
+              <a:spcBef>
+                <a:spcPts val="0"/>
+              </a:spcBef>
               <a:spcAft>
                 <a:spcPts val="800"/>
               </a:spcAft>
             </a:pPr>
             <a:r>
-              <a:rPr sz="1500" b="0">
-                <a:solidFill>
-                  <a:srgbClr val="555555"/>
-                </a:solidFill>
-                <a:latin typeface="Meiryo"/>
-              </a:rPr>
-              <a:t>－ →「全員を同じ物差しで読む」ことを担保。</a:t>
-            </a:r>
-          </a:p>
-          <a:p>
-            <a:pPr>
-              <a:spcAft>
-                <a:spcPts val="800"/>
-              </a:spcAft>
-            </a:pPr>
-            <a:r>
-              <a:rPr sz="1700" b="1">
-                <a:solidFill>
-                  <a:srgbClr val="B32A2A"/>
-                </a:solidFill>
-                <a:latin typeface="Meiryo"/>
-              </a:rPr>
-              <a:t>● 同じ作文でも判定は多少揺れ得るため、確定値ではなく目安として扱います。</a:t>
+              <a:rPr sz="1300">
+                <a:solidFill>
+                  <a:srgbClr val="1A1A1A"/>
+                </a:solidFill>
+                <a:latin typeface="ヒラギノ角ゴ ProN W3"/>
+                <a:ea typeface="ヒラギノ角ゴ ProN W3"/>
+                <a:cs typeface="ヒラギノ角ゴ ProN W3"/>
+              </a:rPr>
+              <a:t>　　排除できません。</a:t>
+            </a:r>
+          </a:p>
+          <a:p>
+            <a:pPr algn="l">
+              <a:spcBef>
+                <a:spcPts val="0"/>
+              </a:spcBef>
+              <a:spcAft>
+                <a:spcPts val="0"/>
+              </a:spcAft>
+            </a:pPr>
+            <a:r>
+              <a:rPr sz="1300">
+                <a:solidFill>
+                  <a:srgbClr val="1A1A1A"/>
+                </a:solidFill>
+                <a:latin typeface="ヒラギノ角ゴ ProN W3"/>
+                <a:ea typeface="ヒラギノ角ゴ ProN W3"/>
+                <a:cs typeface="ヒラギノ角ゴ ProN W3"/>
+              </a:rPr>
+              <a:t>●　高スコアの作文は「クロ」ではなく、</a:t>
+            </a:r>
+          </a:p>
+          <a:p>
+            <a:pPr algn="l">
+              <a:spcBef>
+                <a:spcPts val="0"/>
+              </a:spcBef>
+              <a:spcAft>
+                <a:spcPts val="0"/>
+              </a:spcAft>
+            </a:pPr>
+            <a:r>
+              <a:rPr sz="1300">
+                <a:solidFill>
+                  <a:srgbClr val="3E8C7C"/>
+                </a:solidFill>
+                <a:latin typeface="ヒラギノ角ゴ ProN W6"/>
+                <a:ea typeface="ヒラギノ角ゴ ProN W6"/>
+                <a:cs typeface="ヒラギノ角ゴ ProN W6"/>
+              </a:rPr>
+              <a:t>　　「人による確認を優先すべき作文」</a:t>
+            </a:r>
+          </a:p>
+          <a:p>
+            <a:pPr algn="l">
+              <a:spcBef>
+                <a:spcPts val="0"/>
+              </a:spcBef>
+              <a:spcAft>
+                <a:spcPts val="0"/>
+              </a:spcAft>
+            </a:pPr>
+            <a:r>
+              <a:rPr sz="1300">
+                <a:solidFill>
+                  <a:srgbClr val="3E8C7C"/>
+                </a:solidFill>
+                <a:latin typeface="ヒラギノ角ゴ ProN W6"/>
+                <a:ea typeface="ヒラギノ角ゴ ProN W6"/>
+                <a:cs typeface="ヒラギノ角ゴ ProN W6"/>
+              </a:rPr>
+              <a:t>　　と位置づけます。</a:t>
             </a:r>
           </a:p>
         </p:txBody>
@@ -5660,14 +7923,14 @@
         </p:nvSpPr>
         <p:spPr>
           <a:xfrm>
-            <a:off x="0" y="0"/>
-            <a:ext cx="12191695" cy="1005840"/>
+            <a:off x="0" y="411480"/>
+            <a:ext cx="146304" cy="566928"/>
           </a:xfrm>
           <a:prstGeom prst="rect">
             <a:avLst/>
           </a:prstGeom>
           <a:solidFill>
-            <a:srgbClr val="1F335E"/>
+            <a:srgbClr val="3E8C7C"/>
           </a:solidFill>
           <a:ln>
             <a:noFill/>
@@ -5698,20 +7961,64 @@
       </p:sp>
       <p:sp>
         <p:nvSpPr>
-          <p:cNvPr id="3" name="Rectangle 2"/>
+          <p:cNvPr id="3" name="TextBox 2"/>
+          <p:cNvSpPr txBox="1"/>
+          <p:nvPr/>
+        </p:nvSpPr>
+        <p:spPr>
+          <a:xfrm>
+            <a:off x="411480" y="365760"/>
+            <a:ext cx="10607040" cy="685800"/>
+          </a:xfrm>
+          <a:prstGeom prst="rect">
+            <a:avLst/>
+          </a:prstGeom>
+          <a:noFill/>
+        </p:spPr>
+        <p:txBody>
+          <a:bodyPr wrap="square" lIns="0" rIns="0" tIns="0" bIns="0" anchor="ctr">
+            <a:spAutoFit/>
+          </a:bodyPr>
+          <a:lstStyle/>
+          <a:p>
+            <a:pPr algn="l">
+              <a:spcBef>
+                <a:spcPts val="0"/>
+              </a:spcBef>
+              <a:spcAft>
+                <a:spcPts val="400"/>
+              </a:spcAft>
+            </a:pPr>
+            <a:r>
+              <a:rPr sz="2400">
+                <a:solidFill>
+                  <a:srgbClr val="1A1A1A"/>
+                </a:solidFill>
+                <a:latin typeface="ヒラギノ角ゴ ProN W6"/>
+                <a:ea typeface="ヒラギノ角ゴ ProN W6"/>
+                <a:cs typeface="ヒラギノ角ゴ ProN W6"/>
+              </a:rPr>
+              <a:t>想定問答 — 社長質問への回答案</a:t>
+            </a:r>
+          </a:p>
+        </p:txBody>
+      </p:sp>
+      <p:sp>
+        <p:nvSpPr>
+          <p:cNvPr id="4" name="Rectangle 3"/>
           <p:cNvSpPr/>
           <p:nvPr/>
         </p:nvSpPr>
         <p:spPr>
           <a:xfrm>
-            <a:off x="0" y="1005840"/>
-            <a:ext cx="12191695" cy="40000"/>
+            <a:off x="411480" y="1115568"/>
+            <a:ext cx="11384280" cy="27940"/>
           </a:xfrm>
           <a:prstGeom prst="rect">
             <a:avLst/>
           </a:prstGeom>
           <a:solidFill>
-            <a:srgbClr val="2E5CA6"/>
+            <a:srgbClr val="3E8C7C"/>
           </a:solidFill>
           <a:ln>
             <a:noFill/>
@@ -5742,48 +8049,14 @@
       </p:sp>
       <p:sp>
         <p:nvSpPr>
-          <p:cNvPr id="4" name="TextBox 3"/>
-          <p:cNvSpPr txBox="1"/>
-          <p:nvPr/>
-        </p:nvSpPr>
-        <p:spPr>
-          <a:xfrm>
-            <a:off x="457200" y="164592"/>
-            <a:ext cx="10515600" cy="731520"/>
-          </a:xfrm>
-          <a:prstGeom prst="rect">
-            <a:avLst/>
-          </a:prstGeom>
-          <a:noFill/>
-        </p:spPr>
-        <p:txBody>
-          <a:bodyPr wrap="none" anchor="ctr">
-            <a:spAutoFit/>
-          </a:bodyPr>
-          <a:lstStyle/>
-          <a:p>
-            <a:r>
-              <a:rPr sz="2800" b="1">
-                <a:solidFill>
-                  <a:srgbClr val="FFFFFF"/>
-                </a:solidFill>
-                <a:latin typeface="Meiryo"/>
-              </a:rPr>
-              <a:t>4. 評価の3つの軸（AIは何を見ているか）</a:t>
-            </a:r>
-          </a:p>
-        </p:txBody>
-      </p:sp>
-      <p:sp>
-        <p:nvSpPr>
           <p:cNvPr id="5" name="TextBox 4"/>
           <p:cNvSpPr txBox="1"/>
           <p:nvPr/>
         </p:nvSpPr>
         <p:spPr>
           <a:xfrm>
-            <a:off x="11338560" y="164592"/>
-            <a:ext cx="640080" cy="731520"/>
+            <a:off x="11430000" y="457200"/>
+            <a:ext cx="548640" cy="457200"/>
           </a:xfrm>
           <a:prstGeom prst="rect">
             <a:avLst/>
@@ -5791,18 +8064,27 @@
           <a:noFill/>
         </p:spPr>
         <p:txBody>
-          <a:bodyPr wrap="none" anchor="ctr">
+          <a:bodyPr wrap="square" lIns="0" rIns="0" tIns="0" bIns="0">
             <a:spAutoFit/>
           </a:bodyPr>
           <a:lstStyle/>
           <a:p>
-            <a:pPr algn="r"/>
-            <a:r>
-              <a:rPr sz="1600" b="0">
-                <a:solidFill>
-                  <a:srgbClr val="FFFFFF"/>
-                </a:solidFill>
-                <a:latin typeface="Meiryo"/>
+            <a:pPr algn="r">
+              <a:spcBef>
+                <a:spcPts val="0"/>
+              </a:spcBef>
+              <a:spcAft>
+                <a:spcPts val="400"/>
+              </a:spcAft>
+            </a:pPr>
+            <a:r>
+              <a:rPr sz="1200">
+                <a:solidFill>
+                  <a:srgbClr val="3E8C7C"/>
+                </a:solidFill>
+                <a:latin typeface="ヒラギノ角ゴ ProN W6"/>
+                <a:ea typeface="ヒラギノ角ゴ ProN W6"/>
+                <a:cs typeface="ヒラギノ角ゴ ProN W6"/>
               </a:rPr>
               <a:t>6</a:t>
             </a:r>
@@ -5817,14 +8099,14 @@
         </p:nvSpPr>
         <p:spPr>
           <a:xfrm>
-            <a:off x="457200" y="1371600"/>
-            <a:ext cx="3657600" cy="640080"/>
+            <a:off x="411480" y="1371600"/>
+            <a:ext cx="11384280" cy="25400"/>
           </a:xfrm>
           <a:prstGeom prst="rect">
             <a:avLst/>
           </a:prstGeom>
           <a:solidFill>
-            <a:srgbClr val="2E5CA6"/>
+            <a:srgbClr val="3E8C7C"/>
           </a:solidFill>
           <a:ln>
             <a:noFill/>
@@ -5861,8 +8143,8 @@
         </p:nvSpPr>
         <p:spPr>
           <a:xfrm>
-            <a:off x="457200" y="1371600"/>
-            <a:ext cx="3657600" cy="640080"/>
+            <a:off x="457200" y="1444752"/>
+            <a:ext cx="11247120" cy="411480"/>
           </a:xfrm>
           <a:prstGeom prst="rect">
             <a:avLst/>
@@ -5870,40 +8152,156 @@
           <a:noFill/>
         </p:spPr>
         <p:txBody>
-          <a:bodyPr wrap="none" anchor="ctr">
+          <a:bodyPr wrap="square" lIns="0" rIns="0" tIns="0" bIns="0">
             <a:spAutoFit/>
           </a:bodyPr>
           <a:lstStyle/>
           <a:p>
-            <a:pPr algn="ctr"/>
-            <a:r>
-              <a:rPr sz="1800" b="1">
-                <a:solidFill>
-                  <a:srgbClr val="FFFFFF"/>
-                </a:solidFill>
-                <a:latin typeface="Meiryo"/>
-              </a:rPr>
-              <a:t>A. 具体性・本人性</a:t>
-            </a:r>
-          </a:p>
-        </p:txBody>
-      </p:sp>
-      <p:sp>
-        <p:nvSpPr>
-          <p:cNvPr id="8" name="Rectangle 7"/>
+            <a:pPr algn="l">
+              <a:spcBef>
+                <a:spcPts val="0"/>
+              </a:spcBef>
+              <a:spcAft>
+                <a:spcPts val="400"/>
+              </a:spcAft>
+            </a:pPr>
+            <a:r>
+              <a:rPr sz="1500">
+                <a:solidFill>
+                  <a:srgbClr val="3E8C7C"/>
+                </a:solidFill>
+                <a:latin typeface="ヒラギノ角ゴ ProN W6"/>
+                <a:ea typeface="ヒラギノ角ゴ ProN W6"/>
+                <a:cs typeface="ヒラギノ角ゴ ProN W6"/>
+              </a:rPr>
+              <a:t>Q. どうやってAIが書いたか／自分で考えたかを判断しているのか？</a:t>
+            </a:r>
+          </a:p>
+        </p:txBody>
+      </p:sp>
+      <p:sp>
+        <p:nvSpPr>
+          <p:cNvPr id="8" name="TextBox 7"/>
+          <p:cNvSpPr txBox="1"/>
+          <p:nvPr/>
+        </p:nvSpPr>
+        <p:spPr>
+          <a:xfrm>
+            <a:off x="640080" y="1938528"/>
+            <a:ext cx="11064240" cy="1097280"/>
+          </a:xfrm>
+          <a:prstGeom prst="rect">
+            <a:avLst/>
+          </a:prstGeom>
+          <a:noFill/>
+        </p:spPr>
+        <p:txBody>
+          <a:bodyPr wrap="square" lIns="0" rIns="0" tIns="0" bIns="0">
+            <a:spAutoFit/>
+          </a:bodyPr>
+          <a:lstStyle/>
+          <a:p>
+            <a:pPr algn="l">
+              <a:spcBef>
+                <a:spcPts val="0"/>
+              </a:spcBef>
+              <a:spcAft>
+                <a:spcPts val="100"/>
+              </a:spcAft>
+            </a:pPr>
+            <a:r>
+              <a:rPr sz="1250">
+                <a:solidFill>
+                  <a:srgbClr val="1A1A1A"/>
+                </a:solidFill>
+                <a:latin typeface="ヒラギノ角ゴ ProN W3"/>
+                <a:ea typeface="ヒラギノ角ゴ ProN W3"/>
+                <a:cs typeface="ヒラギノ角ゴ ProN W3"/>
+              </a:rPr>
+              <a:t>A. 専用の生成AIに全作文を同一基準で読ませ、「本人の体験が見えるか」</a:t>
+            </a:r>
+          </a:p>
+          <a:p>
+            <a:pPr algn="l">
+              <a:spcBef>
+                <a:spcPts val="0"/>
+              </a:spcBef>
+              <a:spcAft>
+                <a:spcPts val="100"/>
+              </a:spcAft>
+            </a:pPr>
+            <a:r>
+              <a:rPr sz="1250">
+                <a:solidFill>
+                  <a:srgbClr val="1A1A1A"/>
+                </a:solidFill>
+                <a:latin typeface="ヒラギノ角ゴ ProN W3"/>
+                <a:ea typeface="ヒラギノ角ゴ ProN W3"/>
+                <a:cs typeface="ヒラギノ角ゴ ProN W3"/>
+              </a:rPr>
+              <a:t>　 「整いすぎていないか」「AI特有の定型表現や均質な構成が続いていないか」の</a:t>
+            </a:r>
+          </a:p>
+          <a:p>
+            <a:pPr algn="l">
+              <a:spcBef>
+                <a:spcPts val="0"/>
+              </a:spcBef>
+              <a:spcAft>
+                <a:spcPts val="100"/>
+              </a:spcAft>
+            </a:pPr>
+            <a:r>
+              <a:rPr sz="1250">
+                <a:solidFill>
+                  <a:srgbClr val="1A1A1A"/>
+                </a:solidFill>
+                <a:latin typeface="ヒラギノ角ゴ ProN W3"/>
+                <a:ea typeface="ヒラギノ角ゴ ProN W3"/>
+                <a:cs typeface="ヒラギノ角ゴ ProN W3"/>
+              </a:rPr>
+              <a:t>　 3観点から、0〜100のスコアと根拠3点を出力します。</a:t>
+            </a:r>
+          </a:p>
+          <a:p>
+            <a:pPr algn="l">
+              <a:spcBef>
+                <a:spcPts val="0"/>
+              </a:spcBef>
+              <a:spcAft>
+                <a:spcPts val="100"/>
+              </a:spcAft>
+            </a:pPr>
+            <a:r>
+              <a:rPr sz="1250">
+                <a:solidFill>
+                  <a:srgbClr val="1A1A1A"/>
+                </a:solidFill>
+                <a:latin typeface="ヒラギノ角ゴ ProN W3"/>
+                <a:ea typeface="ヒラギノ角ゴ ProN W3"/>
+                <a:cs typeface="ヒラギノ角ゴ ProN W3"/>
+              </a:rPr>
+              <a:t>　 機械的な計算ではなく、基準を固定した採点者（AI）による見立てです。</a:t>
+            </a:r>
+          </a:p>
+        </p:txBody>
+      </p:sp>
+      <p:sp>
+        <p:nvSpPr>
+          <p:cNvPr id="9" name="Rectangle 8"/>
           <p:cNvSpPr/>
           <p:nvPr/>
         </p:nvSpPr>
         <p:spPr>
           <a:xfrm>
-            <a:off x="457200" y="2011680"/>
-            <a:ext cx="3657600" cy="4572000"/>
+            <a:off x="411480" y="3044952"/>
+            <a:ext cx="11384280" cy="25400"/>
           </a:xfrm>
           <a:prstGeom prst="rect">
             <a:avLst/>
           </a:prstGeom>
           <a:solidFill>
-            <a:srgbClr val="EEF2F8"/>
+            <a:srgbClr val="3E8C7C"/>
           </a:solidFill>
           <a:ln>
             <a:noFill/>
@@ -5934,14 +8332,14 @@
       </p:sp>
       <p:sp>
         <p:nvSpPr>
-          <p:cNvPr id="9" name="TextBox 8"/>
+          <p:cNvPr id="10" name="TextBox 9"/>
           <p:cNvSpPr txBox="1"/>
           <p:nvPr/>
         </p:nvSpPr>
         <p:spPr>
           <a:xfrm>
-            <a:off x="594360" y="2148840"/>
-            <a:ext cx="3383280" cy="4389120"/>
+            <a:off x="457200" y="3118104"/>
+            <a:ext cx="11247120" cy="411480"/>
           </a:xfrm>
           <a:prstGeom prst="rect">
             <a:avLst/>
@@ -5949,140 +8347,135 @@
           <a:noFill/>
         </p:spPr>
         <p:txBody>
-          <a:bodyPr wrap="square">
+          <a:bodyPr wrap="square" lIns="0" rIns="0" tIns="0" bIns="0">
             <a:spAutoFit/>
           </a:bodyPr>
           <a:lstStyle/>
           <a:p>
-            <a:pPr>
-              <a:spcAft>
-                <a:spcPts val="500"/>
-              </a:spcAft>
-            </a:pPr>
-            <a:r>
-              <a:rPr sz="1400" b="0">
-                <a:solidFill>
-                  <a:srgbClr val="555555"/>
-                </a:solidFill>
-                <a:latin typeface="Meiryo"/>
-              </a:rPr>
-              <a:t>・経験・失敗・迷いの記述</a:t>
-            </a:r>
-          </a:p>
-          <a:p>
-            <a:pPr>
-              <a:spcAft>
-                <a:spcPts val="500"/>
-              </a:spcAft>
-            </a:pPr>
-            <a:r>
-              <a:rPr sz="1400" b="0">
-                <a:solidFill>
-                  <a:srgbClr val="555555"/>
-                </a:solidFill>
-                <a:latin typeface="Meiryo"/>
-              </a:rPr>
-              <a:t>・部活/家族/友人/地域</a:t>
-            </a:r>
-          </a:p>
-          <a:p>
-            <a:pPr>
-              <a:spcAft>
-                <a:spcPts val="500"/>
-              </a:spcAft>
-            </a:pPr>
-            <a:r>
-              <a:rPr sz="1400" b="0">
-                <a:solidFill>
-                  <a:srgbClr val="555555"/>
-                </a:solidFill>
-                <a:latin typeface="Meiryo"/>
-              </a:rPr>
-              <a:t>・固有名詞・具体的場面</a:t>
-            </a:r>
-          </a:p>
-          <a:p>
-            <a:pPr>
-              <a:spcAft>
-                <a:spcPts val="500"/>
-              </a:spcAft>
-            </a:pPr>
-            <a:r>
-              <a:rPr sz="1300" b="1">
-                <a:solidFill>
-                  <a:srgbClr val="1E7A46"/>
-                </a:solidFill>
-                <a:latin typeface="Meiryo"/>
-              </a:rPr>
-              <a:t>↑あればAI可能性は低</a:t>
-            </a:r>
-          </a:p>
-          <a:p>
-            <a:pPr>
-              <a:spcAft>
-                <a:spcPts val="500"/>
-              </a:spcAft>
-            </a:pPr>
-            <a:r>
-              <a:rPr sz="1400" b="0">
-                <a:solidFill>
-                  <a:srgbClr val="555555"/>
-                </a:solidFill>
-                <a:latin typeface="Meiryo"/>
-              </a:rPr>
-              <a:t>・一般論・大きな主語のみ</a:t>
-            </a:r>
-          </a:p>
-          <a:p>
-            <a:pPr>
-              <a:spcAft>
-                <a:spcPts val="500"/>
-              </a:spcAft>
-            </a:pPr>
-            <a:r>
-              <a:rPr sz="1400" b="0">
-                <a:solidFill>
-                  <a:srgbClr val="555555"/>
-                </a:solidFill>
-                <a:latin typeface="Meiryo"/>
-              </a:rPr>
-              <a:t>・どの生徒でも書ける内容</a:t>
-            </a:r>
-          </a:p>
-          <a:p>
-            <a:pPr>
-              <a:spcAft>
-                <a:spcPts val="500"/>
-              </a:spcAft>
-            </a:pPr>
-            <a:r>
-              <a:rPr sz="1300" b="1">
-                <a:solidFill>
-                  <a:srgbClr val="B32A2A"/>
-                </a:solidFill>
-                <a:latin typeface="Meiryo"/>
-              </a:rPr>
-              <a:t>↑ならAI可能性は高</a:t>
-            </a:r>
-          </a:p>
-        </p:txBody>
-      </p:sp>
-      <p:sp>
-        <p:nvSpPr>
-          <p:cNvPr id="10" name="Rectangle 9"/>
+            <a:pPr algn="l">
+              <a:spcBef>
+                <a:spcPts val="0"/>
+              </a:spcBef>
+              <a:spcAft>
+                <a:spcPts val="400"/>
+              </a:spcAft>
+            </a:pPr>
+            <a:r>
+              <a:rPr sz="1500">
+                <a:solidFill>
+                  <a:srgbClr val="3E8C7C"/>
+                </a:solidFill>
+                <a:latin typeface="ヒラギノ角ゴ ProN W6"/>
+                <a:ea typeface="ヒラギノ角ゴ ProN W6"/>
+                <a:cs typeface="ヒラギノ角ゴ ProN W6"/>
+              </a:rPr>
+              <a:t>Q. 文章がうまい生徒を、AI扱いしてしまわないか？</a:t>
+            </a:r>
+          </a:p>
+        </p:txBody>
+      </p:sp>
+      <p:sp>
+        <p:nvSpPr>
+          <p:cNvPr id="11" name="TextBox 10"/>
+          <p:cNvSpPr txBox="1"/>
+          <p:nvPr/>
+        </p:nvSpPr>
+        <p:spPr>
+          <a:xfrm>
+            <a:off x="640080" y="3611880"/>
+            <a:ext cx="11064240" cy="1097280"/>
+          </a:xfrm>
+          <a:prstGeom prst="rect">
+            <a:avLst/>
+          </a:prstGeom>
+          <a:noFill/>
+        </p:spPr>
+        <p:txBody>
+          <a:bodyPr wrap="square" lIns="0" rIns="0" tIns="0" bIns="0">
+            <a:spAutoFit/>
+          </a:bodyPr>
+          <a:lstStyle/>
+          <a:p>
+            <a:pPr algn="l">
+              <a:spcBef>
+                <a:spcPts val="0"/>
+              </a:spcBef>
+              <a:spcAft>
+                <a:spcPts val="100"/>
+              </a:spcAft>
+            </a:pPr>
+            <a:r>
+              <a:rPr sz="1250">
+                <a:solidFill>
+                  <a:srgbClr val="1A1A1A"/>
+                </a:solidFill>
+                <a:latin typeface="ヒラギノ角ゴ ProN W3"/>
+                <a:ea typeface="ヒラギノ角ゴ ProN W3"/>
+                <a:cs typeface="ヒラギノ角ゴ ProN W3"/>
+              </a:rPr>
+              <a:t>A. 「上手い・整っている・誤字が少ない」といった単独の特徴だけでは</a:t>
+            </a:r>
+          </a:p>
+          <a:p>
+            <a:pPr algn="l">
+              <a:spcBef>
+                <a:spcPts val="0"/>
+              </a:spcBef>
+              <a:spcAft>
+                <a:spcPts val="100"/>
+              </a:spcAft>
+            </a:pPr>
+            <a:r>
+              <a:rPr sz="1250">
+                <a:solidFill>
+                  <a:srgbClr val="1A1A1A"/>
+                </a:solidFill>
+                <a:latin typeface="ヒラギノ角ゴ ProN W3"/>
+                <a:ea typeface="ヒラギノ角ゴ ProN W3"/>
+                <a:cs typeface="ヒラギノ角ゴ ProN W3"/>
+              </a:rPr>
+              <a:t>　 高スコアにしないルールを明示しています。</a:t>
+            </a:r>
+          </a:p>
+          <a:p>
+            <a:pPr algn="l">
+              <a:spcBef>
+                <a:spcPts val="0"/>
+              </a:spcBef>
+              <a:spcAft>
+                <a:spcPts val="100"/>
+              </a:spcAft>
+            </a:pPr>
+            <a:r>
+              <a:rPr sz="1250">
+                <a:solidFill>
+                  <a:srgbClr val="1A1A1A"/>
+                </a:solidFill>
+                <a:latin typeface="ヒラギノ角ゴ ProN W3"/>
+                <a:ea typeface="ヒラギノ角ゴ ProN W3"/>
+                <a:cs typeface="ヒラギノ角ゴ ProN W3"/>
+              </a:rPr>
+              <a:t>　 高スコアになるのは、複数の根拠がそろった場合のみです。</a:t>
+            </a:r>
+          </a:p>
+        </p:txBody>
+      </p:sp>
+      <p:sp>
+        <p:nvSpPr>
+          <p:cNvPr id="12" name="Rectangle 11"/>
           <p:cNvSpPr/>
           <p:nvPr/>
         </p:nvSpPr>
         <p:spPr>
           <a:xfrm>
-            <a:off x="4343400" y="1371600"/>
-            <a:ext cx="3657600" cy="640080"/>
+            <a:off x="411480" y="4718304"/>
+            <a:ext cx="11384280" cy="25400"/>
           </a:xfrm>
           <a:prstGeom prst="rect">
             <a:avLst/>
           </a:prstGeom>
           <a:solidFill>
-            <a:srgbClr val="2E5CA6"/>
+            <a:srgbClr val="3E8C7C"/>
           </a:solidFill>
           <a:ln>
             <a:noFill/>
@@ -6113,93 +8506,14 @@
       </p:sp>
       <p:sp>
         <p:nvSpPr>
-          <p:cNvPr id="11" name="TextBox 10"/>
-          <p:cNvSpPr txBox="1"/>
-          <p:nvPr/>
-        </p:nvSpPr>
-        <p:spPr>
-          <a:xfrm>
-            <a:off x="4343400" y="1371600"/>
-            <a:ext cx="3657600" cy="640080"/>
-          </a:xfrm>
-          <a:prstGeom prst="rect">
-            <a:avLst/>
-          </a:prstGeom>
-          <a:noFill/>
-        </p:spPr>
-        <p:txBody>
-          <a:bodyPr wrap="none" anchor="ctr">
-            <a:spAutoFit/>
-          </a:bodyPr>
-          <a:lstStyle/>
-          <a:p>
-            <a:pPr algn="ctr"/>
-            <a:r>
-              <a:rPr sz="1800" b="1">
-                <a:solidFill>
-                  <a:srgbClr val="FFFFFF"/>
-                </a:solidFill>
-                <a:latin typeface="Meiryo"/>
-              </a:rPr>
-              <a:t>B. 文体・語彙</a:t>
-            </a:r>
-          </a:p>
-        </p:txBody>
-      </p:sp>
-      <p:sp>
-        <p:nvSpPr>
-          <p:cNvPr id="12" name="Rectangle 11"/>
-          <p:cNvSpPr/>
-          <p:nvPr/>
-        </p:nvSpPr>
-        <p:spPr>
-          <a:xfrm>
-            <a:off x="4343400" y="2011680"/>
-            <a:ext cx="3657600" cy="4572000"/>
-          </a:xfrm>
-          <a:prstGeom prst="rect">
-            <a:avLst/>
-          </a:prstGeom>
-          <a:solidFill>
-            <a:srgbClr val="EEF2F8"/>
-          </a:solidFill>
-          <a:ln>
-            <a:noFill/>
-          </a:ln>
-          <a:effectLst/>
-        </p:spPr>
-        <p:style>
-          <a:lnRef idx="1">
-            <a:schemeClr val="accent1"/>
-          </a:lnRef>
-          <a:fillRef idx="3">
-            <a:schemeClr val="accent1"/>
-          </a:fillRef>
-          <a:effectRef idx="2">
-            <a:schemeClr val="accent1"/>
-          </a:effectRef>
-          <a:fontRef idx="minor">
-            <a:schemeClr val="lt1"/>
-          </a:fontRef>
-        </p:style>
-        <p:txBody>
-          <a:bodyPr rtlCol="0" anchor="ctr"/>
-          <a:lstStyle/>
-          <a:p>
-            <a:pPr algn="ctr"/>
-          </a:p>
-        </p:txBody>
-      </p:sp>
-      <p:sp>
-        <p:nvSpPr>
           <p:cNvPr id="13" name="TextBox 12"/>
           <p:cNvSpPr txBox="1"/>
           <p:nvPr/>
         </p:nvSpPr>
         <p:spPr>
           <a:xfrm>
-            <a:off x="4480560" y="2148840"/>
-            <a:ext cx="3383280" cy="4389120"/>
+            <a:off x="457200" y="4791456"/>
+            <a:ext cx="11247120" cy="411480"/>
           </a:xfrm>
           <a:prstGeom prst="rect">
             <a:avLst/>
@@ -6207,178 +8521,43 @@
           <a:noFill/>
         </p:spPr>
         <p:txBody>
-          <a:bodyPr wrap="square">
+          <a:bodyPr wrap="square" lIns="0" rIns="0" tIns="0" bIns="0">
             <a:spAutoFit/>
           </a:bodyPr>
           <a:lstStyle/>
           <a:p>
-            <a:pPr>
-              <a:spcAft>
-                <a:spcPts val="500"/>
-              </a:spcAft>
-            </a:pPr>
-            <a:r>
-              <a:rPr sz="1400" b="0">
-                <a:solidFill>
-                  <a:srgbClr val="555555"/>
-                </a:solidFill>
-                <a:latin typeface="Meiryo"/>
-              </a:rPr>
-              <a:t>・自然な言い回し</a:t>
-            </a:r>
-          </a:p>
-          <a:p>
-            <a:pPr>
-              <a:spcAft>
-                <a:spcPts val="500"/>
-              </a:spcAft>
-            </a:pPr>
-            <a:r>
-              <a:rPr sz="1400" b="0">
-                <a:solidFill>
-                  <a:srgbClr val="555555"/>
-                </a:solidFill>
-                <a:latin typeface="Meiryo"/>
-              </a:rPr>
-              <a:t>・文の長さのばらつき</a:t>
-            </a:r>
-          </a:p>
-          <a:p>
-            <a:pPr>
-              <a:spcAft>
-                <a:spcPts val="500"/>
-              </a:spcAft>
-            </a:pPr>
-            <a:r>
-              <a:rPr sz="1400" b="0">
-                <a:solidFill>
-                  <a:srgbClr val="555555"/>
-                </a:solidFill>
-                <a:latin typeface="Meiryo"/>
-              </a:rPr>
-              <a:t>・感情・言い直しの揺れ</a:t>
-            </a:r>
-          </a:p>
-          <a:p>
-            <a:pPr>
-              <a:spcAft>
-                <a:spcPts val="500"/>
-              </a:spcAft>
-            </a:pPr>
-            <a:r>
-              <a:rPr sz="1300" b="1">
-                <a:solidFill>
-                  <a:srgbClr val="1E7A46"/>
-                </a:solidFill>
-                <a:latin typeface="Meiryo"/>
-              </a:rPr>
-              <a:t>↑あればAI可能性は低</a:t>
-            </a:r>
-          </a:p>
-          <a:p>
-            <a:pPr>
-              <a:spcAft>
-                <a:spcPts val="500"/>
-              </a:spcAft>
-            </a:pPr>
-            <a:r>
-              <a:rPr sz="1400" b="0">
-                <a:solidFill>
-                  <a:srgbClr val="555555"/>
-                </a:solidFill>
-                <a:latin typeface="Meiryo"/>
-              </a:rPr>
-              <a:t>・均質すぎる文体</a:t>
-            </a:r>
-          </a:p>
-          <a:p>
-            <a:pPr>
-              <a:spcAft>
-                <a:spcPts val="500"/>
-              </a:spcAft>
-            </a:pPr>
-            <a:r>
-              <a:rPr sz="1400" b="0">
-                <a:solidFill>
-                  <a:srgbClr val="555555"/>
-                </a:solidFill>
-                <a:latin typeface="Meiryo"/>
-              </a:rPr>
-              <a:t>・定型表現・硬い抽象語</a:t>
-            </a:r>
-          </a:p>
-          <a:p>
-            <a:pPr>
-              <a:spcAft>
-                <a:spcPts val="500"/>
-              </a:spcAft>
-            </a:pPr>
-            <a:r>
-              <a:rPr sz="1300" b="1">
-                <a:solidFill>
-                  <a:srgbClr val="B32A2A"/>
-                </a:solidFill>
-                <a:latin typeface="Meiryo"/>
-              </a:rPr>
-              <a:t>↑ならAI可能性は高</a:t>
-            </a:r>
-          </a:p>
-        </p:txBody>
-      </p:sp>
-      <p:sp>
-        <p:nvSpPr>
-          <p:cNvPr id="14" name="Rectangle 13"/>
-          <p:cNvSpPr/>
-          <p:nvPr/>
-        </p:nvSpPr>
-        <p:spPr>
-          <a:xfrm>
-            <a:off x="8229600" y="1371600"/>
-            <a:ext cx="3657600" cy="640080"/>
-          </a:xfrm>
-          <a:prstGeom prst="rect">
-            <a:avLst/>
-          </a:prstGeom>
-          <a:solidFill>
-            <a:srgbClr val="2E5CA6"/>
-          </a:solidFill>
-          <a:ln>
-            <a:noFill/>
-          </a:ln>
-          <a:effectLst/>
-        </p:spPr>
-        <p:style>
-          <a:lnRef idx="1">
-            <a:schemeClr val="accent1"/>
-          </a:lnRef>
-          <a:fillRef idx="3">
-            <a:schemeClr val="accent1"/>
-          </a:fillRef>
-          <a:effectRef idx="2">
-            <a:schemeClr val="accent1"/>
-          </a:effectRef>
-          <a:fontRef idx="minor">
-            <a:schemeClr val="lt1"/>
-          </a:fontRef>
-        </p:style>
-        <p:txBody>
-          <a:bodyPr rtlCol="0" anchor="ctr"/>
-          <a:lstStyle/>
-          <a:p>
-            <a:pPr algn="ctr"/>
-          </a:p>
-        </p:txBody>
-      </p:sp>
-      <p:sp>
-        <p:nvSpPr>
-          <p:cNvPr id="15" name="TextBox 14"/>
+            <a:pPr algn="l">
+              <a:spcBef>
+                <a:spcPts val="0"/>
+              </a:spcBef>
+              <a:spcAft>
+                <a:spcPts val="400"/>
+              </a:spcAft>
+            </a:pPr>
+            <a:r>
+              <a:rPr sz="1500">
+                <a:solidFill>
+                  <a:srgbClr val="3E8C7C"/>
+                </a:solidFill>
+                <a:latin typeface="ヒラギノ角ゴ ProN W6"/>
+                <a:ea typeface="ヒラギノ角ゴ ProN W6"/>
+                <a:cs typeface="ヒラギノ角ゴ ProN W6"/>
+              </a:rPr>
+              <a:t>Q. このスコアで処分や合否を決めてよいか？</a:t>
+            </a:r>
+          </a:p>
+        </p:txBody>
+      </p:sp>
+      <p:sp>
+        <p:nvSpPr>
+          <p:cNvPr id="14" name="TextBox 13"/>
           <p:cNvSpPr txBox="1"/>
           <p:nvPr/>
         </p:nvSpPr>
         <p:spPr>
           <a:xfrm>
-            <a:off x="8229600" y="1371600"/>
-            <a:ext cx="3657600" cy="640080"/>
+            <a:off x="640080" y="5285232"/>
+            <a:ext cx="11064240" cy="1097280"/>
           </a:xfrm>
           <a:prstGeom prst="rect">
             <a:avLst/>
@@ -6386,1184 +8565,71 @@
           <a:noFill/>
         </p:spPr>
         <p:txBody>
-          <a:bodyPr wrap="none" anchor="ctr">
+          <a:bodyPr wrap="square" lIns="0" rIns="0" tIns="0" bIns="0">
             <a:spAutoFit/>
           </a:bodyPr>
           <a:lstStyle/>
           <a:p>
-            <a:pPr algn="ctr"/>
-            <a:r>
-              <a:rPr sz="1800" b="1">
-                <a:solidFill>
-                  <a:srgbClr val="FFFFFF"/>
-                </a:solidFill>
-                <a:latin typeface="Meiryo"/>
-              </a:rPr>
-              <a:t>C. 構成</a:t>
-            </a:r>
-          </a:p>
-        </p:txBody>
-      </p:sp>
-      <p:sp>
-        <p:nvSpPr>
-          <p:cNvPr id="16" name="Rectangle 15"/>
-          <p:cNvSpPr/>
-          <p:nvPr/>
-        </p:nvSpPr>
-        <p:spPr>
-          <a:xfrm>
-            <a:off x="8229600" y="2011680"/>
-            <a:ext cx="3657600" cy="4572000"/>
-          </a:xfrm>
-          <a:prstGeom prst="rect">
-            <a:avLst/>
-          </a:prstGeom>
-          <a:solidFill>
-            <a:srgbClr val="EEF2F8"/>
-          </a:solidFill>
-          <a:ln>
-            <a:noFill/>
-          </a:ln>
-          <a:effectLst/>
-        </p:spPr>
-        <p:style>
-          <a:lnRef idx="1">
-            <a:schemeClr val="accent1"/>
-          </a:lnRef>
-          <a:fillRef idx="3">
-            <a:schemeClr val="accent1"/>
-          </a:fillRef>
-          <a:effectRef idx="2">
-            <a:schemeClr val="accent1"/>
-          </a:effectRef>
-          <a:fontRef idx="minor">
-            <a:schemeClr val="lt1"/>
-          </a:fontRef>
-        </p:style>
-        <p:txBody>
-          <a:bodyPr rtlCol="0" anchor="ctr"/>
-          <a:lstStyle/>
-          <a:p>
-            <a:pPr algn="ctr"/>
-          </a:p>
-        </p:txBody>
-      </p:sp>
-      <p:sp>
-        <p:nvSpPr>
-          <p:cNvPr id="17" name="TextBox 16"/>
-          <p:cNvSpPr txBox="1"/>
-          <p:nvPr/>
-        </p:nvSpPr>
-        <p:spPr>
-          <a:xfrm>
-            <a:off x="8366760" y="2148840"/>
-            <a:ext cx="3383280" cy="4389120"/>
-          </a:xfrm>
-          <a:prstGeom prst="rect">
-            <a:avLst/>
-          </a:prstGeom>
-          <a:noFill/>
-        </p:spPr>
-        <p:txBody>
-          <a:bodyPr wrap="square">
-            <a:spAutoFit/>
-          </a:bodyPr>
-          <a:lstStyle/>
-          <a:p>
-            <a:pPr>
-              <a:spcAft>
-                <a:spcPts val="500"/>
-              </a:spcAft>
-            </a:pPr>
-            <a:r>
-              <a:rPr sz="1400" b="0">
-                <a:solidFill>
-                  <a:srgbClr val="555555"/>
-                </a:solidFill>
-                <a:latin typeface="Meiryo"/>
-              </a:rPr>
-              <a:t>・多少の偏り・寄り道</a:t>
-            </a:r>
-          </a:p>
-          <a:p>
-            <a:pPr>
-              <a:spcAft>
-                <a:spcPts val="500"/>
-              </a:spcAft>
-            </a:pPr>
-            <a:r>
-              <a:rPr sz="1400" b="0">
-                <a:solidFill>
-                  <a:srgbClr val="555555"/>
-                </a:solidFill>
-                <a:latin typeface="Meiryo"/>
-              </a:rPr>
-              <a:t>・段落ごとの熱量差</a:t>
-            </a:r>
-          </a:p>
-          <a:p>
-            <a:pPr>
-              <a:spcAft>
-                <a:spcPts val="500"/>
-              </a:spcAft>
-            </a:pPr>
-            <a:r>
-              <a:rPr sz="1400" b="0">
-                <a:solidFill>
-                  <a:srgbClr val="555555"/>
-                </a:solidFill>
-                <a:latin typeface="Meiryo"/>
-              </a:rPr>
-              <a:t>・考えの流れが見える</a:t>
-            </a:r>
-          </a:p>
-          <a:p>
-            <a:pPr>
-              <a:spcAft>
-                <a:spcPts val="500"/>
-              </a:spcAft>
-            </a:pPr>
-            <a:r>
-              <a:rPr sz="1300" b="1">
-                <a:solidFill>
-                  <a:srgbClr val="1E7A46"/>
-                </a:solidFill>
-                <a:latin typeface="Meiryo"/>
-              </a:rPr>
-              <a:t>↑あればAI可能性は低</a:t>
-            </a:r>
-          </a:p>
-          <a:p>
-            <a:pPr>
-              <a:spcAft>
-                <a:spcPts val="500"/>
-              </a:spcAft>
-            </a:pPr>
-            <a:r>
-              <a:rPr sz="1400" b="0">
-                <a:solidFill>
-                  <a:srgbClr val="555555"/>
-                </a:solidFill>
-                <a:latin typeface="Meiryo"/>
-              </a:rPr>
-              <a:t>・整いすぎた序論本論結論</a:t>
-            </a:r>
-          </a:p>
-          <a:p>
-            <a:pPr>
-              <a:spcAft>
-                <a:spcPts val="500"/>
-              </a:spcAft>
-            </a:pPr>
-            <a:r>
-              <a:rPr sz="1400" b="0">
-                <a:solidFill>
-                  <a:srgbClr val="555555"/>
-                </a:solidFill>
-                <a:latin typeface="Meiryo"/>
-              </a:rPr>
-              <a:t>・機械的整理・模範解答型</a:t>
-            </a:r>
-          </a:p>
-          <a:p>
-            <a:pPr>
-              <a:spcAft>
-                <a:spcPts val="500"/>
-              </a:spcAft>
-            </a:pPr>
-            <a:r>
-              <a:rPr sz="1300" b="1">
-                <a:solidFill>
-                  <a:srgbClr val="B32A2A"/>
-                </a:solidFill>
-                <a:latin typeface="Meiryo"/>
-              </a:rPr>
-              <a:t>↑ならAI可能性は高</a:t>
-            </a:r>
-          </a:p>
-        </p:txBody>
-      </p:sp>
-    </p:spTree>
-  </p:cSld>
-  <p:clrMapOvr>
-    <a:masterClrMapping/>
-  </p:clrMapOvr>
-</p:sld>
-</file>
-
-<file path=ppt/slides/slide7.xml><?xml version="1.0" encoding="utf-8"?>
-<p:sld xmlns:a="http://schemas.openxmlformats.org/drawingml/2006/main" xmlns:p="http://schemas.openxmlformats.org/presentationml/2006/main" xmlns:r="http://schemas.openxmlformats.org/officeDocument/2006/relationships">
-  <p:cSld>
-    <p:spTree>
-      <p:nvGrpSpPr>
-        <p:cNvPr id="1" name=""/>
-        <p:cNvGrpSpPr/>
-        <p:nvPr/>
-      </p:nvGrpSpPr>
-      <p:grpSpPr/>
-      <p:sp>
-        <p:nvSpPr>
-          <p:cNvPr id="2" name="Rectangle 1"/>
-          <p:cNvSpPr/>
-          <p:nvPr/>
-        </p:nvSpPr>
-        <p:spPr>
-          <a:xfrm>
-            <a:off x="0" y="0"/>
-            <a:ext cx="12191695" cy="1005840"/>
-          </a:xfrm>
-          <a:prstGeom prst="rect">
-            <a:avLst/>
-          </a:prstGeom>
-          <a:solidFill>
-            <a:srgbClr val="1F335E"/>
-          </a:solidFill>
-          <a:ln>
-            <a:noFill/>
-          </a:ln>
-          <a:effectLst/>
-        </p:spPr>
-        <p:style>
-          <a:lnRef idx="1">
-            <a:schemeClr val="accent1"/>
-          </a:lnRef>
-          <a:fillRef idx="3">
-            <a:schemeClr val="accent1"/>
-          </a:fillRef>
-          <a:effectRef idx="2">
-            <a:schemeClr val="accent1"/>
-          </a:effectRef>
-          <a:fontRef idx="minor">
-            <a:schemeClr val="lt1"/>
-          </a:fontRef>
-        </p:style>
-        <p:txBody>
-          <a:bodyPr rtlCol="0" anchor="ctr"/>
-          <a:lstStyle/>
-          <a:p>
-            <a:pPr algn="ctr"/>
-          </a:p>
-        </p:txBody>
-      </p:sp>
-      <p:sp>
-        <p:nvSpPr>
-          <p:cNvPr id="3" name="Rectangle 2"/>
-          <p:cNvSpPr/>
-          <p:nvPr/>
-        </p:nvSpPr>
-        <p:spPr>
-          <a:xfrm>
-            <a:off x="0" y="1005840"/>
-            <a:ext cx="12191695" cy="40000"/>
-          </a:xfrm>
-          <a:prstGeom prst="rect">
-            <a:avLst/>
-          </a:prstGeom>
-          <a:solidFill>
-            <a:srgbClr val="2E5CA6"/>
-          </a:solidFill>
-          <a:ln>
-            <a:noFill/>
-          </a:ln>
-          <a:effectLst/>
-        </p:spPr>
-        <p:style>
-          <a:lnRef idx="1">
-            <a:schemeClr val="accent1"/>
-          </a:lnRef>
-          <a:fillRef idx="3">
-            <a:schemeClr val="accent1"/>
-          </a:fillRef>
-          <a:effectRef idx="2">
-            <a:schemeClr val="accent1"/>
-          </a:effectRef>
-          <a:fontRef idx="minor">
-            <a:schemeClr val="lt1"/>
-          </a:fontRef>
-        </p:style>
-        <p:txBody>
-          <a:bodyPr rtlCol="0" anchor="ctr"/>
-          <a:lstStyle/>
-          <a:p>
-            <a:pPr algn="ctr"/>
-          </a:p>
-        </p:txBody>
-      </p:sp>
-      <p:sp>
-        <p:nvSpPr>
-          <p:cNvPr id="4" name="TextBox 3"/>
-          <p:cNvSpPr txBox="1"/>
-          <p:nvPr/>
-        </p:nvSpPr>
-        <p:spPr>
-          <a:xfrm>
-            <a:off x="457200" y="164592"/>
-            <a:ext cx="10515600" cy="731520"/>
-          </a:xfrm>
-          <a:prstGeom prst="rect">
-            <a:avLst/>
-          </a:prstGeom>
-          <a:noFill/>
-        </p:spPr>
-        <p:txBody>
-          <a:bodyPr wrap="none" anchor="ctr">
-            <a:spAutoFit/>
-          </a:bodyPr>
-          <a:lstStyle/>
-          <a:p>
-            <a:r>
-              <a:rPr sz="2800" b="1">
-                <a:solidFill>
-                  <a:srgbClr val="FFFFFF"/>
-                </a:solidFill>
-                <a:latin typeface="Meiryo"/>
-              </a:rPr>
-              <a:t>5. 誤判定を防ぐルール（公平性の担保）</a:t>
-            </a:r>
-          </a:p>
-        </p:txBody>
-      </p:sp>
-      <p:sp>
-        <p:nvSpPr>
-          <p:cNvPr id="5" name="TextBox 4"/>
-          <p:cNvSpPr txBox="1"/>
-          <p:nvPr/>
-        </p:nvSpPr>
-        <p:spPr>
-          <a:xfrm>
-            <a:off x="11338560" y="164592"/>
-            <a:ext cx="640080" cy="731520"/>
-          </a:xfrm>
-          <a:prstGeom prst="rect">
-            <a:avLst/>
-          </a:prstGeom>
-          <a:noFill/>
-        </p:spPr>
-        <p:txBody>
-          <a:bodyPr wrap="none" anchor="ctr">
-            <a:spAutoFit/>
-          </a:bodyPr>
-          <a:lstStyle/>
-          <a:p>
-            <a:pPr algn="r"/>
-            <a:r>
-              <a:rPr sz="1600" b="0">
-                <a:solidFill>
-                  <a:srgbClr val="FFFFFF"/>
-                </a:solidFill>
-                <a:latin typeface="Meiryo"/>
-              </a:rPr>
-              <a:t>7</a:t>
-            </a:r>
-          </a:p>
-        </p:txBody>
-      </p:sp>
-      <p:sp>
-        <p:nvSpPr>
-          <p:cNvPr id="6" name="TextBox 5"/>
-          <p:cNvSpPr txBox="1"/>
-          <p:nvPr/>
-        </p:nvSpPr>
-        <p:spPr>
-          <a:xfrm>
-            <a:off x="640080" y="1325880"/>
-            <a:ext cx="10881360" cy="5120640"/>
-          </a:xfrm>
-          <a:prstGeom prst="rect">
-            <a:avLst/>
-          </a:prstGeom>
-          <a:noFill/>
-        </p:spPr>
-        <p:txBody>
-          <a:bodyPr wrap="square">
-            <a:spAutoFit/>
-          </a:bodyPr>
-          <a:lstStyle/>
-          <a:p>
-            <a:pPr>
-              <a:spcAft>
-                <a:spcPts val="800"/>
-              </a:spcAft>
-            </a:pPr>
-            <a:r>
-              <a:rPr sz="1700" b="1">
-                <a:solidFill>
-                  <a:srgbClr val="1F335E"/>
-                </a:solidFill>
-                <a:latin typeface="Meiryo"/>
-              </a:rPr>
-              <a:t>● 「文章がうまい子をAI扱いしてしまわないか」への対策を明示しています。</a:t>
-            </a:r>
-          </a:p>
-          <a:p>
-            <a:pPr>
-              <a:spcAft>
-                <a:spcPts val="800"/>
-              </a:spcAft>
-            </a:pPr>
-            <a:r>
-              <a:rPr sz="1700" b="1">
-                <a:solidFill>
-                  <a:srgbClr val="B32A2A"/>
-                </a:solidFill>
-                <a:latin typeface="Meiryo"/>
-              </a:rPr>
-              <a:t>● 単独の特徴だけでは高スコアにしない：</a:t>
-            </a:r>
-          </a:p>
-          <a:p>
-            <a:pPr lvl="1">
-              <a:spcAft>
-                <a:spcPts val="800"/>
-              </a:spcAft>
-            </a:pPr>
-            <a:r>
-              <a:rPr sz="1500" b="0">
-                <a:solidFill>
-                  <a:srgbClr val="555555"/>
-                </a:solidFill>
-                <a:latin typeface="Meiryo"/>
-              </a:rPr>
-              <a:t>－ 「手書きだから人間」とは判断しない</a:t>
-            </a:r>
-          </a:p>
-          <a:p>
-            <a:pPr lvl="1">
-              <a:spcAft>
-                <a:spcPts val="800"/>
-              </a:spcAft>
-            </a:pPr>
-            <a:r>
-              <a:rPr sz="1500" b="0">
-                <a:solidFill>
-                  <a:srgbClr val="555555"/>
-                </a:solidFill>
-                <a:latin typeface="Meiryo"/>
-              </a:rPr>
-              <a:t>－ 「誤字脱字があるから人間」とは単独で判断しない</a:t>
-            </a:r>
-          </a:p>
-          <a:p>
-            <a:pPr lvl="1">
-              <a:spcAft>
-                <a:spcPts val="800"/>
-              </a:spcAft>
-            </a:pPr>
-            <a:r>
-              <a:rPr sz="1500" b="0">
-                <a:solidFill>
-                  <a:srgbClr val="555555"/>
-                </a:solidFill>
-                <a:latin typeface="Meiryo"/>
-              </a:rPr>
-              <a:t>－ 「文章が上手いからAI」とは判断しない</a:t>
-            </a:r>
-          </a:p>
-          <a:p>
-            <a:pPr lvl="1">
-              <a:spcAft>
-                <a:spcPts val="800"/>
-              </a:spcAft>
-            </a:pPr>
-            <a:r>
-              <a:rPr sz="1500" b="0">
-                <a:solidFill>
-                  <a:srgbClr val="555555"/>
-                </a:solidFill>
-                <a:latin typeface="Meiryo"/>
-              </a:rPr>
-              <a:t>－ 「構成が整っているからAI」とは単独で判断しない</a:t>
-            </a:r>
-          </a:p>
-          <a:p>
-            <a:pPr lvl="1">
-              <a:spcAft>
-                <a:spcPts val="800"/>
-              </a:spcAft>
-            </a:pPr>
-            <a:r>
-              <a:rPr sz="1500" b="0">
-                <a:solidFill>
-                  <a:srgbClr val="555555"/>
-                </a:solidFill>
-                <a:latin typeface="Meiryo"/>
-              </a:rPr>
-              <a:t>－ 1つの特徴だけで極端なスコアにしない／「AIが書いた」と断定しない</a:t>
-            </a:r>
-          </a:p>
-          <a:p>
-            <a:pPr>
-              <a:spcAft>
-                <a:spcPts val="800"/>
-              </a:spcAft>
-            </a:pPr>
-            <a:r>
-              <a:rPr sz="1700" b="1">
-                <a:solidFill>
-                  <a:srgbClr val="1E7A46"/>
-                </a:solidFill>
-                <a:latin typeface="Meiryo"/>
-              </a:rPr>
-              <a:t>● 高スコアにしてよいのは複数の根拠がそろう場合のみ。</a:t>
-            </a:r>
-          </a:p>
-          <a:p>
-            <a:pPr lvl="1">
-              <a:spcAft>
-                <a:spcPts val="800"/>
-              </a:spcAft>
-            </a:pPr>
-            <a:r>
-              <a:rPr sz="1500" b="0">
-                <a:solidFill>
-                  <a:srgbClr val="555555"/>
-                </a:solidFill>
-                <a:latin typeface="Meiryo"/>
-              </a:rPr>
-              <a:t>－ 具体的体験がほぼない・抽象論が続く・定型表現が多い・整いすぎ 等が同時に見られる場合。</a:t>
-            </a:r>
-          </a:p>
-        </p:txBody>
-      </p:sp>
-    </p:spTree>
-  </p:cSld>
-  <p:clrMapOvr>
-    <a:masterClrMapping/>
-  </p:clrMapOvr>
-</p:sld>
-</file>
-
-<file path=ppt/slides/slide8.xml><?xml version="1.0" encoding="utf-8"?>
-<p:sld xmlns:a="http://schemas.openxmlformats.org/drawingml/2006/main" xmlns:p="http://schemas.openxmlformats.org/presentationml/2006/main" xmlns:r="http://schemas.openxmlformats.org/officeDocument/2006/relationships">
-  <p:cSld>
-    <p:spTree>
-      <p:nvGrpSpPr>
-        <p:cNvPr id="1" name=""/>
-        <p:cNvGrpSpPr/>
-        <p:nvPr/>
-      </p:nvGrpSpPr>
-      <p:grpSpPr/>
-      <p:sp>
-        <p:nvSpPr>
-          <p:cNvPr id="2" name="Rectangle 1"/>
-          <p:cNvSpPr/>
-          <p:nvPr/>
-        </p:nvSpPr>
-        <p:spPr>
-          <a:xfrm>
-            <a:off x="0" y="0"/>
-            <a:ext cx="12191695" cy="1005840"/>
-          </a:xfrm>
-          <a:prstGeom prst="rect">
-            <a:avLst/>
-          </a:prstGeom>
-          <a:solidFill>
-            <a:srgbClr val="1F335E"/>
-          </a:solidFill>
-          <a:ln>
-            <a:noFill/>
-          </a:ln>
-          <a:effectLst/>
-        </p:spPr>
-        <p:style>
-          <a:lnRef idx="1">
-            <a:schemeClr val="accent1"/>
-          </a:lnRef>
-          <a:fillRef idx="3">
-            <a:schemeClr val="accent1"/>
-          </a:fillRef>
-          <a:effectRef idx="2">
-            <a:schemeClr val="accent1"/>
-          </a:effectRef>
-          <a:fontRef idx="minor">
-            <a:schemeClr val="lt1"/>
-          </a:fontRef>
-        </p:style>
-        <p:txBody>
-          <a:bodyPr rtlCol="0" anchor="ctr"/>
-          <a:lstStyle/>
-          <a:p>
-            <a:pPr algn="ctr"/>
-          </a:p>
-        </p:txBody>
-      </p:sp>
-      <p:sp>
-        <p:nvSpPr>
-          <p:cNvPr id="3" name="Rectangle 2"/>
-          <p:cNvSpPr/>
-          <p:nvPr/>
-        </p:nvSpPr>
-        <p:spPr>
-          <a:xfrm>
-            <a:off x="0" y="1005840"/>
-            <a:ext cx="12191695" cy="40000"/>
-          </a:xfrm>
-          <a:prstGeom prst="rect">
-            <a:avLst/>
-          </a:prstGeom>
-          <a:solidFill>
-            <a:srgbClr val="2E5CA6"/>
-          </a:solidFill>
-          <a:ln>
-            <a:noFill/>
-          </a:ln>
-          <a:effectLst/>
-        </p:spPr>
-        <p:style>
-          <a:lnRef idx="1">
-            <a:schemeClr val="accent1"/>
-          </a:lnRef>
-          <a:fillRef idx="3">
-            <a:schemeClr val="accent1"/>
-          </a:fillRef>
-          <a:effectRef idx="2">
-            <a:schemeClr val="accent1"/>
-          </a:effectRef>
-          <a:fontRef idx="minor">
-            <a:schemeClr val="lt1"/>
-          </a:fontRef>
-        </p:style>
-        <p:txBody>
-          <a:bodyPr rtlCol="0" anchor="ctr"/>
-          <a:lstStyle/>
-          <a:p>
-            <a:pPr algn="ctr"/>
-          </a:p>
-        </p:txBody>
-      </p:sp>
-      <p:sp>
-        <p:nvSpPr>
-          <p:cNvPr id="4" name="TextBox 3"/>
-          <p:cNvSpPr txBox="1"/>
-          <p:nvPr/>
-        </p:nvSpPr>
-        <p:spPr>
-          <a:xfrm>
-            <a:off x="457200" y="164592"/>
-            <a:ext cx="10515600" cy="731520"/>
-          </a:xfrm>
-          <a:prstGeom prst="rect">
-            <a:avLst/>
-          </a:prstGeom>
-          <a:noFill/>
-        </p:spPr>
-        <p:txBody>
-          <a:bodyPr wrap="none" anchor="ctr">
-            <a:spAutoFit/>
-          </a:bodyPr>
-          <a:lstStyle/>
-          <a:p>
-            <a:r>
-              <a:rPr sz="2800" b="1">
-                <a:solidFill>
-                  <a:srgbClr val="FFFFFF"/>
-                </a:solidFill>
-                <a:latin typeface="Meiryo"/>
-              </a:rPr>
-              <a:t>6. 出力形式（1件ごと）</a:t>
-            </a:r>
-          </a:p>
-        </p:txBody>
-      </p:sp>
-      <p:sp>
-        <p:nvSpPr>
-          <p:cNvPr id="5" name="TextBox 4"/>
-          <p:cNvSpPr txBox="1"/>
-          <p:nvPr/>
-        </p:nvSpPr>
-        <p:spPr>
-          <a:xfrm>
-            <a:off x="11338560" y="164592"/>
-            <a:ext cx="640080" cy="731520"/>
-          </a:xfrm>
-          <a:prstGeom prst="rect">
-            <a:avLst/>
-          </a:prstGeom>
-          <a:noFill/>
-        </p:spPr>
-        <p:txBody>
-          <a:bodyPr wrap="none" anchor="ctr">
-            <a:spAutoFit/>
-          </a:bodyPr>
-          <a:lstStyle/>
-          <a:p>
-            <a:pPr algn="r"/>
-            <a:r>
-              <a:rPr sz="1600" b="0">
-                <a:solidFill>
-                  <a:srgbClr val="FFFFFF"/>
-                </a:solidFill>
-                <a:latin typeface="Meiryo"/>
-              </a:rPr>
-              <a:t>8</a:t>
-            </a:r>
-          </a:p>
-        </p:txBody>
-      </p:sp>
-      <p:sp>
-        <p:nvSpPr>
-          <p:cNvPr id="6" name="TextBox 5"/>
-          <p:cNvSpPr txBox="1"/>
-          <p:nvPr/>
-        </p:nvSpPr>
-        <p:spPr>
-          <a:xfrm>
-            <a:off x="640080" y="1371600"/>
-            <a:ext cx="10881360" cy="5120640"/>
-          </a:xfrm>
-          <a:prstGeom prst="rect">
-            <a:avLst/>
-          </a:prstGeom>
-          <a:noFill/>
-        </p:spPr>
-        <p:txBody>
-          <a:bodyPr wrap="square">
-            <a:spAutoFit/>
-          </a:bodyPr>
-          <a:lstStyle/>
-          <a:p>
-            <a:pPr>
-              <a:spcAft>
-                <a:spcPts val="800"/>
-              </a:spcAft>
-            </a:pPr>
-            <a:r>
-              <a:rPr sz="1800" b="1">
-                <a:solidFill>
-                  <a:srgbClr val="1F335E"/>
-                </a:solidFill>
-                <a:latin typeface="Meiryo"/>
-              </a:rPr>
-              <a:t>● スコアだけでなく根拠3点をセットで残し、後から人が確認・反証できるようにしています。</a:t>
-            </a:r>
-          </a:p>
-        </p:txBody>
-      </p:sp>
-      <p:sp>
-        <p:nvSpPr>
-          <p:cNvPr id="7" name="Rectangle 6"/>
-          <p:cNvSpPr/>
-          <p:nvPr/>
-        </p:nvSpPr>
-        <p:spPr>
-          <a:xfrm>
-            <a:off x="822960" y="2286000"/>
-            <a:ext cx="10515600" cy="2743200"/>
-          </a:xfrm>
-          <a:prstGeom prst="rect">
-            <a:avLst/>
-          </a:prstGeom>
-          <a:solidFill>
-            <a:srgbClr val="EEF2F8"/>
-          </a:solidFill>
-          <a:ln>
-            <a:noFill/>
-          </a:ln>
-          <a:effectLst/>
-        </p:spPr>
-        <p:style>
-          <a:lnRef idx="1">
-            <a:schemeClr val="accent1"/>
-          </a:lnRef>
-          <a:fillRef idx="3">
-            <a:schemeClr val="accent1"/>
-          </a:fillRef>
-          <a:effectRef idx="2">
-            <a:schemeClr val="accent1"/>
-          </a:effectRef>
-          <a:fontRef idx="minor">
-            <a:schemeClr val="lt1"/>
-          </a:fontRef>
-        </p:style>
-        <p:txBody>
-          <a:bodyPr rtlCol="0" anchor="ctr"/>
-          <a:lstStyle/>
-          <a:p>
-            <a:pPr algn="ctr"/>
-          </a:p>
-        </p:txBody>
-      </p:sp>
-      <p:sp>
-        <p:nvSpPr>
-          <p:cNvPr id="8" name="TextBox 7"/>
-          <p:cNvSpPr txBox="1"/>
-          <p:nvPr/>
-        </p:nvSpPr>
-        <p:spPr>
-          <a:xfrm>
-            <a:off x="1097280" y="2468880"/>
-            <a:ext cx="10058400" cy="2468880"/>
-          </a:xfrm>
-          <a:prstGeom prst="rect">
-            <a:avLst/>
-          </a:prstGeom>
-          <a:noFill/>
-        </p:spPr>
-        <p:txBody>
-          <a:bodyPr wrap="square">
-            <a:spAutoFit/>
-          </a:bodyPr>
-          <a:lstStyle/>
-          <a:p>
-            <a:r>
-              <a:rPr sz="1800" b="0">
-                <a:solidFill>
-                  <a:srgbClr val="1F335E"/>
-                </a:solidFill>
-                <a:latin typeface="Consolas"/>
-              </a:rPr>
-              <a:t>スコア: &lt;0〜100の整数&gt;</a:t>
-            </a:r>
-          </a:p>
-          <a:p>
-            <a:r>
-              <a:rPr sz="1800" b="0">
-                <a:solidFill>
-                  <a:srgbClr val="1F335E"/>
-                </a:solidFill>
-                <a:latin typeface="Consolas"/>
-              </a:rPr>
-              <a:t/>
-            </a:r>
-          </a:p>
-          <a:p>
-            <a:r>
-              <a:rPr sz="1800" b="0">
-                <a:solidFill>
-                  <a:srgbClr val="1F335E"/>
-                </a:solidFill>
-                <a:latin typeface="Consolas"/>
-              </a:rPr>
-              <a:t>根拠:</a:t>
-            </a:r>
-          </a:p>
-          <a:p>
-            <a:r>
-              <a:rPr sz="1800" b="0">
-                <a:solidFill>
-                  <a:srgbClr val="1F335E"/>
-                </a:solidFill>
-                <a:latin typeface="Consolas"/>
-              </a:rPr>
-              <a:t>  - &lt;根拠1&gt;</a:t>
-            </a:r>
-          </a:p>
-          <a:p>
-            <a:r>
-              <a:rPr sz="1800" b="0">
-                <a:solidFill>
-                  <a:srgbClr val="1F335E"/>
-                </a:solidFill>
-                <a:latin typeface="Consolas"/>
-              </a:rPr>
-              <a:t>  - &lt;根拠2&gt;</a:t>
-            </a:r>
-          </a:p>
-          <a:p>
-            <a:r>
-              <a:rPr sz="1800" b="0">
-                <a:solidFill>
-                  <a:srgbClr val="1F335E"/>
-                </a:solidFill>
-                <a:latin typeface="Consolas"/>
-              </a:rPr>
-              <a:t>  - &lt;根拠3&gt;</a:t>
-            </a:r>
-          </a:p>
-        </p:txBody>
-      </p:sp>
-      <p:sp>
-        <p:nvSpPr>
-          <p:cNvPr id="9" name="TextBox 8"/>
-          <p:cNvSpPr txBox="1"/>
-          <p:nvPr/>
-        </p:nvSpPr>
-        <p:spPr>
-          <a:xfrm>
-            <a:off x="822960" y="5303520"/>
-            <a:ext cx="10515600" cy="914400"/>
-          </a:xfrm>
-          <a:prstGeom prst="rect">
-            <a:avLst/>
-          </a:prstGeom>
-          <a:noFill/>
-        </p:spPr>
-        <p:txBody>
-          <a:bodyPr wrap="square">
-            <a:spAutoFit/>
-          </a:bodyPr>
-          <a:lstStyle/>
-          <a:p>
-            <a:r>
-              <a:rPr sz="1600" b="0">
-                <a:solidFill>
-                  <a:srgbClr val="555555"/>
-                </a:solidFill>
-                <a:latin typeface="Meiryo"/>
-              </a:rPr>
-              <a:t>根拠は必ず3点。可能な場合は作文中の該当箇所を「」で短く引用させています。</a:t>
-            </a:r>
-          </a:p>
-        </p:txBody>
-      </p:sp>
-    </p:spTree>
-  </p:cSld>
-  <p:clrMapOvr>
-    <a:masterClrMapping/>
-  </p:clrMapOvr>
-</p:sld>
-</file>
-
-<file path=ppt/slides/slide9.xml><?xml version="1.0" encoding="utf-8"?>
-<p:sld xmlns:a="http://schemas.openxmlformats.org/drawingml/2006/main" xmlns:p="http://schemas.openxmlformats.org/presentationml/2006/main" xmlns:r="http://schemas.openxmlformats.org/officeDocument/2006/relationships">
-  <p:cSld>
-    <p:spTree>
-      <p:nvGrpSpPr>
-        <p:cNvPr id="1" name=""/>
-        <p:cNvGrpSpPr/>
-        <p:nvPr/>
-      </p:nvGrpSpPr>
-      <p:grpSpPr/>
-      <p:sp>
-        <p:nvSpPr>
-          <p:cNvPr id="2" name="Rectangle 1"/>
-          <p:cNvSpPr/>
-          <p:nvPr/>
-        </p:nvSpPr>
-        <p:spPr>
-          <a:xfrm>
-            <a:off x="0" y="0"/>
-            <a:ext cx="12191695" cy="1005840"/>
-          </a:xfrm>
-          <a:prstGeom prst="rect">
-            <a:avLst/>
-          </a:prstGeom>
-          <a:solidFill>
-            <a:srgbClr val="1F335E"/>
-          </a:solidFill>
-          <a:ln>
-            <a:noFill/>
-          </a:ln>
-          <a:effectLst/>
-        </p:spPr>
-        <p:style>
-          <a:lnRef idx="1">
-            <a:schemeClr val="accent1"/>
-          </a:lnRef>
-          <a:fillRef idx="3">
-            <a:schemeClr val="accent1"/>
-          </a:fillRef>
-          <a:effectRef idx="2">
-            <a:schemeClr val="accent1"/>
-          </a:effectRef>
-          <a:fontRef idx="minor">
-            <a:schemeClr val="lt1"/>
-          </a:fontRef>
-        </p:style>
-        <p:txBody>
-          <a:bodyPr rtlCol="0" anchor="ctr"/>
-          <a:lstStyle/>
-          <a:p>
-            <a:pPr algn="ctr"/>
-          </a:p>
-        </p:txBody>
-      </p:sp>
-      <p:sp>
-        <p:nvSpPr>
-          <p:cNvPr id="3" name="Rectangle 2"/>
-          <p:cNvSpPr/>
-          <p:nvPr/>
-        </p:nvSpPr>
-        <p:spPr>
-          <a:xfrm>
-            <a:off x="0" y="1005840"/>
-            <a:ext cx="12191695" cy="40000"/>
-          </a:xfrm>
-          <a:prstGeom prst="rect">
-            <a:avLst/>
-          </a:prstGeom>
-          <a:solidFill>
-            <a:srgbClr val="2E5CA6"/>
-          </a:solidFill>
-          <a:ln>
-            <a:noFill/>
-          </a:ln>
-          <a:effectLst/>
-        </p:spPr>
-        <p:style>
-          <a:lnRef idx="1">
-            <a:schemeClr val="accent1"/>
-          </a:lnRef>
-          <a:fillRef idx="3">
-            <a:schemeClr val="accent1"/>
-          </a:fillRef>
-          <a:effectRef idx="2">
-            <a:schemeClr val="accent1"/>
-          </a:effectRef>
-          <a:fontRef idx="minor">
-            <a:schemeClr val="lt1"/>
-          </a:fontRef>
-        </p:style>
-        <p:txBody>
-          <a:bodyPr rtlCol="0" anchor="ctr"/>
-          <a:lstStyle/>
-          <a:p>
-            <a:pPr algn="ctr"/>
-          </a:p>
-        </p:txBody>
-      </p:sp>
-      <p:sp>
-        <p:nvSpPr>
-          <p:cNvPr id="4" name="TextBox 3"/>
-          <p:cNvSpPr txBox="1"/>
-          <p:nvPr/>
-        </p:nvSpPr>
-        <p:spPr>
-          <a:xfrm>
-            <a:off x="457200" y="164592"/>
-            <a:ext cx="10515600" cy="731520"/>
-          </a:xfrm>
-          <a:prstGeom prst="rect">
-            <a:avLst/>
-          </a:prstGeom>
-          <a:noFill/>
-        </p:spPr>
-        <p:txBody>
-          <a:bodyPr wrap="none" anchor="ctr">
-            <a:spAutoFit/>
-          </a:bodyPr>
-          <a:lstStyle/>
-          <a:p>
-            <a:r>
-              <a:rPr sz="2800" b="1">
-                <a:solidFill>
-                  <a:srgbClr val="FFFFFF"/>
-                </a:solidFill>
-                <a:latin typeface="Meiryo"/>
-              </a:rPr>
-              <a:t>7. この指標の限界（必ず共有すべき点）</a:t>
-            </a:r>
-          </a:p>
-        </p:txBody>
-      </p:sp>
-      <p:sp>
-        <p:nvSpPr>
-          <p:cNvPr id="5" name="TextBox 4"/>
-          <p:cNvSpPr txBox="1"/>
-          <p:nvPr/>
-        </p:nvSpPr>
-        <p:spPr>
-          <a:xfrm>
-            <a:off x="11338560" y="164592"/>
-            <a:ext cx="640080" cy="731520"/>
-          </a:xfrm>
-          <a:prstGeom prst="rect">
-            <a:avLst/>
-          </a:prstGeom>
-          <a:noFill/>
-        </p:spPr>
-        <p:txBody>
-          <a:bodyPr wrap="none" anchor="ctr">
-            <a:spAutoFit/>
-          </a:bodyPr>
-          <a:lstStyle/>
-          <a:p>
-            <a:pPr algn="r"/>
-            <a:r>
-              <a:rPr sz="1600" b="0">
-                <a:solidFill>
-                  <a:srgbClr val="FFFFFF"/>
-                </a:solidFill>
-                <a:latin typeface="Meiryo"/>
-              </a:rPr>
-              <a:t>9</a:t>
-            </a:r>
-          </a:p>
-        </p:txBody>
-      </p:sp>
-      <p:sp>
-        <p:nvSpPr>
-          <p:cNvPr id="6" name="TextBox 5"/>
-          <p:cNvSpPr txBox="1"/>
-          <p:nvPr/>
-        </p:nvSpPr>
-        <p:spPr>
-          <a:xfrm>
-            <a:off x="640080" y="1554480"/>
-            <a:ext cx="10881360" cy="5120640"/>
-          </a:xfrm>
-          <a:prstGeom prst="rect">
-            <a:avLst/>
-          </a:prstGeom>
-          <a:noFill/>
-        </p:spPr>
-        <p:txBody>
-          <a:bodyPr wrap="square">
-            <a:spAutoFit/>
-          </a:bodyPr>
-          <a:lstStyle/>
-          <a:p>
-            <a:pPr>
-              <a:spcAft>
-                <a:spcPts val="1400"/>
-              </a:spcAft>
-            </a:pPr>
-            <a:r>
-              <a:rPr sz="2000" b="1">
-                <a:solidFill>
-                  <a:srgbClr val="B32A2A"/>
-                </a:solidFill>
-                <a:latin typeface="Meiryo"/>
-              </a:rPr>
-              <a:t>● 断定ではなく「可能性」の参考値。最終判断は必ず人が行う。</a:t>
-            </a:r>
-          </a:p>
-          <a:p>
-            <a:pPr>
-              <a:spcAft>
-                <a:spcPts val="1400"/>
-              </a:spcAft>
-            </a:pPr>
-            <a:r>
-              <a:rPr sz="2000" b="0">
-                <a:solidFill>
-                  <a:srgbClr val="555555"/>
-                </a:solidFill>
-                <a:latin typeface="Meiryo"/>
-              </a:rPr>
-              <a:t>● AI判定のため、同じ作文でもスコアが多少揺れることがある。</a:t>
-            </a:r>
-          </a:p>
-          <a:p>
-            <a:pPr>
-              <a:spcAft>
-                <a:spcPts val="1400"/>
-              </a:spcAft>
-            </a:pPr>
-            <a:r>
-              <a:rPr sz="2000" b="0">
-                <a:solidFill>
-                  <a:srgbClr val="555555"/>
-                </a:solidFill>
-                <a:latin typeface="Meiryo"/>
-              </a:rPr>
-              <a:t>● 文章力が高い生徒を過剰に疑わない設計だが、誤判定を完全には排除できない。</a:t>
-            </a:r>
-          </a:p>
-          <a:p>
-            <a:pPr>
-              <a:spcAft>
-                <a:spcPts val="1400"/>
-              </a:spcAft>
-            </a:pPr>
-            <a:r>
-              <a:rPr sz="2000" b="1">
-                <a:solidFill>
-                  <a:srgbClr val="2E5CA6"/>
-                </a:solidFill>
-                <a:latin typeface="Meiryo"/>
-              </a:rPr>
-              <a:t>● 高スコアの作文は「クロ」ではなく「人による確認を優先すべき作文」と位置づける。</a:t>
+            <a:pPr algn="l">
+              <a:spcBef>
+                <a:spcPts val="0"/>
+              </a:spcBef>
+              <a:spcAft>
+                <a:spcPts val="100"/>
+              </a:spcAft>
+            </a:pPr>
+            <a:r>
+              <a:rPr sz="1250">
+                <a:solidFill>
+                  <a:srgbClr val="1A1A1A"/>
+                </a:solidFill>
+                <a:latin typeface="ヒラギノ角ゴ ProN W3"/>
+                <a:ea typeface="ヒラギノ角ゴ ProN W3"/>
+                <a:cs typeface="ヒラギノ角ゴ ProN W3"/>
+              </a:rPr>
+              <a:t>A. いいえ。スクリーニング用の参考指標です。</a:t>
+            </a:r>
+          </a:p>
+          <a:p>
+            <a:pPr algn="l">
+              <a:spcBef>
+                <a:spcPts val="0"/>
+              </a:spcBef>
+              <a:spcAft>
+                <a:spcPts val="100"/>
+              </a:spcAft>
+            </a:pPr>
+            <a:r>
+              <a:rPr sz="1250">
+                <a:solidFill>
+                  <a:srgbClr val="1A1A1A"/>
+                </a:solidFill>
+                <a:latin typeface="ヒラギノ角ゴ ProN W3"/>
+                <a:ea typeface="ヒラギノ角ゴ ProN W3"/>
+                <a:cs typeface="ヒラギノ角ゴ ProN W3"/>
+              </a:rPr>
+              <a:t>　 高スコアの作文を抽出し、最終的には根拠と原文を人が確認して</a:t>
+            </a:r>
+          </a:p>
+          <a:p>
+            <a:pPr algn="l">
+              <a:spcBef>
+                <a:spcPts val="0"/>
+              </a:spcBef>
+              <a:spcAft>
+                <a:spcPts val="100"/>
+              </a:spcAft>
+            </a:pPr>
+            <a:r>
+              <a:rPr sz="1250">
+                <a:solidFill>
+                  <a:srgbClr val="1A1A1A"/>
+                </a:solidFill>
+                <a:latin typeface="ヒラギノ角ゴ ProN W3"/>
+                <a:ea typeface="ヒラギノ角ゴ ProN W3"/>
+                <a:cs typeface="ヒラギノ角ゴ ProN W3"/>
+              </a:rPr>
+              <a:t>　 判断する運用を想定しています。</a:t>
             </a:r>
           </a:p>
         </p:txBody>
